--- a/output/wordlabs-or-suffix-3day.pptx
+++ b/output/wordlabs-or-suffix-3day.pptx
@@ -6071,7 +6071,7 @@
                 <a:ea typeface="Calibri" pitchFamily="34" charset="-122"/>
                 <a:cs typeface="Calibri" pitchFamily="34" charset="-120"/>
               </a:rPr>
-              <a:t> asked the </a:t>
+              <a:t> gave the young </a:t>
             </a:r>
             <a:pPr algn="l" indent="0" marL="0">
               <a:buNone/>
@@ -6088,7 +6088,7 @@
                 <a:ea typeface="Calibri" pitchFamily="34" charset="-122"/>
                 <a:cs typeface="Calibri" pitchFamily="34" charset="-120"/>
               </a:rPr>
-              <a:t>director</a:t>
+              <a:t>actor</a:t>
             </a:r>
             <a:pPr algn="l" indent="0" marL="0">
               <a:buNone/>
@@ -6102,7 +6102,7 @@
                 <a:ea typeface="Calibri" pitchFamily="34" charset="-122"/>
                 <a:cs typeface="Calibri" pitchFamily="34" charset="-120"/>
               </a:rPr>
-              <a:t> to review the script before filming began.</a:t>
+              <a:t> some helpful advice before the performance.</a:t>
             </a:r>
             <a:endParaRPr lang="en-US" sz="1800" dirty="0"/>
           </a:p>
@@ -6385,7 +6385,7 @@
                 <a:ea typeface="Trebuchet MS" pitchFamily="34" charset="-122"/>
                 <a:cs typeface="Trebuchet MS" pitchFamily="34" charset="-120"/>
               </a:rPr>
-              <a:t>director</a:t>
+              <a:t>actor</a:t>
             </a:r>
             <a:endParaRPr lang="en-US" sz="1400" dirty="0"/>
           </a:p>
@@ -7860,7 +7860,7 @@
                 <a:ea typeface="Calibri" pitchFamily="34" charset="-122"/>
                 <a:cs typeface="Calibri" pitchFamily="34" charset="-120"/>
               </a:rPr>
-              <a:t>to correct or revise</a:t>
+              <a:t>to correct or prepare text</a:t>
             </a:r>
             <a:endParaRPr lang="en-US" sz="850" dirty="0"/>
           </a:p>
@@ -8845,7 +8845,7 @@
                 <a:ea typeface="Calibri" pitchFamily="34" charset="-122"/>
                 <a:cs typeface="Calibri" pitchFamily="34" charset="-120"/>
               </a:rPr>
-              <a:t>to correct or revise</a:t>
+              <a:t>to correct or prepare text</a:t>
             </a:r>
             <a:endParaRPr lang="en-US" sz="850" dirty="0"/>
           </a:p>
@@ -9221,7 +9221,7 @@
                 <a:ea typeface="Trebuchet MS" pitchFamily="34" charset="-122"/>
                 <a:cs typeface="Trebuchet MS" pitchFamily="34" charset="-120"/>
               </a:rPr>
-              <a:t>i</a:t>
+              <a:t>it</a:t>
             </a:r>
             <a:endParaRPr lang="en-US" sz="1400" dirty="0"/>
           </a:p>
@@ -9326,7 +9326,7 @@
                 <a:ea typeface="Trebuchet MS" pitchFamily="34" charset="-122"/>
                 <a:cs typeface="Trebuchet MS" pitchFamily="34" charset="-120"/>
               </a:rPr>
-              <a:t>tor</a:t>
+              <a:t>or</a:t>
             </a:r>
             <a:endParaRPr lang="en-US" sz="1400" dirty="0"/>
           </a:p>
@@ -10067,7 +10067,7 @@
                 <a:ea typeface="Calibri" pitchFamily="34" charset="-122"/>
                 <a:cs typeface="Calibri" pitchFamily="34" charset="-120"/>
               </a:rPr>
-              <a:t>to correct or revise</a:t>
+              <a:t>to correct or prepare text</a:t>
             </a:r>
             <a:endParaRPr lang="en-US" sz="850" dirty="0"/>
           </a:p>
@@ -10443,7 +10443,7 @@
                 <a:ea typeface="Trebuchet MS" pitchFamily="34" charset="-122"/>
                 <a:cs typeface="Trebuchet MS" pitchFamily="34" charset="-120"/>
               </a:rPr>
-              <a:t>i</a:t>
+              <a:t>it</a:t>
             </a:r>
             <a:endParaRPr lang="en-US" sz="1400" dirty="0"/>
           </a:p>
@@ -10548,7 +10548,7 @@
                 <a:ea typeface="Trebuchet MS" pitchFamily="34" charset="-122"/>
                 <a:cs typeface="Trebuchet MS" pitchFamily="34" charset="-120"/>
               </a:rPr>
-              <a:t>tor</a:t>
+              <a:t>or</a:t>
             </a:r>
             <a:endParaRPr lang="en-US" sz="1400" dirty="0"/>
           </a:p>
@@ -11402,7 +11402,7 @@
                 <a:ea typeface="Trebuchet MS" pitchFamily="34" charset="-122"/>
                 <a:cs typeface="Trebuchet MS" pitchFamily="34" charset="-120"/>
               </a:rPr>
-              <a:t>director</a:t>
+              <a:t>actor</a:t>
             </a:r>
             <a:endParaRPr lang="en-US" sz="2800" dirty="0"/>
           </a:p>
@@ -12229,7 +12229,7 @@
                 <a:ea typeface="Trebuchet MS" pitchFamily="34" charset="-122"/>
                 <a:cs typeface="Trebuchet MS" pitchFamily="34" charset="-120"/>
               </a:rPr>
-              <a:t>director</a:t>
+              <a:t>actor</a:t>
             </a:r>
             <a:endParaRPr lang="en-US" sz="2800" dirty="0"/>
           </a:p>
@@ -12309,7 +12309,7 @@
         </p:nvSpPr>
         <p:spPr>
           <a:xfrm>
-            <a:off x="2221992" y="2258568"/>
+            <a:off x="2938272" y="2258568"/>
             <a:ext cx="1828800" cy="292608"/>
           </a:xfrm>
           <a:prstGeom prst="rect">
@@ -12343,7 +12343,7 @@
         </p:nvSpPr>
         <p:spPr>
           <a:xfrm>
-            <a:off x="2221992" y="2258568"/>
+            <a:off x="2938272" y="2258568"/>
             <a:ext cx="1828800" cy="292608"/>
           </a:xfrm>
           <a:prstGeom prst="rect">
@@ -12368,7 +12368,7 @@
                 <a:ea typeface="Trebuchet MS" pitchFamily="34" charset="-122"/>
                 <a:cs typeface="Trebuchet MS" pitchFamily="34" charset="-120"/>
               </a:rPr>
-              <a:t>di</a:t>
+              <a:t>act</a:t>
             </a:r>
             <a:endParaRPr lang="en-US" sz="1300" dirty="0"/>
           </a:p>
@@ -12382,7 +12382,7 @@
         </p:nvSpPr>
         <p:spPr>
           <a:xfrm>
-            <a:off x="2221992" y="2569464"/>
+            <a:off x="2938272" y="2569464"/>
             <a:ext cx="1828800" cy="201168"/>
           </a:xfrm>
           <a:prstGeom prst="rect">
@@ -12407,7 +12407,7 @@
                 <a:ea typeface="Calibri" pitchFamily="34" charset="-122"/>
                 <a:cs typeface="Calibri" pitchFamily="34" charset="-120"/>
               </a:rPr>
-              <a:t>apart</a:t>
+              <a:t>to perform or do</a:t>
             </a:r>
             <a:endParaRPr lang="en-US" sz="850" dirty="0"/>
           </a:p>
@@ -12415,52 +12415,13 @@
       </p:sp>
       <p:sp>
         <p:nvSpPr>
-          <p:cNvPr id="19" name="Text 17"/>
-          <p:cNvSpPr/>
-          <p:nvPr/>
-        </p:nvSpPr>
-        <p:spPr>
-          <a:xfrm>
-            <a:off x="2221992" y="2752344"/>
-            <a:ext cx="1828800" cy="182880"/>
-          </a:xfrm>
-          <a:prstGeom prst="rect">
-            <a:avLst/>
-          </a:prstGeom>
-          <a:noFill/>
-          <a:ln/>
-        </p:spPr>
-        <p:txBody>
-          <a:bodyPr wrap="square" lIns="0" tIns="0" rIns="0" bIns="0" rtlCol="0" anchor="t"/>
-          <a:lstStyle/>
-          <a:p>
-            <a:pPr algn="ctr" indent="0" marL="0">
-              <a:buNone/>
-            </a:pPr>
-            <a:r>
-              <a:rPr lang="en-US" sz="700" i="1" dirty="0">
-                <a:solidFill>
-                  <a:srgbClr val="94A3B8"/>
-                </a:solidFill>
-                <a:latin typeface="Calibri" pitchFamily="34" charset="0"/>
-                <a:ea typeface="Calibri" pitchFamily="34" charset="-122"/>
-                <a:cs typeface="Calibri" pitchFamily="34" charset="-120"/>
-              </a:rPr>
-              <a:t>dis → di before 'r'</a:t>
-            </a:r>
-            <a:endParaRPr lang="en-US" sz="700" dirty="0"/>
-          </a:p>
-        </p:txBody>
-      </p:sp>
-      <p:sp>
-        <p:nvSpPr>
-          <p:cNvPr id="20" name="Shape 18"/>
-          <p:cNvSpPr/>
-          <p:nvPr/>
-        </p:nvSpPr>
-        <p:spPr>
-          <a:xfrm>
-            <a:off x="4370832" y="2258568"/>
+          <p:cNvPr id="19" name="Shape 17"/>
+          <p:cNvSpPr/>
+          <p:nvPr/>
+        </p:nvSpPr>
+        <p:spPr>
+          <a:xfrm>
+            <a:off x="5803392" y="2258568"/>
             <a:ext cx="1828800" cy="292608"/>
           </a:xfrm>
           <a:prstGeom prst="rect">
@@ -12469,11 +12430,11 @@
             </a:avLst>
           </a:prstGeom>
           <a:solidFill>
-            <a:srgbClr val="FCE7F3"/>
+            <a:srgbClr val="CCFBF1"/>
           </a:solidFill>
           <a:ln w="19050">
             <a:solidFill>
-              <a:srgbClr val="DB2777"/>
+              <a:srgbClr val="0D9488"/>
             </a:solidFill>
             <a:prstDash val="solid"/>
           </a:ln>
@@ -12488,13 +12449,13 @@
       </p:sp>
       <p:sp>
         <p:nvSpPr>
-          <p:cNvPr id="21" name="Text 19"/>
-          <p:cNvSpPr/>
-          <p:nvPr/>
-        </p:nvSpPr>
-        <p:spPr>
-          <a:xfrm>
-            <a:off x="4370832" y="2258568"/>
+          <p:cNvPr id="20" name="Text 18"/>
+          <p:cNvSpPr/>
+          <p:nvPr/>
+        </p:nvSpPr>
+        <p:spPr>
+          <a:xfrm>
+            <a:off x="5803392" y="2258568"/>
             <a:ext cx="1828800" cy="292608"/>
           </a:xfrm>
           <a:prstGeom prst="rect">
@@ -12513,13 +12474,13 @@
             <a:r>
               <a:rPr lang="en-US" sz="1300" b="1" dirty="0">
                 <a:solidFill>
-                  <a:srgbClr val="9D174D"/>
+                  <a:srgbClr val="0F766E"/>
                 </a:solidFill>
                 <a:latin typeface="Trebuchet MS" pitchFamily="34" charset="0"/>
                 <a:ea typeface="Trebuchet MS" pitchFamily="34" charset="-122"/>
                 <a:cs typeface="Trebuchet MS" pitchFamily="34" charset="-120"/>
               </a:rPr>
-              <a:t>rect</a:t>
+              <a:t>or</a:t>
             </a:r>
             <a:endParaRPr lang="en-US" sz="1300" dirty="0"/>
           </a:p>
@@ -12527,13 +12488,13 @@
       </p:sp>
       <p:sp>
         <p:nvSpPr>
-          <p:cNvPr id="22" name="Text 20"/>
-          <p:cNvSpPr/>
-          <p:nvPr/>
-        </p:nvSpPr>
-        <p:spPr>
-          <a:xfrm>
-            <a:off x="4370832" y="2569464"/>
+          <p:cNvPr id="21" name="Text 19"/>
+          <p:cNvSpPr/>
+          <p:nvPr/>
+        </p:nvSpPr>
+        <p:spPr>
+          <a:xfrm>
+            <a:off x="5803392" y="2569464"/>
             <a:ext cx="1828800" cy="201168"/>
           </a:xfrm>
           <a:prstGeom prst="rect">
@@ -12558,7 +12519,7 @@
                 <a:ea typeface="Calibri" pitchFamily="34" charset="-122"/>
                 <a:cs typeface="Calibri" pitchFamily="34" charset="-120"/>
               </a:rPr>
-              <a:t>to guide or lead straight</a:t>
+              <a:t>one who does</a:t>
             </a:r>
             <a:endParaRPr lang="en-US" sz="850" dirty="0"/>
           </a:p>
@@ -12566,76 +12527,96 @@
       </p:sp>
       <p:sp>
         <p:nvSpPr>
-          <p:cNvPr id="23" name="Shape 21"/>
-          <p:cNvSpPr/>
-          <p:nvPr/>
-        </p:nvSpPr>
-        <p:spPr>
-          <a:xfrm>
-            <a:off x="6519672" y="2258568"/>
-            <a:ext cx="1828800" cy="292608"/>
+          <p:cNvPr id="22" name="Shape 20"/>
+          <p:cNvSpPr/>
+          <p:nvPr/>
+        </p:nvSpPr>
+        <p:spPr>
+          <a:xfrm>
+            <a:off x="365760" y="3273552"/>
+            <a:ext cx="1371600" cy="658368"/>
           </a:xfrm>
           <a:prstGeom prst="rect">
             <a:avLst>
-              <a:gd name="adj" fmla="val 25000"/>
+              <a:gd name="adj" fmla="val 8333"/>
             </a:avLst>
           </a:prstGeom>
           <a:solidFill>
-            <a:srgbClr val="CCFBF1"/>
-          </a:solidFill>
-          <a:ln w="19050">
-            <a:solidFill>
-              <a:srgbClr val="0D9488"/>
-            </a:solidFill>
-            <a:prstDash val="solid"/>
-          </a:ln>
-          <a:effectLst>
-            <a:outerShdw sx="100000" sy="100000" kx="0" ky="0" algn="bl" rotWithShape="0" blurRad="101600" dist="38100" dir="8100000">
-              <a:srgbClr val="000000">
-                <a:alpha val="12000"/>
-              </a:srgbClr>
-            </a:outerShdw>
-          </a:effectLst>
-        </p:spPr>
-      </p:sp>
-      <p:sp>
-        <p:nvSpPr>
-          <p:cNvPr id="24" name="Text 22"/>
-          <p:cNvSpPr/>
-          <p:nvPr/>
-        </p:nvSpPr>
-        <p:spPr>
-          <a:xfrm>
-            <a:off x="6519672" y="2258568"/>
-            <a:ext cx="1828800" cy="292608"/>
-          </a:xfrm>
-          <a:prstGeom prst="rect">
-            <a:avLst/>
-          </a:prstGeom>
-          <a:noFill/>
-          <a:ln/>
-        </p:spPr>
-        <p:txBody>
-          <a:bodyPr wrap="square" lIns="0" tIns="0" rIns="0" bIns="0" rtlCol="0" anchor="ctr"/>
-          <a:lstStyle/>
-          <a:p>
-            <a:pPr algn="ctr" indent="0" marL="0">
-              <a:buNone/>
-            </a:pPr>
-            <a:r>
-              <a:rPr lang="en-US" sz="1300" b="1" dirty="0">
-                <a:solidFill>
-                  <a:srgbClr val="0F766E"/>
+            <a:srgbClr val="E2E8F0"/>
+          </a:solidFill>
+          <a:ln w="12700">
+            <a:solidFill>
+              <a:srgbClr val="E2E8F0"/>
+            </a:solidFill>
+            <a:prstDash val="solid"/>
+          </a:ln>
+        </p:spPr>
+      </p:sp>
+      <p:sp>
+        <p:nvSpPr>
+          <p:cNvPr id="23" name="Text 21"/>
+          <p:cNvSpPr/>
+          <p:nvPr/>
+        </p:nvSpPr>
+        <p:spPr>
+          <a:xfrm>
+            <a:off x="365760" y="3273552"/>
+            <a:ext cx="1371600" cy="658368"/>
+          </a:xfrm>
+          <a:prstGeom prst="rect">
+            <a:avLst/>
+          </a:prstGeom>
+          <a:noFill/>
+          <a:ln/>
+        </p:spPr>
+        <p:txBody>
+          <a:bodyPr wrap="square" lIns="0" tIns="0" rIns="0" bIns="0" rtlCol="0" anchor="ctr"/>
+          <a:lstStyle/>
+          <a:p>
+            <a:pPr algn="ctr" indent="0" marL="0">
+              <a:buNone/>
+            </a:pPr>
+            <a:r>
+              <a:rPr lang="en-US" sz="1100" b="1" dirty="0">
+                <a:solidFill>
+                  <a:srgbClr val="475569"/>
                 </a:solidFill>
                 <a:latin typeface="Trebuchet MS" pitchFamily="34" charset="0"/>
                 <a:ea typeface="Trebuchet MS" pitchFamily="34" charset="-122"/>
                 <a:cs typeface="Trebuchet MS" pitchFamily="34" charset="-120"/>
               </a:rPr>
-              <a:t>or</a:t>
-            </a:r>
-            <a:endParaRPr lang="en-US" sz="1300" dirty="0"/>
-          </a:p>
-        </p:txBody>
+              <a:t>Syllables</a:t>
+            </a:r>
+            <a:endParaRPr lang="en-US" sz="1100" dirty="0"/>
+          </a:p>
+        </p:txBody>
+      </p:sp>
+      <p:sp>
+        <p:nvSpPr>
+          <p:cNvPr id="24" name="Shape 22"/>
+          <p:cNvSpPr/>
+          <p:nvPr/>
+        </p:nvSpPr>
+        <p:spPr>
+          <a:xfrm>
+            <a:off x="1874520" y="3273552"/>
+            <a:ext cx="6903720" cy="658368"/>
+          </a:xfrm>
+          <a:prstGeom prst="rect">
+            <a:avLst>
+              <a:gd name="adj" fmla="val 8333"/>
+            </a:avLst>
+          </a:prstGeom>
+          <a:solidFill>
+            <a:srgbClr val="F8FAFC"/>
+          </a:solidFill>
+          <a:ln w="12700">
+            <a:solidFill>
+              <a:srgbClr val="E2E8F0"/>
+            </a:solidFill>
+            <a:prstDash val="dash"/>
+          </a:ln>
+        </p:spPr>
       </p:sp>
       <p:sp>
         <p:nvSpPr>
@@ -12645,34 +12626,34 @@
         </p:nvSpPr>
         <p:spPr>
           <a:xfrm>
-            <a:off x="6519672" y="2569464"/>
-            <a:ext cx="1828800" cy="201168"/>
-          </a:xfrm>
-          <a:prstGeom prst="rect">
-            <a:avLst/>
-          </a:prstGeom>
-          <a:noFill/>
-          <a:ln/>
-        </p:spPr>
-        <p:txBody>
-          <a:bodyPr wrap="square" lIns="0" tIns="0" rIns="0" bIns="0" rtlCol="0" anchor="t"/>
-          <a:lstStyle/>
-          <a:p>
-            <a:pPr algn="ctr" indent="0" marL="0">
-              <a:buNone/>
-            </a:pPr>
-            <a:r>
-              <a:rPr lang="en-US" sz="850" dirty="0">
-                <a:solidFill>
-                  <a:srgbClr val="475569"/>
+            <a:off x="1874520" y="3273552"/>
+            <a:ext cx="6903720" cy="658368"/>
+          </a:xfrm>
+          <a:prstGeom prst="rect">
+            <a:avLst/>
+          </a:prstGeom>
+          <a:noFill/>
+          <a:ln/>
+        </p:spPr>
+        <p:txBody>
+          <a:bodyPr wrap="square" rtlCol="0" anchor="ctr"/>
+          <a:lstStyle/>
+          <a:p>
+            <a:pPr algn="ctr" indent="0" marL="0">
+              <a:buNone/>
+            </a:pPr>
+            <a:r>
+              <a:rPr lang="en-US" sz="1100" i="1" dirty="0">
+                <a:solidFill>
+                  <a:srgbClr val="CBD5E1"/>
                 </a:solidFill>
                 <a:latin typeface="Calibri" pitchFamily="34" charset="0"/>
                 <a:ea typeface="Calibri" pitchFamily="34" charset="-122"/>
                 <a:cs typeface="Calibri" pitchFamily="34" charset="-120"/>
               </a:rPr>
-              <a:t>one who does</a:t>
-            </a:r>
-            <a:endParaRPr lang="en-US" sz="850" dirty="0"/>
+              <a:t>Write here...</a:t>
+            </a:r>
+            <a:endParaRPr lang="en-US" sz="1100" dirty="0"/>
           </a:p>
         </p:txBody>
       </p:sp>
@@ -12684,12 +12665,12 @@
         </p:nvSpPr>
         <p:spPr>
           <a:xfrm>
-            <a:off x="365760" y="3273552"/>
-            <a:ext cx="1371600" cy="658368"/>
+            <a:off x="365760" y="4096512"/>
+            <a:ext cx="1371600" cy="804672"/>
           </a:xfrm>
           <a:prstGeom prst="rect">
             <a:avLst>
-              <a:gd name="adj" fmla="val 8333"/>
+              <a:gd name="adj" fmla="val 6818"/>
             </a:avLst>
           </a:prstGeom>
           <a:solidFill>
@@ -12711,8 +12692,8 @@
         </p:nvSpPr>
         <p:spPr>
           <a:xfrm>
-            <a:off x="365760" y="3273552"/>
-            <a:ext cx="1371600" cy="658368"/>
+            <a:off x="365760" y="4096512"/>
+            <a:ext cx="1371600" cy="804672"/>
           </a:xfrm>
           <a:prstGeom prst="rect">
             <a:avLst/>
@@ -12736,7 +12717,7 @@
                 <a:ea typeface="Trebuchet MS" pitchFamily="34" charset="-122"/>
                 <a:cs typeface="Trebuchet MS" pitchFamily="34" charset="-120"/>
               </a:rPr>
-              <a:t>Syllables</a:t>
+              <a:t>Phonemes</a:t>
             </a:r>
             <a:endParaRPr lang="en-US" sz="1100" dirty="0"/>
           </a:p>
@@ -12750,74 +12731,8 @@
         </p:nvSpPr>
         <p:spPr>
           <a:xfrm>
-            <a:off x="1874520" y="3273552"/>
-            <a:ext cx="6903720" cy="658368"/>
-          </a:xfrm>
-          <a:prstGeom prst="rect">
-            <a:avLst>
-              <a:gd name="adj" fmla="val 8333"/>
-            </a:avLst>
-          </a:prstGeom>
-          <a:solidFill>
-            <a:srgbClr val="F8FAFC"/>
-          </a:solidFill>
-          <a:ln w="12700">
-            <a:solidFill>
-              <a:srgbClr val="E2E8F0"/>
-            </a:solidFill>
-            <a:prstDash val="dash"/>
-          </a:ln>
-        </p:spPr>
-      </p:sp>
-      <p:sp>
-        <p:nvSpPr>
-          <p:cNvPr id="29" name="Text 27"/>
-          <p:cNvSpPr/>
-          <p:nvPr/>
-        </p:nvSpPr>
-        <p:spPr>
-          <a:xfrm>
-            <a:off x="1874520" y="3273552"/>
-            <a:ext cx="6903720" cy="658368"/>
-          </a:xfrm>
-          <a:prstGeom prst="rect">
-            <a:avLst/>
-          </a:prstGeom>
-          <a:noFill/>
-          <a:ln/>
-        </p:spPr>
-        <p:txBody>
-          <a:bodyPr wrap="square" rtlCol="0" anchor="ctr"/>
-          <a:lstStyle/>
-          <a:p>
-            <a:pPr algn="ctr" indent="0" marL="0">
-              <a:buNone/>
-            </a:pPr>
-            <a:r>
-              <a:rPr lang="en-US" sz="1100" i="1" dirty="0">
-                <a:solidFill>
-                  <a:srgbClr val="CBD5E1"/>
-                </a:solidFill>
-                <a:latin typeface="Calibri" pitchFamily="34" charset="0"/>
-                <a:ea typeface="Calibri" pitchFamily="34" charset="-122"/>
-                <a:cs typeface="Calibri" pitchFamily="34" charset="-120"/>
-              </a:rPr>
-              <a:t>Write here...</a:t>
-            </a:r>
-            <a:endParaRPr lang="en-US" sz="1100" dirty="0"/>
-          </a:p>
-        </p:txBody>
-      </p:sp>
-      <p:sp>
-        <p:nvSpPr>
-          <p:cNvPr id="30" name="Shape 28"/>
-          <p:cNvSpPr/>
-          <p:nvPr/>
-        </p:nvSpPr>
-        <p:spPr>
-          <a:xfrm>
-            <a:off x="365760" y="4096512"/>
-            <a:ext cx="1371600" cy="804672"/>
+            <a:off x="1874520" y="4096512"/>
+            <a:ext cx="6903720" cy="804672"/>
           </a:xfrm>
           <a:prstGeom prst="rect">
             <a:avLst>
@@ -12825,85 +12740,19 @@
             </a:avLst>
           </a:prstGeom>
           <a:solidFill>
-            <a:srgbClr val="E2E8F0"/>
+            <a:srgbClr val="F8FAFC"/>
           </a:solidFill>
           <a:ln w="12700">
             <a:solidFill>
               <a:srgbClr val="E2E8F0"/>
             </a:solidFill>
-            <a:prstDash val="solid"/>
-          </a:ln>
-        </p:spPr>
-      </p:sp>
-      <p:sp>
-        <p:nvSpPr>
-          <p:cNvPr id="31" name="Text 29"/>
-          <p:cNvSpPr/>
-          <p:nvPr/>
-        </p:nvSpPr>
-        <p:spPr>
-          <a:xfrm>
-            <a:off x="365760" y="4096512"/>
-            <a:ext cx="1371600" cy="804672"/>
-          </a:xfrm>
-          <a:prstGeom prst="rect">
-            <a:avLst/>
-          </a:prstGeom>
-          <a:noFill/>
-          <a:ln/>
-        </p:spPr>
-        <p:txBody>
-          <a:bodyPr wrap="square" lIns="0" tIns="0" rIns="0" bIns="0" rtlCol="0" anchor="ctr"/>
-          <a:lstStyle/>
-          <a:p>
-            <a:pPr algn="ctr" indent="0" marL="0">
-              <a:buNone/>
-            </a:pPr>
-            <a:r>
-              <a:rPr lang="en-US" sz="1100" b="1" dirty="0">
-                <a:solidFill>
-                  <a:srgbClr val="475569"/>
-                </a:solidFill>
-                <a:latin typeface="Trebuchet MS" pitchFamily="34" charset="0"/>
-                <a:ea typeface="Trebuchet MS" pitchFamily="34" charset="-122"/>
-                <a:cs typeface="Trebuchet MS" pitchFamily="34" charset="-120"/>
-              </a:rPr>
-              <a:t>Phonemes</a:t>
-            </a:r>
-            <a:endParaRPr lang="en-US" sz="1100" dirty="0"/>
-          </a:p>
-        </p:txBody>
-      </p:sp>
-      <p:sp>
-        <p:nvSpPr>
-          <p:cNvPr id="32" name="Shape 30"/>
-          <p:cNvSpPr/>
-          <p:nvPr/>
-        </p:nvSpPr>
-        <p:spPr>
-          <a:xfrm>
-            <a:off x="1874520" y="4096512"/>
-            <a:ext cx="6903720" cy="804672"/>
-          </a:xfrm>
-          <a:prstGeom prst="rect">
-            <a:avLst>
-              <a:gd name="adj" fmla="val 6818"/>
-            </a:avLst>
-          </a:prstGeom>
-          <a:solidFill>
-            <a:srgbClr val="F8FAFC"/>
-          </a:solidFill>
-          <a:ln w="12700">
-            <a:solidFill>
-              <a:srgbClr val="E2E8F0"/>
-            </a:solidFill>
             <a:prstDash val="dash"/>
           </a:ln>
         </p:spPr>
       </p:sp>
       <p:sp>
         <p:nvSpPr>
-          <p:cNvPr id="33" name="Text 31"/>
+          <p:cNvPr id="29" name="Text 27"/>
           <p:cNvSpPr/>
           <p:nvPr/>
         </p:nvSpPr>
@@ -13365,7 +13214,7 @@
                 <a:ea typeface="Trebuchet MS" pitchFamily="34" charset="-122"/>
                 <a:cs typeface="Trebuchet MS" pitchFamily="34" charset="-120"/>
               </a:rPr>
-              <a:t>director</a:t>
+              <a:t>actor</a:t>
             </a:r>
             <a:endParaRPr lang="en-US" sz="2800" dirty="0"/>
           </a:p>
@@ -13445,7 +13294,7 @@
         </p:nvSpPr>
         <p:spPr>
           <a:xfrm>
-            <a:off x="2221992" y="2258568"/>
+            <a:off x="2938272" y="2258568"/>
             <a:ext cx="1828800" cy="292608"/>
           </a:xfrm>
           <a:prstGeom prst="rect">
@@ -13479,7 +13328,7 @@
         </p:nvSpPr>
         <p:spPr>
           <a:xfrm>
-            <a:off x="2221992" y="2258568"/>
+            <a:off x="2938272" y="2258568"/>
             <a:ext cx="1828800" cy="292608"/>
           </a:xfrm>
           <a:prstGeom prst="rect">
@@ -13504,7 +13353,7 @@
                 <a:ea typeface="Trebuchet MS" pitchFamily="34" charset="-122"/>
                 <a:cs typeface="Trebuchet MS" pitchFamily="34" charset="-120"/>
               </a:rPr>
-              <a:t>di</a:t>
+              <a:t>act</a:t>
             </a:r>
             <a:endParaRPr lang="en-US" sz="1300" dirty="0"/>
           </a:p>
@@ -13518,7 +13367,7 @@
         </p:nvSpPr>
         <p:spPr>
           <a:xfrm>
-            <a:off x="2221992" y="2569464"/>
+            <a:off x="2938272" y="2569464"/>
             <a:ext cx="1828800" cy="201168"/>
           </a:xfrm>
           <a:prstGeom prst="rect">
@@ -13543,7 +13392,7 @@
                 <a:ea typeface="Calibri" pitchFamily="34" charset="-122"/>
                 <a:cs typeface="Calibri" pitchFamily="34" charset="-120"/>
               </a:rPr>
-              <a:t>apart</a:t>
+              <a:t>to perform or do</a:t>
             </a:r>
             <a:endParaRPr lang="en-US" sz="850" dirty="0"/>
           </a:p>
@@ -13551,52 +13400,13 @@
       </p:sp>
       <p:sp>
         <p:nvSpPr>
-          <p:cNvPr id="19" name="Text 17"/>
-          <p:cNvSpPr/>
-          <p:nvPr/>
-        </p:nvSpPr>
-        <p:spPr>
-          <a:xfrm>
-            <a:off x="2221992" y="2752344"/>
-            <a:ext cx="1828800" cy="182880"/>
-          </a:xfrm>
-          <a:prstGeom prst="rect">
-            <a:avLst/>
-          </a:prstGeom>
-          <a:noFill/>
-          <a:ln/>
-        </p:spPr>
-        <p:txBody>
-          <a:bodyPr wrap="square" lIns="0" tIns="0" rIns="0" bIns="0" rtlCol="0" anchor="t"/>
-          <a:lstStyle/>
-          <a:p>
-            <a:pPr algn="ctr" indent="0" marL="0">
-              <a:buNone/>
-            </a:pPr>
-            <a:r>
-              <a:rPr lang="en-US" sz="700" i="1" dirty="0">
-                <a:solidFill>
-                  <a:srgbClr val="94A3B8"/>
-                </a:solidFill>
-                <a:latin typeface="Calibri" pitchFamily="34" charset="0"/>
-                <a:ea typeface="Calibri" pitchFamily="34" charset="-122"/>
-                <a:cs typeface="Calibri" pitchFamily="34" charset="-120"/>
-              </a:rPr>
-              <a:t>dis → di before 'r'</a:t>
-            </a:r>
-            <a:endParaRPr lang="en-US" sz="700" dirty="0"/>
-          </a:p>
-        </p:txBody>
-      </p:sp>
-      <p:sp>
-        <p:nvSpPr>
-          <p:cNvPr id="20" name="Shape 18"/>
-          <p:cNvSpPr/>
-          <p:nvPr/>
-        </p:nvSpPr>
-        <p:spPr>
-          <a:xfrm>
-            <a:off x="4370832" y="2258568"/>
+          <p:cNvPr id="19" name="Shape 17"/>
+          <p:cNvSpPr/>
+          <p:nvPr/>
+        </p:nvSpPr>
+        <p:spPr>
+          <a:xfrm>
+            <a:off x="5803392" y="2258568"/>
             <a:ext cx="1828800" cy="292608"/>
           </a:xfrm>
           <a:prstGeom prst="rect">
@@ -13605,11 +13415,11 @@
             </a:avLst>
           </a:prstGeom>
           <a:solidFill>
-            <a:srgbClr val="FCE7F3"/>
+            <a:srgbClr val="CCFBF1"/>
           </a:solidFill>
           <a:ln w="19050">
             <a:solidFill>
-              <a:srgbClr val="DB2777"/>
+              <a:srgbClr val="0D9488"/>
             </a:solidFill>
             <a:prstDash val="solid"/>
           </a:ln>
@@ -13624,13 +13434,13 @@
       </p:sp>
       <p:sp>
         <p:nvSpPr>
-          <p:cNvPr id="21" name="Text 19"/>
-          <p:cNvSpPr/>
-          <p:nvPr/>
-        </p:nvSpPr>
-        <p:spPr>
-          <a:xfrm>
-            <a:off x="4370832" y="2258568"/>
+          <p:cNvPr id="20" name="Text 18"/>
+          <p:cNvSpPr/>
+          <p:nvPr/>
+        </p:nvSpPr>
+        <p:spPr>
+          <a:xfrm>
+            <a:off x="5803392" y="2258568"/>
             <a:ext cx="1828800" cy="292608"/>
           </a:xfrm>
           <a:prstGeom prst="rect">
@@ -13649,13 +13459,13 @@
             <a:r>
               <a:rPr lang="en-US" sz="1300" b="1" dirty="0">
                 <a:solidFill>
-                  <a:srgbClr val="9D174D"/>
+                  <a:srgbClr val="0F766E"/>
                 </a:solidFill>
                 <a:latin typeface="Trebuchet MS" pitchFamily="34" charset="0"/>
                 <a:ea typeface="Trebuchet MS" pitchFamily="34" charset="-122"/>
                 <a:cs typeface="Trebuchet MS" pitchFamily="34" charset="-120"/>
               </a:rPr>
-              <a:t>rect</a:t>
+              <a:t>or</a:t>
             </a:r>
             <a:endParaRPr lang="en-US" sz="1300" dirty="0"/>
           </a:p>
@@ -13663,13 +13473,13 @@
       </p:sp>
       <p:sp>
         <p:nvSpPr>
-          <p:cNvPr id="22" name="Text 20"/>
-          <p:cNvSpPr/>
-          <p:nvPr/>
-        </p:nvSpPr>
-        <p:spPr>
-          <a:xfrm>
-            <a:off x="4370832" y="2569464"/>
+          <p:cNvPr id="21" name="Text 19"/>
+          <p:cNvSpPr/>
+          <p:nvPr/>
+        </p:nvSpPr>
+        <p:spPr>
+          <a:xfrm>
+            <a:off x="5803392" y="2569464"/>
             <a:ext cx="1828800" cy="201168"/>
           </a:xfrm>
           <a:prstGeom prst="rect">
@@ -13694,7 +13504,7 @@
                 <a:ea typeface="Calibri" pitchFamily="34" charset="-122"/>
                 <a:cs typeface="Calibri" pitchFamily="34" charset="-120"/>
               </a:rPr>
-              <a:t>to guide or lead straight</a:t>
+              <a:t>one who does</a:t>
             </a:r>
             <a:endParaRPr lang="en-US" sz="850" dirty="0"/>
           </a:p>
@@ -13702,126 +13512,80 @@
       </p:sp>
       <p:sp>
         <p:nvSpPr>
-          <p:cNvPr id="23" name="Shape 21"/>
-          <p:cNvSpPr/>
-          <p:nvPr/>
-        </p:nvSpPr>
-        <p:spPr>
-          <a:xfrm>
-            <a:off x="6519672" y="2258568"/>
-            <a:ext cx="1828800" cy="292608"/>
+          <p:cNvPr id="22" name="Shape 20"/>
+          <p:cNvSpPr/>
+          <p:nvPr/>
+        </p:nvSpPr>
+        <p:spPr>
+          <a:xfrm>
+            <a:off x="365760" y="3273552"/>
+            <a:ext cx="1371600" cy="658368"/>
           </a:xfrm>
           <a:prstGeom prst="rect">
             <a:avLst>
-              <a:gd name="adj" fmla="val 25000"/>
+              <a:gd name="adj" fmla="val 8333"/>
             </a:avLst>
           </a:prstGeom>
           <a:solidFill>
-            <a:srgbClr val="CCFBF1"/>
-          </a:solidFill>
-          <a:ln w="19050">
-            <a:solidFill>
-              <a:srgbClr val="0D9488"/>
-            </a:solidFill>
-            <a:prstDash val="solid"/>
-          </a:ln>
-          <a:effectLst>
-            <a:outerShdw sx="100000" sy="100000" kx="0" ky="0" algn="bl" rotWithShape="0" blurRad="101600" dist="38100" dir="8100000">
-              <a:srgbClr val="000000">
-                <a:alpha val="12000"/>
-              </a:srgbClr>
-            </a:outerShdw>
-          </a:effectLst>
-        </p:spPr>
-      </p:sp>
-      <p:sp>
-        <p:nvSpPr>
-          <p:cNvPr id="24" name="Text 22"/>
-          <p:cNvSpPr/>
-          <p:nvPr/>
-        </p:nvSpPr>
-        <p:spPr>
-          <a:xfrm>
-            <a:off x="6519672" y="2258568"/>
-            <a:ext cx="1828800" cy="292608"/>
-          </a:xfrm>
-          <a:prstGeom prst="rect">
-            <a:avLst/>
-          </a:prstGeom>
-          <a:noFill/>
-          <a:ln/>
-        </p:spPr>
-        <p:txBody>
-          <a:bodyPr wrap="square" lIns="0" tIns="0" rIns="0" bIns="0" rtlCol="0" anchor="ctr"/>
-          <a:lstStyle/>
-          <a:p>
-            <a:pPr algn="ctr" indent="0" marL="0">
-              <a:buNone/>
-            </a:pPr>
-            <a:r>
-              <a:rPr lang="en-US" sz="1300" b="1" dirty="0">
-                <a:solidFill>
-                  <a:srgbClr val="0F766E"/>
+            <a:srgbClr val="E2E8F0"/>
+          </a:solidFill>
+          <a:ln w="12700">
+            <a:solidFill>
+              <a:srgbClr val="E2E8F0"/>
+            </a:solidFill>
+            <a:prstDash val="solid"/>
+          </a:ln>
+        </p:spPr>
+      </p:sp>
+      <p:sp>
+        <p:nvSpPr>
+          <p:cNvPr id="23" name="Text 21"/>
+          <p:cNvSpPr/>
+          <p:nvPr/>
+        </p:nvSpPr>
+        <p:spPr>
+          <a:xfrm>
+            <a:off x="365760" y="3273552"/>
+            <a:ext cx="1371600" cy="658368"/>
+          </a:xfrm>
+          <a:prstGeom prst="rect">
+            <a:avLst/>
+          </a:prstGeom>
+          <a:noFill/>
+          <a:ln/>
+        </p:spPr>
+        <p:txBody>
+          <a:bodyPr wrap="square" lIns="0" tIns="0" rIns="0" bIns="0" rtlCol="0" anchor="ctr"/>
+          <a:lstStyle/>
+          <a:p>
+            <a:pPr algn="ctr" indent="0" marL="0">
+              <a:buNone/>
+            </a:pPr>
+            <a:r>
+              <a:rPr lang="en-US" sz="1100" b="1" dirty="0">
+                <a:solidFill>
+                  <a:srgbClr val="475569"/>
                 </a:solidFill>
                 <a:latin typeface="Trebuchet MS" pitchFamily="34" charset="0"/>
                 <a:ea typeface="Trebuchet MS" pitchFamily="34" charset="-122"/>
                 <a:cs typeface="Trebuchet MS" pitchFamily="34" charset="-120"/>
               </a:rPr>
-              <a:t>or</a:t>
-            </a:r>
-            <a:endParaRPr lang="en-US" sz="1300" dirty="0"/>
-          </a:p>
-        </p:txBody>
-      </p:sp>
-      <p:sp>
-        <p:nvSpPr>
-          <p:cNvPr id="25" name="Text 23"/>
-          <p:cNvSpPr/>
-          <p:nvPr/>
-        </p:nvSpPr>
-        <p:spPr>
-          <a:xfrm>
-            <a:off x="6519672" y="2569464"/>
-            <a:ext cx="1828800" cy="201168"/>
-          </a:xfrm>
-          <a:prstGeom prst="rect">
-            <a:avLst/>
-          </a:prstGeom>
-          <a:noFill/>
-          <a:ln/>
-        </p:spPr>
-        <p:txBody>
-          <a:bodyPr wrap="square" lIns="0" tIns="0" rIns="0" bIns="0" rtlCol="0" anchor="t"/>
-          <a:lstStyle/>
-          <a:p>
-            <a:pPr algn="ctr" indent="0" marL="0">
-              <a:buNone/>
-            </a:pPr>
-            <a:r>
-              <a:rPr lang="en-US" sz="850" dirty="0">
-                <a:solidFill>
-                  <a:srgbClr val="475569"/>
-                </a:solidFill>
-                <a:latin typeface="Calibri" pitchFamily="34" charset="0"/>
-                <a:ea typeface="Calibri" pitchFamily="34" charset="-122"/>
-                <a:cs typeface="Calibri" pitchFamily="34" charset="-120"/>
-              </a:rPr>
-              <a:t>one who does</a:t>
-            </a:r>
-            <a:endParaRPr lang="en-US" sz="850" dirty="0"/>
-          </a:p>
-        </p:txBody>
-      </p:sp>
-      <p:sp>
-        <p:nvSpPr>
-          <p:cNvPr id="26" name="Shape 24"/>
-          <p:cNvSpPr/>
-          <p:nvPr/>
-        </p:nvSpPr>
-        <p:spPr>
-          <a:xfrm>
-            <a:off x="365760" y="3273552"/>
-            <a:ext cx="1371600" cy="658368"/>
+              <a:t>Syllables</a:t>
+            </a:r>
+            <a:endParaRPr lang="en-US" sz="1100" dirty="0"/>
+          </a:p>
+        </p:txBody>
+      </p:sp>
+      <p:sp>
+        <p:nvSpPr>
+          <p:cNvPr id="24" name="Shape 22"/>
+          <p:cNvSpPr/>
+          <p:nvPr/>
+        </p:nvSpPr>
+        <p:spPr>
+          <a:xfrm>
+            <a:off x="1874520" y="3273552"/>
+            <a:ext cx="6903720" cy="658368"/>
           </a:xfrm>
           <a:prstGeom prst="rect">
             <a:avLst>
@@ -13829,52 +13593,118 @@
             </a:avLst>
           </a:prstGeom>
           <a:solidFill>
-            <a:srgbClr val="E2E8F0"/>
-          </a:solidFill>
-          <a:ln w="12700">
-            <a:solidFill>
-              <a:srgbClr val="E2E8F0"/>
-            </a:solidFill>
-            <a:prstDash val="solid"/>
-          </a:ln>
-        </p:spPr>
-      </p:sp>
-      <p:sp>
-        <p:nvSpPr>
-          <p:cNvPr id="27" name="Text 25"/>
-          <p:cNvSpPr/>
-          <p:nvPr/>
-        </p:nvSpPr>
-        <p:spPr>
-          <a:xfrm>
-            <a:off x="365760" y="3273552"/>
-            <a:ext cx="1371600" cy="658368"/>
-          </a:xfrm>
-          <a:prstGeom prst="rect">
-            <a:avLst/>
-          </a:prstGeom>
-          <a:noFill/>
-          <a:ln/>
-        </p:spPr>
-        <p:txBody>
-          <a:bodyPr wrap="square" lIns="0" tIns="0" rIns="0" bIns="0" rtlCol="0" anchor="ctr"/>
-          <a:lstStyle/>
-          <a:p>
-            <a:pPr algn="ctr" indent="0" marL="0">
-              <a:buNone/>
-            </a:pPr>
-            <a:r>
-              <a:rPr lang="en-US" sz="1100" b="1" dirty="0">
-                <a:solidFill>
-                  <a:srgbClr val="475569"/>
+            <a:srgbClr val="CCFBF1"/>
+          </a:solidFill>
+          <a:ln w="12700">
+            <a:solidFill>
+              <a:srgbClr val="0D9488"/>
+            </a:solidFill>
+            <a:prstDash val="solid"/>
+          </a:ln>
+        </p:spPr>
+      </p:sp>
+      <p:sp>
+        <p:nvSpPr>
+          <p:cNvPr id="25" name="Shape 23"/>
+          <p:cNvSpPr/>
+          <p:nvPr/>
+        </p:nvSpPr>
+        <p:spPr>
+          <a:xfrm>
+            <a:off x="2999232" y="3364992"/>
+            <a:ext cx="1645920" cy="475488"/>
+          </a:xfrm>
+          <a:prstGeom prst="rect">
+            <a:avLst>
+              <a:gd name="adj" fmla="val 9615"/>
+            </a:avLst>
+          </a:prstGeom>
+          <a:solidFill>
+            <a:srgbClr val="FFFFFF"/>
+          </a:solidFill>
+          <a:ln w="12700">
+            <a:solidFill>
+              <a:srgbClr val="0D9488"/>
+            </a:solidFill>
+            <a:prstDash val="solid"/>
+          </a:ln>
+        </p:spPr>
+      </p:sp>
+      <p:sp>
+        <p:nvSpPr>
+          <p:cNvPr id="26" name="Text 24"/>
+          <p:cNvSpPr/>
+          <p:nvPr/>
+        </p:nvSpPr>
+        <p:spPr>
+          <a:xfrm>
+            <a:off x="2999232" y="3364992"/>
+            <a:ext cx="1645920" cy="475488"/>
+          </a:xfrm>
+          <a:prstGeom prst="rect">
+            <a:avLst/>
+          </a:prstGeom>
+          <a:noFill/>
+          <a:ln/>
+        </p:spPr>
+        <p:txBody>
+          <a:bodyPr wrap="square" lIns="0" tIns="0" rIns="0" bIns="0" rtlCol="0" anchor="ctr"/>
+          <a:lstStyle/>
+          <a:p>
+            <a:pPr algn="ctr" indent="0" marL="0">
+              <a:buNone/>
+            </a:pPr>
+            <a:r>
+              <a:rPr lang="en-US" sz="1400" b="1" dirty="0">
+                <a:solidFill>
+                  <a:srgbClr val="0D9488"/>
                 </a:solidFill>
                 <a:latin typeface="Trebuchet MS" pitchFamily="34" charset="0"/>
                 <a:ea typeface="Trebuchet MS" pitchFamily="34" charset="-122"/>
                 <a:cs typeface="Trebuchet MS" pitchFamily="34" charset="-120"/>
               </a:rPr>
-              <a:t>Syllables</a:t>
-            </a:r>
-            <a:endParaRPr lang="en-US" sz="1100" dirty="0"/>
+              <a:t>ac</a:t>
+            </a:r>
+            <a:endParaRPr lang="en-US" sz="1400" dirty="0"/>
+          </a:p>
+        </p:txBody>
+      </p:sp>
+      <p:sp>
+        <p:nvSpPr>
+          <p:cNvPr id="27" name="Text 25"/>
+          <p:cNvSpPr/>
+          <p:nvPr/>
+        </p:nvSpPr>
+        <p:spPr>
+          <a:xfrm>
+            <a:off x="4645152" y="3364992"/>
+            <a:ext cx="1097280" cy="475488"/>
+          </a:xfrm>
+          <a:prstGeom prst="rect">
+            <a:avLst/>
+          </a:prstGeom>
+          <a:noFill/>
+          <a:ln/>
+        </p:spPr>
+        <p:txBody>
+          <a:bodyPr wrap="square" lIns="0" tIns="0" rIns="0" bIns="0" rtlCol="0" anchor="ctr"/>
+          <a:lstStyle/>
+          <a:p>
+            <a:pPr algn="ctr" indent="0" marL="0">
+              <a:buNone/>
+            </a:pPr>
+            <a:r>
+              <a:rPr lang="en-US" sz="1600" b="1" dirty="0">
+                <a:solidFill>
+                  <a:srgbClr val="0D9488"/>
+                </a:solidFill>
+                <a:latin typeface="Trebuchet MS" pitchFamily="34" charset="0"/>
+                <a:ea typeface="Trebuchet MS" pitchFamily="34" charset="-122"/>
+                <a:cs typeface="Trebuchet MS" pitchFamily="34" charset="-120"/>
+              </a:rPr>
+              <a:t>·</a:t>
+            </a:r>
+            <a:endParaRPr lang="en-US" sz="1600" dirty="0"/>
           </a:p>
         </p:txBody>
       </p:sp>
@@ -13886,34 +13716,7 @@
         </p:nvSpPr>
         <p:spPr>
           <a:xfrm>
-            <a:off x="1874520" y="3273552"/>
-            <a:ext cx="6903720" cy="658368"/>
-          </a:xfrm>
-          <a:prstGeom prst="rect">
-            <a:avLst>
-              <a:gd name="adj" fmla="val 8333"/>
-            </a:avLst>
-          </a:prstGeom>
-          <a:solidFill>
-            <a:srgbClr val="CCFBF1"/>
-          </a:solidFill>
-          <a:ln w="12700">
-            <a:solidFill>
-              <a:srgbClr val="0D9488"/>
-            </a:solidFill>
-            <a:prstDash val="solid"/>
-          </a:ln>
-        </p:spPr>
-      </p:sp>
-      <p:sp>
-        <p:nvSpPr>
-          <p:cNvPr id="29" name="Shape 27"/>
-          <p:cNvSpPr/>
-          <p:nvPr/>
-        </p:nvSpPr>
-        <p:spPr>
-          <a:xfrm>
-            <a:off x="2313432" y="3364992"/>
+            <a:off x="5742432" y="3364992"/>
             <a:ext cx="1645920" cy="475488"/>
           </a:xfrm>
           <a:prstGeom prst="rect">
@@ -13934,13 +13737,13 @@
       </p:sp>
       <p:sp>
         <p:nvSpPr>
-          <p:cNvPr id="30" name="Text 28"/>
-          <p:cNvSpPr/>
-          <p:nvPr/>
-        </p:nvSpPr>
-        <p:spPr>
-          <a:xfrm>
-            <a:off x="2313432" y="3364992"/>
+          <p:cNvPr id="29" name="Text 27"/>
+          <p:cNvSpPr/>
+          <p:nvPr/>
+        </p:nvSpPr>
+        <p:spPr>
+          <a:xfrm>
+            <a:off x="5742432" y="3364992"/>
             <a:ext cx="1645920" cy="475488"/>
           </a:xfrm>
           <a:prstGeom prst="rect">
@@ -13965,7 +13768,7 @@
                 <a:ea typeface="Trebuchet MS" pitchFamily="34" charset="-122"/>
                 <a:cs typeface="Trebuchet MS" pitchFamily="34" charset="-120"/>
               </a:rPr>
-              <a:t>di</a:t>
+              <a:t>tor</a:t>
             </a:r>
             <a:endParaRPr lang="en-US" sz="1400" dirty="0"/>
           </a:p>
@@ -13973,40 +13776,67 @@
       </p:sp>
       <p:sp>
         <p:nvSpPr>
+          <p:cNvPr id="30" name="Shape 28"/>
+          <p:cNvSpPr/>
+          <p:nvPr/>
+        </p:nvSpPr>
+        <p:spPr>
+          <a:xfrm>
+            <a:off x="365760" y="4096512"/>
+            <a:ext cx="1371600" cy="804672"/>
+          </a:xfrm>
+          <a:prstGeom prst="rect">
+            <a:avLst>
+              <a:gd name="adj" fmla="val 6818"/>
+            </a:avLst>
+          </a:prstGeom>
+          <a:solidFill>
+            <a:srgbClr val="E2E8F0"/>
+          </a:solidFill>
+          <a:ln w="12700">
+            <a:solidFill>
+              <a:srgbClr val="E2E8F0"/>
+            </a:solidFill>
+            <a:prstDash val="solid"/>
+          </a:ln>
+        </p:spPr>
+      </p:sp>
+      <p:sp>
+        <p:nvSpPr>
           <p:cNvPr id="31" name="Text 29"/>
           <p:cNvSpPr/>
           <p:nvPr/>
         </p:nvSpPr>
         <p:spPr>
           <a:xfrm>
-            <a:off x="3959352" y="3364992"/>
-            <a:ext cx="411480" cy="475488"/>
-          </a:xfrm>
-          <a:prstGeom prst="rect">
-            <a:avLst/>
-          </a:prstGeom>
-          <a:noFill/>
-          <a:ln/>
-        </p:spPr>
-        <p:txBody>
-          <a:bodyPr wrap="square" lIns="0" tIns="0" rIns="0" bIns="0" rtlCol="0" anchor="ctr"/>
-          <a:lstStyle/>
-          <a:p>
-            <a:pPr algn="ctr" indent="0" marL="0">
-              <a:buNone/>
-            </a:pPr>
-            <a:r>
-              <a:rPr lang="en-US" sz="1600" b="1" dirty="0">
-                <a:solidFill>
-                  <a:srgbClr val="0D9488"/>
+            <a:off x="365760" y="4096512"/>
+            <a:ext cx="1371600" cy="804672"/>
+          </a:xfrm>
+          <a:prstGeom prst="rect">
+            <a:avLst/>
+          </a:prstGeom>
+          <a:noFill/>
+          <a:ln/>
+        </p:spPr>
+        <p:txBody>
+          <a:bodyPr wrap="square" lIns="0" tIns="0" rIns="0" bIns="0" rtlCol="0" anchor="ctr"/>
+          <a:lstStyle/>
+          <a:p>
+            <a:pPr algn="ctr" indent="0" marL="0">
+              <a:buNone/>
+            </a:pPr>
+            <a:r>
+              <a:rPr lang="en-US" sz="1100" b="1" dirty="0">
+                <a:solidFill>
+                  <a:srgbClr val="475569"/>
                 </a:solidFill>
                 <a:latin typeface="Trebuchet MS" pitchFamily="34" charset="0"/>
                 <a:ea typeface="Trebuchet MS" pitchFamily="34" charset="-122"/>
                 <a:cs typeface="Trebuchet MS" pitchFamily="34" charset="-120"/>
               </a:rPr>
-              <a:t>·</a:t>
-            </a:r>
-            <a:endParaRPr lang="en-US" sz="1600" dirty="0"/>
+              <a:t>Phonemes</a:t>
+            </a:r>
+            <a:endParaRPr lang="en-US" sz="1100" dirty="0"/>
           </a:p>
         </p:txBody>
       </p:sp>
@@ -14018,179 +13848,8 @@
         </p:nvSpPr>
         <p:spPr>
           <a:xfrm>
-            <a:off x="4370832" y="3364992"/>
-            <a:ext cx="1645920" cy="475488"/>
-          </a:xfrm>
-          <a:prstGeom prst="rect">
-            <a:avLst>
-              <a:gd name="adj" fmla="val 9615"/>
-            </a:avLst>
-          </a:prstGeom>
-          <a:solidFill>
-            <a:srgbClr val="FFFFFF"/>
-          </a:solidFill>
-          <a:ln w="12700">
-            <a:solidFill>
-              <a:srgbClr val="0D9488"/>
-            </a:solidFill>
-            <a:prstDash val="solid"/>
-          </a:ln>
-        </p:spPr>
-      </p:sp>
-      <p:sp>
-        <p:nvSpPr>
-          <p:cNvPr id="33" name="Text 31"/>
-          <p:cNvSpPr/>
-          <p:nvPr/>
-        </p:nvSpPr>
-        <p:spPr>
-          <a:xfrm>
-            <a:off x="4370832" y="3364992"/>
-            <a:ext cx="1645920" cy="475488"/>
-          </a:xfrm>
-          <a:prstGeom prst="rect">
-            <a:avLst/>
-          </a:prstGeom>
-          <a:noFill/>
-          <a:ln/>
-        </p:spPr>
-        <p:txBody>
-          <a:bodyPr wrap="square" lIns="0" tIns="0" rIns="0" bIns="0" rtlCol="0" anchor="ctr"/>
-          <a:lstStyle/>
-          <a:p>
-            <a:pPr algn="ctr" indent="0" marL="0">
-              <a:buNone/>
-            </a:pPr>
-            <a:r>
-              <a:rPr lang="en-US" sz="1400" b="1" dirty="0">
-                <a:solidFill>
-                  <a:srgbClr val="0D9488"/>
-                </a:solidFill>
-                <a:latin typeface="Trebuchet MS" pitchFamily="34" charset="0"/>
-                <a:ea typeface="Trebuchet MS" pitchFamily="34" charset="-122"/>
-                <a:cs typeface="Trebuchet MS" pitchFamily="34" charset="-120"/>
-              </a:rPr>
-              <a:t>rec</a:t>
-            </a:r>
-            <a:endParaRPr lang="en-US" sz="1400" dirty="0"/>
-          </a:p>
-        </p:txBody>
-      </p:sp>
-      <p:sp>
-        <p:nvSpPr>
-          <p:cNvPr id="34" name="Text 32"/>
-          <p:cNvSpPr/>
-          <p:nvPr/>
-        </p:nvSpPr>
-        <p:spPr>
-          <a:xfrm>
-            <a:off x="6016752" y="3364992"/>
-            <a:ext cx="411480" cy="475488"/>
-          </a:xfrm>
-          <a:prstGeom prst="rect">
-            <a:avLst/>
-          </a:prstGeom>
-          <a:noFill/>
-          <a:ln/>
-        </p:spPr>
-        <p:txBody>
-          <a:bodyPr wrap="square" lIns="0" tIns="0" rIns="0" bIns="0" rtlCol="0" anchor="ctr"/>
-          <a:lstStyle/>
-          <a:p>
-            <a:pPr algn="ctr" indent="0" marL="0">
-              <a:buNone/>
-            </a:pPr>
-            <a:r>
-              <a:rPr lang="en-US" sz="1600" b="1" dirty="0">
-                <a:solidFill>
-                  <a:srgbClr val="0D9488"/>
-                </a:solidFill>
-                <a:latin typeface="Trebuchet MS" pitchFamily="34" charset="0"/>
-                <a:ea typeface="Trebuchet MS" pitchFamily="34" charset="-122"/>
-                <a:cs typeface="Trebuchet MS" pitchFamily="34" charset="-120"/>
-              </a:rPr>
-              <a:t>·</a:t>
-            </a:r>
-            <a:endParaRPr lang="en-US" sz="1600" dirty="0"/>
-          </a:p>
-        </p:txBody>
-      </p:sp>
-      <p:sp>
-        <p:nvSpPr>
-          <p:cNvPr id="35" name="Shape 33"/>
-          <p:cNvSpPr/>
-          <p:nvPr/>
-        </p:nvSpPr>
-        <p:spPr>
-          <a:xfrm>
-            <a:off x="6428232" y="3364992"/>
-            <a:ext cx="1645920" cy="475488"/>
-          </a:xfrm>
-          <a:prstGeom prst="rect">
-            <a:avLst>
-              <a:gd name="adj" fmla="val 9615"/>
-            </a:avLst>
-          </a:prstGeom>
-          <a:solidFill>
-            <a:srgbClr val="FFFFFF"/>
-          </a:solidFill>
-          <a:ln w="12700">
-            <a:solidFill>
-              <a:srgbClr val="0D9488"/>
-            </a:solidFill>
-            <a:prstDash val="solid"/>
-          </a:ln>
-        </p:spPr>
-      </p:sp>
-      <p:sp>
-        <p:nvSpPr>
-          <p:cNvPr id="36" name="Text 34"/>
-          <p:cNvSpPr/>
-          <p:nvPr/>
-        </p:nvSpPr>
-        <p:spPr>
-          <a:xfrm>
-            <a:off x="6428232" y="3364992"/>
-            <a:ext cx="1645920" cy="475488"/>
-          </a:xfrm>
-          <a:prstGeom prst="rect">
-            <a:avLst/>
-          </a:prstGeom>
-          <a:noFill/>
-          <a:ln/>
-        </p:spPr>
-        <p:txBody>
-          <a:bodyPr wrap="square" lIns="0" tIns="0" rIns="0" bIns="0" rtlCol="0" anchor="ctr"/>
-          <a:lstStyle/>
-          <a:p>
-            <a:pPr algn="ctr" indent="0" marL="0">
-              <a:buNone/>
-            </a:pPr>
-            <a:r>
-              <a:rPr lang="en-US" sz="1400" b="1" dirty="0">
-                <a:solidFill>
-                  <a:srgbClr val="0D9488"/>
-                </a:solidFill>
-                <a:latin typeface="Trebuchet MS" pitchFamily="34" charset="0"/>
-                <a:ea typeface="Trebuchet MS" pitchFamily="34" charset="-122"/>
-                <a:cs typeface="Trebuchet MS" pitchFamily="34" charset="-120"/>
-              </a:rPr>
-              <a:t>tor</a:t>
-            </a:r>
-            <a:endParaRPr lang="en-US" sz="1400" dirty="0"/>
-          </a:p>
-        </p:txBody>
-      </p:sp>
-      <p:sp>
-        <p:nvSpPr>
-          <p:cNvPr id="37" name="Shape 35"/>
-          <p:cNvSpPr/>
-          <p:nvPr/>
-        </p:nvSpPr>
-        <p:spPr>
-          <a:xfrm>
-            <a:off x="365760" y="4096512"/>
-            <a:ext cx="1371600" cy="804672"/>
+            <a:off x="1874520" y="4096512"/>
+            <a:ext cx="6903720" cy="804672"/>
           </a:xfrm>
           <a:prstGeom prst="rect">
             <a:avLst>
@@ -14198,85 +13857,19 @@
             </a:avLst>
           </a:prstGeom>
           <a:solidFill>
-            <a:srgbClr val="E2E8F0"/>
+            <a:srgbClr val="F8FAFC"/>
           </a:solidFill>
           <a:ln w="12700">
             <a:solidFill>
               <a:srgbClr val="E2E8F0"/>
             </a:solidFill>
-            <a:prstDash val="solid"/>
-          </a:ln>
-        </p:spPr>
-      </p:sp>
-      <p:sp>
-        <p:nvSpPr>
-          <p:cNvPr id="38" name="Text 36"/>
-          <p:cNvSpPr/>
-          <p:nvPr/>
-        </p:nvSpPr>
-        <p:spPr>
-          <a:xfrm>
-            <a:off x="365760" y="4096512"/>
-            <a:ext cx="1371600" cy="804672"/>
-          </a:xfrm>
-          <a:prstGeom prst="rect">
-            <a:avLst/>
-          </a:prstGeom>
-          <a:noFill/>
-          <a:ln/>
-        </p:spPr>
-        <p:txBody>
-          <a:bodyPr wrap="square" lIns="0" tIns="0" rIns="0" bIns="0" rtlCol="0" anchor="ctr"/>
-          <a:lstStyle/>
-          <a:p>
-            <a:pPr algn="ctr" indent="0" marL="0">
-              <a:buNone/>
-            </a:pPr>
-            <a:r>
-              <a:rPr lang="en-US" sz="1100" b="1" dirty="0">
-                <a:solidFill>
-                  <a:srgbClr val="475569"/>
-                </a:solidFill>
-                <a:latin typeface="Trebuchet MS" pitchFamily="34" charset="0"/>
-                <a:ea typeface="Trebuchet MS" pitchFamily="34" charset="-122"/>
-                <a:cs typeface="Trebuchet MS" pitchFamily="34" charset="-120"/>
-              </a:rPr>
-              <a:t>Phonemes</a:t>
-            </a:r>
-            <a:endParaRPr lang="en-US" sz="1100" dirty="0"/>
-          </a:p>
-        </p:txBody>
-      </p:sp>
-      <p:sp>
-        <p:nvSpPr>
-          <p:cNvPr id="39" name="Shape 37"/>
-          <p:cNvSpPr/>
-          <p:nvPr/>
-        </p:nvSpPr>
-        <p:spPr>
-          <a:xfrm>
-            <a:off x="1874520" y="4096512"/>
-            <a:ext cx="6903720" cy="804672"/>
-          </a:xfrm>
-          <a:prstGeom prst="rect">
-            <a:avLst>
-              <a:gd name="adj" fmla="val 6818"/>
-            </a:avLst>
-          </a:prstGeom>
-          <a:solidFill>
-            <a:srgbClr val="F8FAFC"/>
-          </a:solidFill>
-          <a:ln w="12700">
-            <a:solidFill>
-              <a:srgbClr val="E2E8F0"/>
-            </a:solidFill>
             <a:prstDash val="dash"/>
           </a:ln>
         </p:spPr>
       </p:sp>
       <p:sp>
         <p:nvSpPr>
-          <p:cNvPr id="40" name="Text 38"/>
+          <p:cNvPr id="33" name="Text 31"/>
           <p:cNvSpPr/>
           <p:nvPr/>
         </p:nvSpPr>
@@ -15003,7 +14596,7 @@
                 <a:ea typeface="Trebuchet MS" pitchFamily="34" charset="-122"/>
                 <a:cs typeface="Trebuchet MS" pitchFamily="34" charset="-120"/>
               </a:rPr>
-              <a:t>director</a:t>
+              <a:t>actor</a:t>
             </a:r>
             <a:endParaRPr lang="en-US" sz="2800" dirty="0"/>
           </a:p>
@@ -15083,7 +14676,7 @@
         </p:nvSpPr>
         <p:spPr>
           <a:xfrm>
-            <a:off x="2221992" y="2258568"/>
+            <a:off x="2938272" y="2258568"/>
             <a:ext cx="1828800" cy="292608"/>
           </a:xfrm>
           <a:prstGeom prst="rect">
@@ -15117,7 +14710,7 @@
         </p:nvSpPr>
         <p:spPr>
           <a:xfrm>
-            <a:off x="2221992" y="2258568"/>
+            <a:off x="2938272" y="2258568"/>
             <a:ext cx="1828800" cy="292608"/>
           </a:xfrm>
           <a:prstGeom prst="rect">
@@ -15142,7 +14735,7 @@
                 <a:ea typeface="Trebuchet MS" pitchFamily="34" charset="-122"/>
                 <a:cs typeface="Trebuchet MS" pitchFamily="34" charset="-120"/>
               </a:rPr>
-              <a:t>di</a:t>
+              <a:t>act</a:t>
             </a:r>
             <a:endParaRPr lang="en-US" sz="1300" dirty="0"/>
           </a:p>
@@ -15156,7 +14749,7 @@
         </p:nvSpPr>
         <p:spPr>
           <a:xfrm>
-            <a:off x="2221992" y="2569464"/>
+            <a:off x="2938272" y="2569464"/>
             <a:ext cx="1828800" cy="201168"/>
           </a:xfrm>
           <a:prstGeom prst="rect">
@@ -15181,7 +14774,7 @@
                 <a:ea typeface="Calibri" pitchFamily="34" charset="-122"/>
                 <a:cs typeface="Calibri" pitchFamily="34" charset="-120"/>
               </a:rPr>
-              <a:t>apart</a:t>
+              <a:t>to perform or do</a:t>
             </a:r>
             <a:endParaRPr lang="en-US" sz="850" dirty="0"/>
           </a:p>
@@ -15189,52 +14782,13 @@
       </p:sp>
       <p:sp>
         <p:nvSpPr>
-          <p:cNvPr id="19" name="Text 17"/>
-          <p:cNvSpPr/>
-          <p:nvPr/>
-        </p:nvSpPr>
-        <p:spPr>
-          <a:xfrm>
-            <a:off x="2221992" y="2752344"/>
-            <a:ext cx="1828800" cy="182880"/>
-          </a:xfrm>
-          <a:prstGeom prst="rect">
-            <a:avLst/>
-          </a:prstGeom>
-          <a:noFill/>
-          <a:ln/>
-        </p:spPr>
-        <p:txBody>
-          <a:bodyPr wrap="square" lIns="0" tIns="0" rIns="0" bIns="0" rtlCol="0" anchor="t"/>
-          <a:lstStyle/>
-          <a:p>
-            <a:pPr algn="ctr" indent="0" marL="0">
-              <a:buNone/>
-            </a:pPr>
-            <a:r>
-              <a:rPr lang="en-US" sz="700" i="1" dirty="0">
-                <a:solidFill>
-                  <a:srgbClr val="94A3B8"/>
-                </a:solidFill>
-                <a:latin typeface="Calibri" pitchFamily="34" charset="0"/>
-                <a:ea typeface="Calibri" pitchFamily="34" charset="-122"/>
-                <a:cs typeface="Calibri" pitchFamily="34" charset="-120"/>
-              </a:rPr>
-              <a:t>dis → di before 'r'</a:t>
-            </a:r>
-            <a:endParaRPr lang="en-US" sz="700" dirty="0"/>
-          </a:p>
-        </p:txBody>
-      </p:sp>
-      <p:sp>
-        <p:nvSpPr>
-          <p:cNvPr id="20" name="Shape 18"/>
-          <p:cNvSpPr/>
-          <p:nvPr/>
-        </p:nvSpPr>
-        <p:spPr>
-          <a:xfrm>
-            <a:off x="4370832" y="2258568"/>
+          <p:cNvPr id="19" name="Shape 17"/>
+          <p:cNvSpPr/>
+          <p:nvPr/>
+        </p:nvSpPr>
+        <p:spPr>
+          <a:xfrm>
+            <a:off x="5803392" y="2258568"/>
             <a:ext cx="1828800" cy="292608"/>
           </a:xfrm>
           <a:prstGeom prst="rect">
@@ -15243,11 +14797,11 @@
             </a:avLst>
           </a:prstGeom>
           <a:solidFill>
-            <a:srgbClr val="FCE7F3"/>
+            <a:srgbClr val="CCFBF1"/>
           </a:solidFill>
           <a:ln w="19050">
             <a:solidFill>
-              <a:srgbClr val="DB2777"/>
+              <a:srgbClr val="0D9488"/>
             </a:solidFill>
             <a:prstDash val="solid"/>
           </a:ln>
@@ -15262,13 +14816,13 @@
       </p:sp>
       <p:sp>
         <p:nvSpPr>
-          <p:cNvPr id="21" name="Text 19"/>
-          <p:cNvSpPr/>
-          <p:nvPr/>
-        </p:nvSpPr>
-        <p:spPr>
-          <a:xfrm>
-            <a:off x="4370832" y="2258568"/>
+          <p:cNvPr id="20" name="Text 18"/>
+          <p:cNvSpPr/>
+          <p:nvPr/>
+        </p:nvSpPr>
+        <p:spPr>
+          <a:xfrm>
+            <a:off x="5803392" y="2258568"/>
             <a:ext cx="1828800" cy="292608"/>
           </a:xfrm>
           <a:prstGeom prst="rect">
@@ -15287,13 +14841,13 @@
             <a:r>
               <a:rPr lang="en-US" sz="1300" b="1" dirty="0">
                 <a:solidFill>
-                  <a:srgbClr val="9D174D"/>
+                  <a:srgbClr val="0F766E"/>
                 </a:solidFill>
                 <a:latin typeface="Trebuchet MS" pitchFamily="34" charset="0"/>
                 <a:ea typeface="Trebuchet MS" pitchFamily="34" charset="-122"/>
                 <a:cs typeface="Trebuchet MS" pitchFamily="34" charset="-120"/>
               </a:rPr>
-              <a:t>rect</a:t>
+              <a:t>or</a:t>
             </a:r>
             <a:endParaRPr lang="en-US" sz="1300" dirty="0"/>
           </a:p>
@@ -15301,13 +14855,13 @@
       </p:sp>
       <p:sp>
         <p:nvSpPr>
-          <p:cNvPr id="22" name="Text 20"/>
-          <p:cNvSpPr/>
-          <p:nvPr/>
-        </p:nvSpPr>
-        <p:spPr>
-          <a:xfrm>
-            <a:off x="4370832" y="2569464"/>
+          <p:cNvPr id="21" name="Text 19"/>
+          <p:cNvSpPr/>
+          <p:nvPr/>
+        </p:nvSpPr>
+        <p:spPr>
+          <a:xfrm>
+            <a:off x="5803392" y="2569464"/>
             <a:ext cx="1828800" cy="201168"/>
           </a:xfrm>
           <a:prstGeom prst="rect">
@@ -15332,7 +14886,7 @@
                 <a:ea typeface="Calibri" pitchFamily="34" charset="-122"/>
                 <a:cs typeface="Calibri" pitchFamily="34" charset="-120"/>
               </a:rPr>
-              <a:t>to guide or lead straight</a:t>
+              <a:t>one who does</a:t>
             </a:r>
             <a:endParaRPr lang="en-US" sz="850" dirty="0"/>
           </a:p>
@@ -15340,87 +14894,503 @@
       </p:sp>
       <p:sp>
         <p:nvSpPr>
-          <p:cNvPr id="23" name="Shape 21"/>
-          <p:cNvSpPr/>
-          <p:nvPr/>
-        </p:nvSpPr>
-        <p:spPr>
-          <a:xfrm>
-            <a:off x="6519672" y="2258568"/>
-            <a:ext cx="1828800" cy="292608"/>
+          <p:cNvPr id="22" name="Shape 20"/>
+          <p:cNvSpPr/>
+          <p:nvPr/>
+        </p:nvSpPr>
+        <p:spPr>
+          <a:xfrm>
+            <a:off x="365760" y="3273552"/>
+            <a:ext cx="1371600" cy="658368"/>
           </a:xfrm>
           <a:prstGeom prst="rect">
             <a:avLst>
-              <a:gd name="adj" fmla="val 25000"/>
+              <a:gd name="adj" fmla="val 8333"/>
             </a:avLst>
           </a:prstGeom>
           <a:solidFill>
-            <a:srgbClr val="CCFBF1"/>
-          </a:solidFill>
-          <a:ln w="19050">
-            <a:solidFill>
-              <a:srgbClr val="0D9488"/>
-            </a:solidFill>
-            <a:prstDash val="solid"/>
-          </a:ln>
-          <a:effectLst>
-            <a:outerShdw sx="100000" sy="100000" kx="0" ky="0" algn="bl" rotWithShape="0" blurRad="101600" dist="38100" dir="8100000">
-              <a:srgbClr val="000000">
-                <a:alpha val="12000"/>
-              </a:srgbClr>
-            </a:outerShdw>
-          </a:effectLst>
-        </p:spPr>
-      </p:sp>
-      <p:sp>
-        <p:nvSpPr>
-          <p:cNvPr id="24" name="Text 22"/>
-          <p:cNvSpPr/>
-          <p:nvPr/>
-        </p:nvSpPr>
-        <p:spPr>
-          <a:xfrm>
-            <a:off x="6519672" y="2258568"/>
-            <a:ext cx="1828800" cy="292608"/>
-          </a:xfrm>
-          <a:prstGeom prst="rect">
-            <a:avLst/>
-          </a:prstGeom>
-          <a:noFill/>
-          <a:ln/>
-        </p:spPr>
-        <p:txBody>
-          <a:bodyPr wrap="square" lIns="0" tIns="0" rIns="0" bIns="0" rtlCol="0" anchor="ctr"/>
-          <a:lstStyle/>
-          <a:p>
-            <a:pPr algn="ctr" indent="0" marL="0">
-              <a:buNone/>
-            </a:pPr>
-            <a:r>
-              <a:rPr lang="en-US" sz="1300" b="1" dirty="0">
-                <a:solidFill>
-                  <a:srgbClr val="0F766E"/>
+            <a:srgbClr val="E2E8F0"/>
+          </a:solidFill>
+          <a:ln w="12700">
+            <a:solidFill>
+              <a:srgbClr val="E2E8F0"/>
+            </a:solidFill>
+            <a:prstDash val="solid"/>
+          </a:ln>
+        </p:spPr>
+      </p:sp>
+      <p:sp>
+        <p:nvSpPr>
+          <p:cNvPr id="23" name="Text 21"/>
+          <p:cNvSpPr/>
+          <p:nvPr/>
+        </p:nvSpPr>
+        <p:spPr>
+          <a:xfrm>
+            <a:off x="365760" y="3273552"/>
+            <a:ext cx="1371600" cy="658368"/>
+          </a:xfrm>
+          <a:prstGeom prst="rect">
+            <a:avLst/>
+          </a:prstGeom>
+          <a:noFill/>
+          <a:ln/>
+        </p:spPr>
+        <p:txBody>
+          <a:bodyPr wrap="square" lIns="0" tIns="0" rIns="0" bIns="0" rtlCol="0" anchor="ctr"/>
+          <a:lstStyle/>
+          <a:p>
+            <a:pPr algn="ctr" indent="0" marL="0">
+              <a:buNone/>
+            </a:pPr>
+            <a:r>
+              <a:rPr lang="en-US" sz="1100" b="1" dirty="0">
+                <a:solidFill>
+                  <a:srgbClr val="475569"/>
                 </a:solidFill>
                 <a:latin typeface="Trebuchet MS" pitchFamily="34" charset="0"/>
                 <a:ea typeface="Trebuchet MS" pitchFamily="34" charset="-122"/>
                 <a:cs typeface="Trebuchet MS" pitchFamily="34" charset="-120"/>
               </a:rPr>
-              <a:t>or</a:t>
-            </a:r>
-            <a:endParaRPr lang="en-US" sz="1300" dirty="0"/>
-          </a:p>
-        </p:txBody>
-      </p:sp>
-      <p:sp>
-        <p:nvSpPr>
-          <p:cNvPr id="25" name="Text 23"/>
-          <p:cNvSpPr/>
-          <p:nvPr/>
-        </p:nvSpPr>
-        <p:spPr>
-          <a:xfrm>
-            <a:off x="6519672" y="2569464"/>
-            <a:ext cx="1828800" cy="201168"/>
+              <a:t>Syllables</a:t>
+            </a:r>
+            <a:endParaRPr lang="en-US" sz="1100" dirty="0"/>
+          </a:p>
+        </p:txBody>
+      </p:sp>
+      <p:sp>
+        <p:nvSpPr>
+          <p:cNvPr id="24" name="Shape 22"/>
+          <p:cNvSpPr/>
+          <p:nvPr/>
+        </p:nvSpPr>
+        <p:spPr>
+          <a:xfrm>
+            <a:off x="1874520" y="3273552"/>
+            <a:ext cx="6903720" cy="658368"/>
+          </a:xfrm>
+          <a:prstGeom prst="rect">
+            <a:avLst>
+              <a:gd name="adj" fmla="val 8333"/>
+            </a:avLst>
+          </a:prstGeom>
+          <a:solidFill>
+            <a:srgbClr val="CCFBF1"/>
+          </a:solidFill>
+          <a:ln w="12700">
+            <a:solidFill>
+              <a:srgbClr val="0D9488"/>
+            </a:solidFill>
+            <a:prstDash val="solid"/>
+          </a:ln>
+        </p:spPr>
+      </p:sp>
+      <p:sp>
+        <p:nvSpPr>
+          <p:cNvPr id="25" name="Shape 23"/>
+          <p:cNvSpPr/>
+          <p:nvPr/>
+        </p:nvSpPr>
+        <p:spPr>
+          <a:xfrm>
+            <a:off x="2999232" y="3364992"/>
+            <a:ext cx="1645920" cy="475488"/>
+          </a:xfrm>
+          <a:prstGeom prst="rect">
+            <a:avLst>
+              <a:gd name="adj" fmla="val 9615"/>
+            </a:avLst>
+          </a:prstGeom>
+          <a:solidFill>
+            <a:srgbClr val="FFFFFF"/>
+          </a:solidFill>
+          <a:ln w="12700">
+            <a:solidFill>
+              <a:srgbClr val="0D9488"/>
+            </a:solidFill>
+            <a:prstDash val="solid"/>
+          </a:ln>
+        </p:spPr>
+      </p:sp>
+      <p:sp>
+        <p:nvSpPr>
+          <p:cNvPr id="26" name="Text 24"/>
+          <p:cNvSpPr/>
+          <p:nvPr/>
+        </p:nvSpPr>
+        <p:spPr>
+          <a:xfrm>
+            <a:off x="2999232" y="3364992"/>
+            <a:ext cx="1645920" cy="475488"/>
+          </a:xfrm>
+          <a:prstGeom prst="rect">
+            <a:avLst/>
+          </a:prstGeom>
+          <a:noFill/>
+          <a:ln/>
+        </p:spPr>
+        <p:txBody>
+          <a:bodyPr wrap="square" lIns="0" tIns="0" rIns="0" bIns="0" rtlCol="0" anchor="ctr"/>
+          <a:lstStyle/>
+          <a:p>
+            <a:pPr algn="ctr" indent="0" marL="0">
+              <a:buNone/>
+            </a:pPr>
+            <a:r>
+              <a:rPr lang="en-US" sz="1400" b="1" dirty="0">
+                <a:solidFill>
+                  <a:srgbClr val="0D9488"/>
+                </a:solidFill>
+                <a:latin typeface="Trebuchet MS" pitchFamily="34" charset="0"/>
+                <a:ea typeface="Trebuchet MS" pitchFamily="34" charset="-122"/>
+                <a:cs typeface="Trebuchet MS" pitchFamily="34" charset="-120"/>
+              </a:rPr>
+              <a:t>ac</a:t>
+            </a:r>
+            <a:endParaRPr lang="en-US" sz="1400" dirty="0"/>
+          </a:p>
+        </p:txBody>
+      </p:sp>
+      <p:sp>
+        <p:nvSpPr>
+          <p:cNvPr id="27" name="Text 25"/>
+          <p:cNvSpPr/>
+          <p:nvPr/>
+        </p:nvSpPr>
+        <p:spPr>
+          <a:xfrm>
+            <a:off x="4645152" y="3364992"/>
+            <a:ext cx="1097280" cy="475488"/>
+          </a:xfrm>
+          <a:prstGeom prst="rect">
+            <a:avLst/>
+          </a:prstGeom>
+          <a:noFill/>
+          <a:ln/>
+        </p:spPr>
+        <p:txBody>
+          <a:bodyPr wrap="square" lIns="0" tIns="0" rIns="0" bIns="0" rtlCol="0" anchor="ctr"/>
+          <a:lstStyle/>
+          <a:p>
+            <a:pPr algn="ctr" indent="0" marL="0">
+              <a:buNone/>
+            </a:pPr>
+            <a:r>
+              <a:rPr lang="en-US" sz="1600" b="1" dirty="0">
+                <a:solidFill>
+                  <a:srgbClr val="0D9488"/>
+                </a:solidFill>
+                <a:latin typeface="Trebuchet MS" pitchFamily="34" charset="0"/>
+                <a:ea typeface="Trebuchet MS" pitchFamily="34" charset="-122"/>
+                <a:cs typeface="Trebuchet MS" pitchFamily="34" charset="-120"/>
+              </a:rPr>
+              <a:t>·</a:t>
+            </a:r>
+            <a:endParaRPr lang="en-US" sz="1600" dirty="0"/>
+          </a:p>
+        </p:txBody>
+      </p:sp>
+      <p:sp>
+        <p:nvSpPr>
+          <p:cNvPr id="28" name="Shape 26"/>
+          <p:cNvSpPr/>
+          <p:nvPr/>
+        </p:nvSpPr>
+        <p:spPr>
+          <a:xfrm>
+            <a:off x="5742432" y="3364992"/>
+            <a:ext cx="1645920" cy="475488"/>
+          </a:xfrm>
+          <a:prstGeom prst="rect">
+            <a:avLst>
+              <a:gd name="adj" fmla="val 9615"/>
+            </a:avLst>
+          </a:prstGeom>
+          <a:solidFill>
+            <a:srgbClr val="FFFFFF"/>
+          </a:solidFill>
+          <a:ln w="12700">
+            <a:solidFill>
+              <a:srgbClr val="0D9488"/>
+            </a:solidFill>
+            <a:prstDash val="solid"/>
+          </a:ln>
+        </p:spPr>
+      </p:sp>
+      <p:sp>
+        <p:nvSpPr>
+          <p:cNvPr id="29" name="Text 27"/>
+          <p:cNvSpPr/>
+          <p:nvPr/>
+        </p:nvSpPr>
+        <p:spPr>
+          <a:xfrm>
+            <a:off x="5742432" y="3364992"/>
+            <a:ext cx="1645920" cy="475488"/>
+          </a:xfrm>
+          <a:prstGeom prst="rect">
+            <a:avLst/>
+          </a:prstGeom>
+          <a:noFill/>
+          <a:ln/>
+        </p:spPr>
+        <p:txBody>
+          <a:bodyPr wrap="square" lIns="0" tIns="0" rIns="0" bIns="0" rtlCol="0" anchor="ctr"/>
+          <a:lstStyle/>
+          <a:p>
+            <a:pPr algn="ctr" indent="0" marL="0">
+              <a:buNone/>
+            </a:pPr>
+            <a:r>
+              <a:rPr lang="en-US" sz="1400" b="1" dirty="0">
+                <a:solidFill>
+                  <a:srgbClr val="0D9488"/>
+                </a:solidFill>
+                <a:latin typeface="Trebuchet MS" pitchFamily="34" charset="0"/>
+                <a:ea typeface="Trebuchet MS" pitchFamily="34" charset="-122"/>
+                <a:cs typeface="Trebuchet MS" pitchFamily="34" charset="-120"/>
+              </a:rPr>
+              <a:t>tor</a:t>
+            </a:r>
+            <a:endParaRPr lang="en-US" sz="1400" dirty="0"/>
+          </a:p>
+        </p:txBody>
+      </p:sp>
+      <p:sp>
+        <p:nvSpPr>
+          <p:cNvPr id="30" name="Shape 28"/>
+          <p:cNvSpPr/>
+          <p:nvPr/>
+        </p:nvSpPr>
+        <p:spPr>
+          <a:xfrm>
+            <a:off x="365760" y="4096512"/>
+            <a:ext cx="1371600" cy="804672"/>
+          </a:xfrm>
+          <a:prstGeom prst="rect">
+            <a:avLst>
+              <a:gd name="adj" fmla="val 6818"/>
+            </a:avLst>
+          </a:prstGeom>
+          <a:solidFill>
+            <a:srgbClr val="E2E8F0"/>
+          </a:solidFill>
+          <a:ln w="12700">
+            <a:solidFill>
+              <a:srgbClr val="E2E8F0"/>
+            </a:solidFill>
+            <a:prstDash val="solid"/>
+          </a:ln>
+        </p:spPr>
+      </p:sp>
+      <p:sp>
+        <p:nvSpPr>
+          <p:cNvPr id="31" name="Text 29"/>
+          <p:cNvSpPr/>
+          <p:nvPr/>
+        </p:nvSpPr>
+        <p:spPr>
+          <a:xfrm>
+            <a:off x="365760" y="4096512"/>
+            <a:ext cx="1371600" cy="804672"/>
+          </a:xfrm>
+          <a:prstGeom prst="rect">
+            <a:avLst/>
+          </a:prstGeom>
+          <a:noFill/>
+          <a:ln/>
+        </p:spPr>
+        <p:txBody>
+          <a:bodyPr wrap="square" lIns="0" tIns="0" rIns="0" bIns="0" rtlCol="0" anchor="ctr"/>
+          <a:lstStyle/>
+          <a:p>
+            <a:pPr algn="ctr" indent="0" marL="0">
+              <a:buNone/>
+            </a:pPr>
+            <a:r>
+              <a:rPr lang="en-US" sz="1100" b="1" dirty="0">
+                <a:solidFill>
+                  <a:srgbClr val="475569"/>
+                </a:solidFill>
+                <a:latin typeface="Trebuchet MS" pitchFamily="34" charset="0"/>
+                <a:ea typeface="Trebuchet MS" pitchFamily="34" charset="-122"/>
+                <a:cs typeface="Trebuchet MS" pitchFamily="34" charset="-120"/>
+              </a:rPr>
+              <a:t>Phonemes</a:t>
+            </a:r>
+            <a:endParaRPr lang="en-US" sz="1100" dirty="0"/>
+          </a:p>
+        </p:txBody>
+      </p:sp>
+      <p:sp>
+        <p:nvSpPr>
+          <p:cNvPr id="32" name="Shape 30"/>
+          <p:cNvSpPr/>
+          <p:nvPr/>
+        </p:nvSpPr>
+        <p:spPr>
+          <a:xfrm>
+            <a:off x="1874520" y="4096512"/>
+            <a:ext cx="6903720" cy="804672"/>
+          </a:xfrm>
+          <a:prstGeom prst="rect">
+            <a:avLst>
+              <a:gd name="adj" fmla="val 6818"/>
+            </a:avLst>
+          </a:prstGeom>
+          <a:solidFill>
+            <a:srgbClr val="FCE7F3"/>
+          </a:solidFill>
+          <a:ln w="12700">
+            <a:solidFill>
+              <a:srgbClr val="DB2777"/>
+            </a:solidFill>
+            <a:prstDash val="solid"/>
+          </a:ln>
+        </p:spPr>
+      </p:sp>
+      <p:sp>
+        <p:nvSpPr>
+          <p:cNvPr id="33" name="Shape 31"/>
+          <p:cNvSpPr/>
+          <p:nvPr/>
+        </p:nvSpPr>
+        <p:spPr>
+          <a:xfrm>
+            <a:off x="2670048" y="4169664"/>
+            <a:ext cx="685800" cy="384048"/>
+          </a:xfrm>
+          <a:prstGeom prst="rect">
+            <a:avLst>
+              <a:gd name="adj" fmla="val 9524"/>
+            </a:avLst>
+          </a:prstGeom>
+          <a:solidFill>
+            <a:srgbClr val="FFFFFF"/>
+          </a:solidFill>
+          <a:ln w="12700">
+            <a:solidFill>
+              <a:srgbClr val="DB2777"/>
+            </a:solidFill>
+            <a:prstDash val="solid"/>
+          </a:ln>
+        </p:spPr>
+      </p:sp>
+      <p:sp>
+        <p:nvSpPr>
+          <p:cNvPr id="34" name="Text 32"/>
+          <p:cNvSpPr/>
+          <p:nvPr/>
+        </p:nvSpPr>
+        <p:spPr>
+          <a:xfrm>
+            <a:off x="2670048" y="4169664"/>
+            <a:ext cx="685800" cy="384048"/>
+          </a:xfrm>
+          <a:prstGeom prst="rect">
+            <a:avLst/>
+          </a:prstGeom>
+          <a:noFill/>
+          <a:ln/>
+        </p:spPr>
+        <p:txBody>
+          <a:bodyPr wrap="square" lIns="0" tIns="0" rIns="0" bIns="0" rtlCol="0" anchor="ctr"/>
+          <a:lstStyle/>
+          <a:p>
+            <a:pPr algn="ctr" indent="0" marL="0">
+              <a:buNone/>
+            </a:pPr>
+            <a:r>
+              <a:rPr lang="en-US" sz="900" b="1" dirty="0">
+                <a:solidFill>
+                  <a:srgbClr val="9D174D"/>
+                </a:solidFill>
+                <a:latin typeface="Trebuchet MS" pitchFamily="34" charset="0"/>
+                <a:ea typeface="Trebuchet MS" pitchFamily="34" charset="-122"/>
+                <a:cs typeface="Trebuchet MS" pitchFamily="34" charset="-120"/>
+              </a:rPr>
+              <a:t>a</a:t>
+            </a:r>
+            <a:endParaRPr lang="en-US" sz="900" dirty="0"/>
+          </a:p>
+        </p:txBody>
+      </p:sp>
+      <p:sp>
+        <p:nvSpPr>
+          <p:cNvPr id="35" name="Shape 33"/>
+          <p:cNvSpPr/>
+          <p:nvPr/>
+        </p:nvSpPr>
+        <p:spPr>
+          <a:xfrm>
+            <a:off x="4123944" y="4169664"/>
+            <a:ext cx="685800" cy="384048"/>
+          </a:xfrm>
+          <a:prstGeom prst="rect">
+            <a:avLst>
+              <a:gd name="adj" fmla="val 9524"/>
+            </a:avLst>
+          </a:prstGeom>
+          <a:solidFill>
+            <a:srgbClr val="FFFFFF"/>
+          </a:solidFill>
+          <a:ln w="12700">
+            <a:solidFill>
+              <a:srgbClr val="DB2777"/>
+            </a:solidFill>
+            <a:prstDash val="solid"/>
+          </a:ln>
+        </p:spPr>
+      </p:sp>
+      <p:sp>
+        <p:nvSpPr>
+          <p:cNvPr id="36" name="Text 34"/>
+          <p:cNvSpPr/>
+          <p:nvPr/>
+        </p:nvSpPr>
+        <p:spPr>
+          <a:xfrm>
+            <a:off x="4123944" y="4169664"/>
+            <a:ext cx="685800" cy="384048"/>
+          </a:xfrm>
+          <a:prstGeom prst="rect">
+            <a:avLst/>
+          </a:prstGeom>
+          <a:noFill/>
+          <a:ln/>
+        </p:spPr>
+        <p:txBody>
+          <a:bodyPr wrap="square" lIns="0" tIns="0" rIns="0" bIns="0" rtlCol="0" anchor="ctr"/>
+          <a:lstStyle/>
+          <a:p>
+            <a:pPr algn="ctr" indent="0" marL="0">
+              <a:buNone/>
+            </a:pPr>
+            <a:r>
+              <a:rPr lang="en-US" sz="900" b="1" dirty="0">
+                <a:solidFill>
+                  <a:srgbClr val="9D174D"/>
+                </a:solidFill>
+                <a:latin typeface="Trebuchet MS" pitchFamily="34" charset="0"/>
+                <a:ea typeface="Trebuchet MS" pitchFamily="34" charset="-122"/>
+                <a:cs typeface="Trebuchet MS" pitchFamily="34" charset="-120"/>
+              </a:rPr>
+              <a:t>c</a:t>
+            </a:r>
+            <a:endParaRPr lang="en-US" sz="900" dirty="0"/>
+          </a:p>
+        </p:txBody>
+      </p:sp>
+      <p:sp>
+        <p:nvSpPr>
+          <p:cNvPr id="37" name="Text 35"/>
+          <p:cNvSpPr/>
+          <p:nvPr/>
+        </p:nvSpPr>
+        <p:spPr>
+          <a:xfrm>
+            <a:off x="4123944" y="4572000"/>
+            <a:ext cx="685800" cy="219456"/>
           </a:xfrm>
           <a:prstGeom prst="rect">
             <a:avLst/>
@@ -15436,481 +15406,85 @@
               <a:buNone/>
             </a:pPr>
             <a:r>
-              <a:rPr lang="en-US" sz="850" dirty="0">
-                <a:solidFill>
-                  <a:srgbClr val="475569"/>
+              <a:rPr lang="en-US" sz="750" i="1" dirty="0">
+                <a:solidFill>
+                  <a:srgbClr val="94A3B8"/>
                 </a:solidFill>
                 <a:latin typeface="Calibri" pitchFamily="34" charset="0"/>
                 <a:ea typeface="Calibri" pitchFamily="34" charset="-122"/>
                 <a:cs typeface="Calibri" pitchFamily="34" charset="-120"/>
               </a:rPr>
-              <a:t>one who does</a:t>
-            </a:r>
-            <a:endParaRPr lang="en-US" sz="850" dirty="0"/>
-          </a:p>
-        </p:txBody>
-      </p:sp>
-      <p:sp>
-        <p:nvSpPr>
-          <p:cNvPr id="26" name="Shape 24"/>
-          <p:cNvSpPr/>
-          <p:nvPr/>
-        </p:nvSpPr>
-        <p:spPr>
-          <a:xfrm>
-            <a:off x="365760" y="3273552"/>
-            <a:ext cx="1371600" cy="658368"/>
+              <a:t>/k/</a:t>
+            </a:r>
+            <a:endParaRPr lang="en-US" sz="750" dirty="0"/>
+          </a:p>
+        </p:txBody>
+      </p:sp>
+      <p:sp>
+        <p:nvSpPr>
+          <p:cNvPr id="38" name="Shape 36"/>
+          <p:cNvSpPr/>
+          <p:nvPr/>
+        </p:nvSpPr>
+        <p:spPr>
+          <a:xfrm>
+            <a:off x="5577840" y="4169664"/>
+            <a:ext cx="685800" cy="384048"/>
           </a:xfrm>
           <a:prstGeom prst="rect">
             <a:avLst>
-              <a:gd name="adj" fmla="val 8333"/>
+              <a:gd name="adj" fmla="val 9524"/>
             </a:avLst>
           </a:prstGeom>
           <a:solidFill>
-            <a:srgbClr val="E2E8F0"/>
-          </a:solidFill>
-          <a:ln w="12700">
-            <a:solidFill>
-              <a:srgbClr val="E2E8F0"/>
-            </a:solidFill>
-            <a:prstDash val="solid"/>
-          </a:ln>
-        </p:spPr>
-      </p:sp>
-      <p:sp>
-        <p:nvSpPr>
-          <p:cNvPr id="27" name="Text 25"/>
-          <p:cNvSpPr/>
-          <p:nvPr/>
-        </p:nvSpPr>
-        <p:spPr>
-          <a:xfrm>
-            <a:off x="365760" y="3273552"/>
-            <a:ext cx="1371600" cy="658368"/>
-          </a:xfrm>
-          <a:prstGeom prst="rect">
-            <a:avLst/>
-          </a:prstGeom>
-          <a:noFill/>
-          <a:ln/>
-        </p:spPr>
-        <p:txBody>
-          <a:bodyPr wrap="square" lIns="0" tIns="0" rIns="0" bIns="0" rtlCol="0" anchor="ctr"/>
-          <a:lstStyle/>
-          <a:p>
-            <a:pPr algn="ctr" indent="0" marL="0">
-              <a:buNone/>
-            </a:pPr>
-            <a:r>
-              <a:rPr lang="en-US" sz="1100" b="1" dirty="0">
-                <a:solidFill>
-                  <a:srgbClr val="475569"/>
+            <a:srgbClr val="FFFFFF"/>
+          </a:solidFill>
+          <a:ln w="12700">
+            <a:solidFill>
+              <a:srgbClr val="DB2777"/>
+            </a:solidFill>
+            <a:prstDash val="solid"/>
+          </a:ln>
+        </p:spPr>
+      </p:sp>
+      <p:sp>
+        <p:nvSpPr>
+          <p:cNvPr id="39" name="Text 37"/>
+          <p:cNvSpPr/>
+          <p:nvPr/>
+        </p:nvSpPr>
+        <p:spPr>
+          <a:xfrm>
+            <a:off x="5577840" y="4169664"/>
+            <a:ext cx="685800" cy="384048"/>
+          </a:xfrm>
+          <a:prstGeom prst="rect">
+            <a:avLst/>
+          </a:prstGeom>
+          <a:noFill/>
+          <a:ln/>
+        </p:spPr>
+        <p:txBody>
+          <a:bodyPr wrap="square" lIns="0" tIns="0" rIns="0" bIns="0" rtlCol="0" anchor="ctr"/>
+          <a:lstStyle/>
+          <a:p>
+            <a:pPr algn="ctr" indent="0" marL="0">
+              <a:buNone/>
+            </a:pPr>
+            <a:r>
+              <a:rPr lang="en-US" sz="900" b="1" dirty="0">
+                <a:solidFill>
+                  <a:srgbClr val="9D174D"/>
                 </a:solidFill>
                 <a:latin typeface="Trebuchet MS" pitchFamily="34" charset="0"/>
                 <a:ea typeface="Trebuchet MS" pitchFamily="34" charset="-122"/>
                 <a:cs typeface="Trebuchet MS" pitchFamily="34" charset="-120"/>
               </a:rPr>
-              <a:t>Syllables</a:t>
-            </a:r>
-            <a:endParaRPr lang="en-US" sz="1100" dirty="0"/>
-          </a:p>
-        </p:txBody>
-      </p:sp>
-      <p:sp>
-        <p:nvSpPr>
-          <p:cNvPr id="28" name="Shape 26"/>
-          <p:cNvSpPr/>
-          <p:nvPr/>
-        </p:nvSpPr>
-        <p:spPr>
-          <a:xfrm>
-            <a:off x="1874520" y="3273552"/>
-            <a:ext cx="6903720" cy="658368"/>
-          </a:xfrm>
-          <a:prstGeom prst="rect">
-            <a:avLst>
-              <a:gd name="adj" fmla="val 8333"/>
-            </a:avLst>
-          </a:prstGeom>
-          <a:solidFill>
-            <a:srgbClr val="CCFBF1"/>
-          </a:solidFill>
-          <a:ln w="12700">
-            <a:solidFill>
-              <a:srgbClr val="0D9488"/>
-            </a:solidFill>
-            <a:prstDash val="solid"/>
-          </a:ln>
-        </p:spPr>
-      </p:sp>
-      <p:sp>
-        <p:nvSpPr>
-          <p:cNvPr id="29" name="Shape 27"/>
-          <p:cNvSpPr/>
-          <p:nvPr/>
-        </p:nvSpPr>
-        <p:spPr>
-          <a:xfrm>
-            <a:off x="2313432" y="3364992"/>
-            <a:ext cx="1645920" cy="475488"/>
-          </a:xfrm>
-          <a:prstGeom prst="rect">
-            <a:avLst>
-              <a:gd name="adj" fmla="val 9615"/>
-            </a:avLst>
-          </a:prstGeom>
-          <a:solidFill>
-            <a:srgbClr val="FFFFFF"/>
-          </a:solidFill>
-          <a:ln w="12700">
-            <a:solidFill>
-              <a:srgbClr val="0D9488"/>
-            </a:solidFill>
-            <a:prstDash val="solid"/>
-          </a:ln>
-        </p:spPr>
-      </p:sp>
-      <p:sp>
-        <p:nvSpPr>
-          <p:cNvPr id="30" name="Text 28"/>
-          <p:cNvSpPr/>
-          <p:nvPr/>
-        </p:nvSpPr>
-        <p:spPr>
-          <a:xfrm>
-            <a:off x="2313432" y="3364992"/>
-            <a:ext cx="1645920" cy="475488"/>
-          </a:xfrm>
-          <a:prstGeom prst="rect">
-            <a:avLst/>
-          </a:prstGeom>
-          <a:noFill/>
-          <a:ln/>
-        </p:spPr>
-        <p:txBody>
-          <a:bodyPr wrap="square" lIns="0" tIns="0" rIns="0" bIns="0" rtlCol="0" anchor="ctr"/>
-          <a:lstStyle/>
-          <a:p>
-            <a:pPr algn="ctr" indent="0" marL="0">
-              <a:buNone/>
-            </a:pPr>
-            <a:r>
-              <a:rPr lang="en-US" sz="1400" b="1" dirty="0">
-                <a:solidFill>
-                  <a:srgbClr val="0D9488"/>
-                </a:solidFill>
-                <a:latin typeface="Trebuchet MS" pitchFamily="34" charset="0"/>
-                <a:ea typeface="Trebuchet MS" pitchFamily="34" charset="-122"/>
-                <a:cs typeface="Trebuchet MS" pitchFamily="34" charset="-120"/>
-              </a:rPr>
-              <a:t>di</a:t>
-            </a:r>
-            <a:endParaRPr lang="en-US" sz="1400" dirty="0"/>
-          </a:p>
-        </p:txBody>
-      </p:sp>
-      <p:sp>
-        <p:nvSpPr>
-          <p:cNvPr id="31" name="Text 29"/>
-          <p:cNvSpPr/>
-          <p:nvPr/>
-        </p:nvSpPr>
-        <p:spPr>
-          <a:xfrm>
-            <a:off x="3959352" y="3364992"/>
-            <a:ext cx="411480" cy="475488"/>
-          </a:xfrm>
-          <a:prstGeom prst="rect">
-            <a:avLst/>
-          </a:prstGeom>
-          <a:noFill/>
-          <a:ln/>
-        </p:spPr>
-        <p:txBody>
-          <a:bodyPr wrap="square" lIns="0" tIns="0" rIns="0" bIns="0" rtlCol="0" anchor="ctr"/>
-          <a:lstStyle/>
-          <a:p>
-            <a:pPr algn="ctr" indent="0" marL="0">
-              <a:buNone/>
-            </a:pPr>
-            <a:r>
-              <a:rPr lang="en-US" sz="1600" b="1" dirty="0">
-                <a:solidFill>
-                  <a:srgbClr val="0D9488"/>
-                </a:solidFill>
-                <a:latin typeface="Trebuchet MS" pitchFamily="34" charset="0"/>
-                <a:ea typeface="Trebuchet MS" pitchFamily="34" charset="-122"/>
-                <a:cs typeface="Trebuchet MS" pitchFamily="34" charset="-120"/>
-              </a:rPr>
-              <a:t>·</a:t>
-            </a:r>
-            <a:endParaRPr lang="en-US" sz="1600" dirty="0"/>
-          </a:p>
-        </p:txBody>
-      </p:sp>
-      <p:sp>
-        <p:nvSpPr>
-          <p:cNvPr id="32" name="Shape 30"/>
-          <p:cNvSpPr/>
-          <p:nvPr/>
-        </p:nvSpPr>
-        <p:spPr>
-          <a:xfrm>
-            <a:off x="4370832" y="3364992"/>
-            <a:ext cx="1645920" cy="475488"/>
-          </a:xfrm>
-          <a:prstGeom prst="rect">
-            <a:avLst>
-              <a:gd name="adj" fmla="val 9615"/>
-            </a:avLst>
-          </a:prstGeom>
-          <a:solidFill>
-            <a:srgbClr val="FFFFFF"/>
-          </a:solidFill>
-          <a:ln w="12700">
-            <a:solidFill>
-              <a:srgbClr val="0D9488"/>
-            </a:solidFill>
-            <a:prstDash val="solid"/>
-          </a:ln>
-        </p:spPr>
-      </p:sp>
-      <p:sp>
-        <p:nvSpPr>
-          <p:cNvPr id="33" name="Text 31"/>
-          <p:cNvSpPr/>
-          <p:nvPr/>
-        </p:nvSpPr>
-        <p:spPr>
-          <a:xfrm>
-            <a:off x="4370832" y="3364992"/>
-            <a:ext cx="1645920" cy="475488"/>
-          </a:xfrm>
-          <a:prstGeom prst="rect">
-            <a:avLst/>
-          </a:prstGeom>
-          <a:noFill/>
-          <a:ln/>
-        </p:spPr>
-        <p:txBody>
-          <a:bodyPr wrap="square" lIns="0" tIns="0" rIns="0" bIns="0" rtlCol="0" anchor="ctr"/>
-          <a:lstStyle/>
-          <a:p>
-            <a:pPr algn="ctr" indent="0" marL="0">
-              <a:buNone/>
-            </a:pPr>
-            <a:r>
-              <a:rPr lang="en-US" sz="1400" b="1" dirty="0">
-                <a:solidFill>
-                  <a:srgbClr val="0D9488"/>
-                </a:solidFill>
-                <a:latin typeface="Trebuchet MS" pitchFamily="34" charset="0"/>
-                <a:ea typeface="Trebuchet MS" pitchFamily="34" charset="-122"/>
-                <a:cs typeface="Trebuchet MS" pitchFamily="34" charset="-120"/>
-              </a:rPr>
-              <a:t>rec</a:t>
-            </a:r>
-            <a:endParaRPr lang="en-US" sz="1400" dirty="0"/>
-          </a:p>
-        </p:txBody>
-      </p:sp>
-      <p:sp>
-        <p:nvSpPr>
-          <p:cNvPr id="34" name="Text 32"/>
-          <p:cNvSpPr/>
-          <p:nvPr/>
-        </p:nvSpPr>
-        <p:spPr>
-          <a:xfrm>
-            <a:off x="6016752" y="3364992"/>
-            <a:ext cx="411480" cy="475488"/>
-          </a:xfrm>
-          <a:prstGeom prst="rect">
-            <a:avLst/>
-          </a:prstGeom>
-          <a:noFill/>
-          <a:ln/>
-        </p:spPr>
-        <p:txBody>
-          <a:bodyPr wrap="square" lIns="0" tIns="0" rIns="0" bIns="0" rtlCol="0" anchor="ctr"/>
-          <a:lstStyle/>
-          <a:p>
-            <a:pPr algn="ctr" indent="0" marL="0">
-              <a:buNone/>
-            </a:pPr>
-            <a:r>
-              <a:rPr lang="en-US" sz="1600" b="1" dirty="0">
-                <a:solidFill>
-                  <a:srgbClr val="0D9488"/>
-                </a:solidFill>
-                <a:latin typeface="Trebuchet MS" pitchFamily="34" charset="0"/>
-                <a:ea typeface="Trebuchet MS" pitchFamily="34" charset="-122"/>
-                <a:cs typeface="Trebuchet MS" pitchFamily="34" charset="-120"/>
-              </a:rPr>
-              <a:t>·</a:t>
-            </a:r>
-            <a:endParaRPr lang="en-US" sz="1600" dirty="0"/>
-          </a:p>
-        </p:txBody>
-      </p:sp>
-      <p:sp>
-        <p:nvSpPr>
-          <p:cNvPr id="35" name="Shape 33"/>
-          <p:cNvSpPr/>
-          <p:nvPr/>
-        </p:nvSpPr>
-        <p:spPr>
-          <a:xfrm>
-            <a:off x="6428232" y="3364992"/>
-            <a:ext cx="1645920" cy="475488"/>
-          </a:xfrm>
-          <a:prstGeom prst="rect">
-            <a:avLst>
-              <a:gd name="adj" fmla="val 9615"/>
-            </a:avLst>
-          </a:prstGeom>
-          <a:solidFill>
-            <a:srgbClr val="FFFFFF"/>
-          </a:solidFill>
-          <a:ln w="12700">
-            <a:solidFill>
-              <a:srgbClr val="0D9488"/>
-            </a:solidFill>
-            <a:prstDash val="solid"/>
-          </a:ln>
-        </p:spPr>
-      </p:sp>
-      <p:sp>
-        <p:nvSpPr>
-          <p:cNvPr id="36" name="Text 34"/>
-          <p:cNvSpPr/>
-          <p:nvPr/>
-        </p:nvSpPr>
-        <p:spPr>
-          <a:xfrm>
-            <a:off x="6428232" y="3364992"/>
-            <a:ext cx="1645920" cy="475488"/>
-          </a:xfrm>
-          <a:prstGeom prst="rect">
-            <a:avLst/>
-          </a:prstGeom>
-          <a:noFill/>
-          <a:ln/>
-        </p:spPr>
-        <p:txBody>
-          <a:bodyPr wrap="square" lIns="0" tIns="0" rIns="0" bIns="0" rtlCol="0" anchor="ctr"/>
-          <a:lstStyle/>
-          <a:p>
-            <a:pPr algn="ctr" indent="0" marL="0">
-              <a:buNone/>
-            </a:pPr>
-            <a:r>
-              <a:rPr lang="en-US" sz="1400" b="1" dirty="0">
-                <a:solidFill>
-                  <a:srgbClr val="0D9488"/>
-                </a:solidFill>
-                <a:latin typeface="Trebuchet MS" pitchFamily="34" charset="0"/>
-                <a:ea typeface="Trebuchet MS" pitchFamily="34" charset="-122"/>
-                <a:cs typeface="Trebuchet MS" pitchFamily="34" charset="-120"/>
-              </a:rPr>
-              <a:t>tor</a:t>
-            </a:r>
-            <a:endParaRPr lang="en-US" sz="1400" dirty="0"/>
-          </a:p>
-        </p:txBody>
-      </p:sp>
-      <p:sp>
-        <p:nvSpPr>
-          <p:cNvPr id="37" name="Shape 35"/>
-          <p:cNvSpPr/>
-          <p:nvPr/>
-        </p:nvSpPr>
-        <p:spPr>
-          <a:xfrm>
-            <a:off x="365760" y="4096512"/>
-            <a:ext cx="1371600" cy="804672"/>
-          </a:xfrm>
-          <a:prstGeom prst="rect">
-            <a:avLst>
-              <a:gd name="adj" fmla="val 6818"/>
-            </a:avLst>
-          </a:prstGeom>
-          <a:solidFill>
-            <a:srgbClr val="E2E8F0"/>
-          </a:solidFill>
-          <a:ln w="12700">
-            <a:solidFill>
-              <a:srgbClr val="E2E8F0"/>
-            </a:solidFill>
-            <a:prstDash val="solid"/>
-          </a:ln>
-        </p:spPr>
-      </p:sp>
-      <p:sp>
-        <p:nvSpPr>
-          <p:cNvPr id="38" name="Text 36"/>
-          <p:cNvSpPr/>
-          <p:nvPr/>
-        </p:nvSpPr>
-        <p:spPr>
-          <a:xfrm>
-            <a:off x="365760" y="4096512"/>
-            <a:ext cx="1371600" cy="804672"/>
-          </a:xfrm>
-          <a:prstGeom prst="rect">
-            <a:avLst/>
-          </a:prstGeom>
-          <a:noFill/>
-          <a:ln/>
-        </p:spPr>
-        <p:txBody>
-          <a:bodyPr wrap="square" lIns="0" tIns="0" rIns="0" bIns="0" rtlCol="0" anchor="ctr"/>
-          <a:lstStyle/>
-          <a:p>
-            <a:pPr algn="ctr" indent="0" marL="0">
-              <a:buNone/>
-            </a:pPr>
-            <a:r>
-              <a:rPr lang="en-US" sz="1100" b="1" dirty="0">
-                <a:solidFill>
-                  <a:srgbClr val="475569"/>
-                </a:solidFill>
-                <a:latin typeface="Trebuchet MS" pitchFamily="34" charset="0"/>
-                <a:ea typeface="Trebuchet MS" pitchFamily="34" charset="-122"/>
-                <a:cs typeface="Trebuchet MS" pitchFamily="34" charset="-120"/>
-              </a:rPr>
-              <a:t>Phonemes</a:t>
-            </a:r>
-            <a:endParaRPr lang="en-US" sz="1100" dirty="0"/>
-          </a:p>
-        </p:txBody>
-      </p:sp>
-      <p:sp>
-        <p:nvSpPr>
-          <p:cNvPr id="39" name="Shape 37"/>
-          <p:cNvSpPr/>
-          <p:nvPr/>
-        </p:nvSpPr>
-        <p:spPr>
-          <a:xfrm>
-            <a:off x="1874520" y="4096512"/>
-            <a:ext cx="6903720" cy="804672"/>
-          </a:xfrm>
-          <a:prstGeom prst="rect">
-            <a:avLst>
-              <a:gd name="adj" fmla="val 6818"/>
-            </a:avLst>
-          </a:prstGeom>
-          <a:solidFill>
-            <a:srgbClr val="FCE7F3"/>
-          </a:solidFill>
-          <a:ln w="12700">
-            <a:solidFill>
-              <a:srgbClr val="DB2777"/>
-            </a:solidFill>
-            <a:prstDash val="solid"/>
-          </a:ln>
-        </p:spPr>
+              <a:t>t</a:t>
+            </a:r>
+            <a:endParaRPr lang="en-US" sz="900" dirty="0"/>
+          </a:p>
+        </p:txBody>
       </p:sp>
       <p:sp>
         <p:nvSpPr>
@@ -15920,7 +15494,7 @@
         </p:nvSpPr>
         <p:spPr>
           <a:xfrm>
-            <a:off x="2124837" y="4169664"/>
+            <a:off x="7031736" y="4169664"/>
             <a:ext cx="685800" cy="384048"/>
           </a:xfrm>
           <a:prstGeom prst="rect">
@@ -15947,442 +15521,7 @@
         </p:nvSpPr>
         <p:spPr>
           <a:xfrm>
-            <a:off x="2124837" y="4169664"/>
-            <a:ext cx="685800" cy="384048"/>
-          </a:xfrm>
-          <a:prstGeom prst="rect">
-            <a:avLst/>
-          </a:prstGeom>
-          <a:noFill/>
-          <a:ln/>
-        </p:spPr>
-        <p:txBody>
-          <a:bodyPr wrap="square" lIns="0" tIns="0" rIns="0" bIns="0" rtlCol="0" anchor="ctr"/>
-          <a:lstStyle/>
-          <a:p>
-            <a:pPr algn="ctr" indent="0" marL="0">
-              <a:buNone/>
-            </a:pPr>
-            <a:r>
-              <a:rPr lang="en-US" sz="900" b="1" dirty="0">
-                <a:solidFill>
-                  <a:srgbClr val="9D174D"/>
-                </a:solidFill>
-                <a:latin typeface="Trebuchet MS" pitchFamily="34" charset="0"/>
-                <a:ea typeface="Trebuchet MS" pitchFamily="34" charset="-122"/>
-                <a:cs typeface="Trebuchet MS" pitchFamily="34" charset="-120"/>
-              </a:rPr>
-              <a:t>d</a:t>
-            </a:r>
-            <a:endParaRPr lang="en-US" sz="900" dirty="0"/>
-          </a:p>
-        </p:txBody>
-      </p:sp>
-      <p:sp>
-        <p:nvSpPr>
-          <p:cNvPr id="42" name="Shape 40"/>
-          <p:cNvSpPr/>
-          <p:nvPr/>
-        </p:nvSpPr>
-        <p:spPr>
-          <a:xfrm>
-            <a:off x="3033522" y="4169664"/>
-            <a:ext cx="685800" cy="384048"/>
-          </a:xfrm>
-          <a:prstGeom prst="rect">
-            <a:avLst>
-              <a:gd name="adj" fmla="val 9524"/>
-            </a:avLst>
-          </a:prstGeom>
-          <a:solidFill>
-            <a:srgbClr val="FFFFFF"/>
-          </a:solidFill>
-          <a:ln w="12700">
-            <a:solidFill>
-              <a:srgbClr val="DB2777"/>
-            </a:solidFill>
-            <a:prstDash val="solid"/>
-          </a:ln>
-        </p:spPr>
-      </p:sp>
-      <p:sp>
-        <p:nvSpPr>
-          <p:cNvPr id="43" name="Text 41"/>
-          <p:cNvSpPr/>
-          <p:nvPr/>
-        </p:nvSpPr>
-        <p:spPr>
-          <a:xfrm>
-            <a:off x="3033522" y="4169664"/>
-            <a:ext cx="685800" cy="384048"/>
-          </a:xfrm>
-          <a:prstGeom prst="rect">
-            <a:avLst/>
-          </a:prstGeom>
-          <a:noFill/>
-          <a:ln/>
-        </p:spPr>
-        <p:txBody>
-          <a:bodyPr wrap="square" lIns="0" tIns="0" rIns="0" bIns="0" rtlCol="0" anchor="ctr"/>
-          <a:lstStyle/>
-          <a:p>
-            <a:pPr algn="ctr" indent="0" marL="0">
-              <a:buNone/>
-            </a:pPr>
-            <a:r>
-              <a:rPr lang="en-US" sz="900" b="1" dirty="0">
-                <a:solidFill>
-                  <a:srgbClr val="9D174D"/>
-                </a:solidFill>
-                <a:latin typeface="Trebuchet MS" pitchFamily="34" charset="0"/>
-                <a:ea typeface="Trebuchet MS" pitchFamily="34" charset="-122"/>
-                <a:cs typeface="Trebuchet MS" pitchFamily="34" charset="-120"/>
-              </a:rPr>
-              <a:t>i</a:t>
-            </a:r>
-            <a:endParaRPr lang="en-US" sz="900" dirty="0"/>
-          </a:p>
-        </p:txBody>
-      </p:sp>
-      <p:sp>
-        <p:nvSpPr>
-          <p:cNvPr id="44" name="Shape 42"/>
-          <p:cNvSpPr/>
-          <p:nvPr/>
-        </p:nvSpPr>
-        <p:spPr>
-          <a:xfrm>
-            <a:off x="3942207" y="4169664"/>
-            <a:ext cx="685800" cy="384048"/>
-          </a:xfrm>
-          <a:prstGeom prst="rect">
-            <a:avLst>
-              <a:gd name="adj" fmla="val 9524"/>
-            </a:avLst>
-          </a:prstGeom>
-          <a:solidFill>
-            <a:srgbClr val="FFFFFF"/>
-          </a:solidFill>
-          <a:ln w="12700">
-            <a:solidFill>
-              <a:srgbClr val="DB2777"/>
-            </a:solidFill>
-            <a:prstDash val="solid"/>
-          </a:ln>
-        </p:spPr>
-      </p:sp>
-      <p:sp>
-        <p:nvSpPr>
-          <p:cNvPr id="45" name="Text 43"/>
-          <p:cNvSpPr/>
-          <p:nvPr/>
-        </p:nvSpPr>
-        <p:spPr>
-          <a:xfrm>
-            <a:off x="3942207" y="4169664"/>
-            <a:ext cx="685800" cy="384048"/>
-          </a:xfrm>
-          <a:prstGeom prst="rect">
-            <a:avLst/>
-          </a:prstGeom>
-          <a:noFill/>
-          <a:ln/>
-        </p:spPr>
-        <p:txBody>
-          <a:bodyPr wrap="square" lIns="0" tIns="0" rIns="0" bIns="0" rtlCol="0" anchor="ctr"/>
-          <a:lstStyle/>
-          <a:p>
-            <a:pPr algn="ctr" indent="0" marL="0">
-              <a:buNone/>
-            </a:pPr>
-            <a:r>
-              <a:rPr lang="en-US" sz="900" b="1" dirty="0">
-                <a:solidFill>
-                  <a:srgbClr val="9D174D"/>
-                </a:solidFill>
-                <a:latin typeface="Trebuchet MS" pitchFamily="34" charset="0"/>
-                <a:ea typeface="Trebuchet MS" pitchFamily="34" charset="-122"/>
-                <a:cs typeface="Trebuchet MS" pitchFamily="34" charset="-120"/>
-              </a:rPr>
-              <a:t>r</a:t>
-            </a:r>
-            <a:endParaRPr lang="en-US" sz="900" dirty="0"/>
-          </a:p>
-        </p:txBody>
-      </p:sp>
-      <p:sp>
-        <p:nvSpPr>
-          <p:cNvPr id="46" name="Shape 44"/>
-          <p:cNvSpPr/>
-          <p:nvPr/>
-        </p:nvSpPr>
-        <p:spPr>
-          <a:xfrm>
-            <a:off x="4850892" y="4169664"/>
-            <a:ext cx="685800" cy="384048"/>
-          </a:xfrm>
-          <a:prstGeom prst="rect">
-            <a:avLst>
-              <a:gd name="adj" fmla="val 9524"/>
-            </a:avLst>
-          </a:prstGeom>
-          <a:solidFill>
-            <a:srgbClr val="FFFFFF"/>
-          </a:solidFill>
-          <a:ln w="12700">
-            <a:solidFill>
-              <a:srgbClr val="DB2777"/>
-            </a:solidFill>
-            <a:prstDash val="solid"/>
-          </a:ln>
-        </p:spPr>
-      </p:sp>
-      <p:sp>
-        <p:nvSpPr>
-          <p:cNvPr id="47" name="Text 45"/>
-          <p:cNvSpPr/>
-          <p:nvPr/>
-        </p:nvSpPr>
-        <p:spPr>
-          <a:xfrm>
-            <a:off x="4850892" y="4169664"/>
-            <a:ext cx="685800" cy="384048"/>
-          </a:xfrm>
-          <a:prstGeom prst="rect">
-            <a:avLst/>
-          </a:prstGeom>
-          <a:noFill/>
-          <a:ln/>
-        </p:spPr>
-        <p:txBody>
-          <a:bodyPr wrap="square" lIns="0" tIns="0" rIns="0" bIns="0" rtlCol="0" anchor="ctr"/>
-          <a:lstStyle/>
-          <a:p>
-            <a:pPr algn="ctr" indent="0" marL="0">
-              <a:buNone/>
-            </a:pPr>
-            <a:r>
-              <a:rPr lang="en-US" sz="900" b="1" dirty="0">
-                <a:solidFill>
-                  <a:srgbClr val="9D174D"/>
-                </a:solidFill>
-                <a:latin typeface="Trebuchet MS" pitchFamily="34" charset="0"/>
-                <a:ea typeface="Trebuchet MS" pitchFamily="34" charset="-122"/>
-                <a:cs typeface="Trebuchet MS" pitchFamily="34" charset="-120"/>
-              </a:rPr>
-              <a:t>e</a:t>
-            </a:r>
-            <a:endParaRPr lang="en-US" sz="900" dirty="0"/>
-          </a:p>
-        </p:txBody>
-      </p:sp>
-      <p:sp>
-        <p:nvSpPr>
-          <p:cNvPr id="48" name="Shape 46"/>
-          <p:cNvSpPr/>
-          <p:nvPr/>
-        </p:nvSpPr>
-        <p:spPr>
-          <a:xfrm>
-            <a:off x="5759577" y="4169664"/>
-            <a:ext cx="685800" cy="384048"/>
-          </a:xfrm>
-          <a:prstGeom prst="rect">
-            <a:avLst>
-              <a:gd name="adj" fmla="val 9524"/>
-            </a:avLst>
-          </a:prstGeom>
-          <a:solidFill>
-            <a:srgbClr val="FFFFFF"/>
-          </a:solidFill>
-          <a:ln w="12700">
-            <a:solidFill>
-              <a:srgbClr val="DB2777"/>
-            </a:solidFill>
-            <a:prstDash val="solid"/>
-          </a:ln>
-        </p:spPr>
-      </p:sp>
-      <p:sp>
-        <p:nvSpPr>
-          <p:cNvPr id="49" name="Text 47"/>
-          <p:cNvSpPr/>
-          <p:nvPr/>
-        </p:nvSpPr>
-        <p:spPr>
-          <a:xfrm>
-            <a:off x="5759577" y="4169664"/>
-            <a:ext cx="685800" cy="384048"/>
-          </a:xfrm>
-          <a:prstGeom prst="rect">
-            <a:avLst/>
-          </a:prstGeom>
-          <a:noFill/>
-          <a:ln/>
-        </p:spPr>
-        <p:txBody>
-          <a:bodyPr wrap="square" lIns="0" tIns="0" rIns="0" bIns="0" rtlCol="0" anchor="ctr"/>
-          <a:lstStyle/>
-          <a:p>
-            <a:pPr algn="ctr" indent="0" marL="0">
-              <a:buNone/>
-            </a:pPr>
-            <a:r>
-              <a:rPr lang="en-US" sz="900" b="1" dirty="0">
-                <a:solidFill>
-                  <a:srgbClr val="9D174D"/>
-                </a:solidFill>
-                <a:latin typeface="Trebuchet MS" pitchFamily="34" charset="0"/>
-                <a:ea typeface="Trebuchet MS" pitchFamily="34" charset="-122"/>
-                <a:cs typeface="Trebuchet MS" pitchFamily="34" charset="-120"/>
-              </a:rPr>
-              <a:t>c</a:t>
-            </a:r>
-            <a:endParaRPr lang="en-US" sz="900" dirty="0"/>
-          </a:p>
-        </p:txBody>
-      </p:sp>
-      <p:sp>
-        <p:nvSpPr>
-          <p:cNvPr id="50" name="Text 48"/>
-          <p:cNvSpPr/>
-          <p:nvPr/>
-        </p:nvSpPr>
-        <p:spPr>
-          <a:xfrm>
-            <a:off x="5759577" y="4572000"/>
-            <a:ext cx="685800" cy="219456"/>
-          </a:xfrm>
-          <a:prstGeom prst="rect">
-            <a:avLst/>
-          </a:prstGeom>
-          <a:noFill/>
-          <a:ln/>
-        </p:spPr>
-        <p:txBody>
-          <a:bodyPr wrap="square" lIns="0" tIns="0" rIns="0" bIns="0" rtlCol="0" anchor="t"/>
-          <a:lstStyle/>
-          <a:p>
-            <a:pPr algn="ctr" indent="0" marL="0">
-              <a:buNone/>
-            </a:pPr>
-            <a:r>
-              <a:rPr lang="en-US" sz="750" i="1" dirty="0">
-                <a:solidFill>
-                  <a:srgbClr val="94A3B8"/>
-                </a:solidFill>
-                <a:latin typeface="Calibri" pitchFamily="34" charset="0"/>
-                <a:ea typeface="Calibri" pitchFamily="34" charset="-122"/>
-                <a:cs typeface="Calibri" pitchFamily="34" charset="-120"/>
-              </a:rPr>
-              <a:t>/k/</a:t>
-            </a:r>
-            <a:endParaRPr lang="en-US" sz="750" dirty="0"/>
-          </a:p>
-        </p:txBody>
-      </p:sp>
-      <p:sp>
-        <p:nvSpPr>
-          <p:cNvPr id="51" name="Shape 49"/>
-          <p:cNvSpPr/>
-          <p:nvPr/>
-        </p:nvSpPr>
-        <p:spPr>
-          <a:xfrm>
-            <a:off x="6668262" y="4169664"/>
-            <a:ext cx="685800" cy="384048"/>
-          </a:xfrm>
-          <a:prstGeom prst="rect">
-            <a:avLst>
-              <a:gd name="adj" fmla="val 9524"/>
-            </a:avLst>
-          </a:prstGeom>
-          <a:solidFill>
-            <a:srgbClr val="FFFFFF"/>
-          </a:solidFill>
-          <a:ln w="12700">
-            <a:solidFill>
-              <a:srgbClr val="DB2777"/>
-            </a:solidFill>
-            <a:prstDash val="solid"/>
-          </a:ln>
-        </p:spPr>
-      </p:sp>
-      <p:sp>
-        <p:nvSpPr>
-          <p:cNvPr id="52" name="Text 50"/>
-          <p:cNvSpPr/>
-          <p:nvPr/>
-        </p:nvSpPr>
-        <p:spPr>
-          <a:xfrm>
-            <a:off x="6668262" y="4169664"/>
-            <a:ext cx="685800" cy="384048"/>
-          </a:xfrm>
-          <a:prstGeom prst="rect">
-            <a:avLst/>
-          </a:prstGeom>
-          <a:noFill/>
-          <a:ln/>
-        </p:spPr>
-        <p:txBody>
-          <a:bodyPr wrap="square" lIns="0" tIns="0" rIns="0" bIns="0" rtlCol="0" anchor="ctr"/>
-          <a:lstStyle/>
-          <a:p>
-            <a:pPr algn="ctr" indent="0" marL="0">
-              <a:buNone/>
-            </a:pPr>
-            <a:r>
-              <a:rPr lang="en-US" sz="900" b="1" dirty="0">
-                <a:solidFill>
-                  <a:srgbClr val="9D174D"/>
-                </a:solidFill>
-                <a:latin typeface="Trebuchet MS" pitchFamily="34" charset="0"/>
-                <a:ea typeface="Trebuchet MS" pitchFamily="34" charset="-122"/>
-                <a:cs typeface="Trebuchet MS" pitchFamily="34" charset="-120"/>
-              </a:rPr>
-              <a:t>t</a:t>
-            </a:r>
-            <a:endParaRPr lang="en-US" sz="900" dirty="0"/>
-          </a:p>
-        </p:txBody>
-      </p:sp>
-      <p:sp>
-        <p:nvSpPr>
-          <p:cNvPr id="53" name="Shape 51"/>
-          <p:cNvSpPr/>
-          <p:nvPr/>
-        </p:nvSpPr>
-        <p:spPr>
-          <a:xfrm>
-            <a:off x="7576947" y="4169664"/>
-            <a:ext cx="685800" cy="384048"/>
-          </a:xfrm>
-          <a:prstGeom prst="rect">
-            <a:avLst>
-              <a:gd name="adj" fmla="val 9524"/>
-            </a:avLst>
-          </a:prstGeom>
-          <a:solidFill>
-            <a:srgbClr val="FFFFFF"/>
-          </a:solidFill>
-          <a:ln w="12700">
-            <a:solidFill>
-              <a:srgbClr val="DB2777"/>
-            </a:solidFill>
-            <a:prstDash val="solid"/>
-          </a:ln>
-        </p:spPr>
-      </p:sp>
-      <p:sp>
-        <p:nvSpPr>
-          <p:cNvPr id="54" name="Text 52"/>
-          <p:cNvSpPr/>
-          <p:nvPr/>
-        </p:nvSpPr>
-        <p:spPr>
-          <a:xfrm>
-            <a:off x="7576947" y="4169664"/>
+            <a:off x="7031736" y="4169664"/>
             <a:ext cx="685800" cy="384048"/>
           </a:xfrm>
           <a:prstGeom prst="rect">
@@ -17750,7 +16889,7 @@
                 <a:ea typeface="Calibri" pitchFamily="34" charset="-122"/>
                 <a:cs typeface="Calibri" pitchFamily="34" charset="-120"/>
               </a:rPr>
-              <a:t>inventor</a:t>
+              <a:t>director</a:t>
             </a:r>
             <a:pPr algn="l" indent="0" marL="0">
               <a:buNone/>
@@ -17781,7 +16920,7 @@
                 <a:ea typeface="Calibri" pitchFamily="34" charset="-122"/>
                 <a:cs typeface="Calibri" pitchFamily="34" charset="-120"/>
               </a:rPr>
-              <a:t>senator</a:t>
+              <a:t>inventor</a:t>
             </a:r>
             <a:pPr algn="l" indent="0" marL="0">
               <a:buNone/>
@@ -17812,7 +16951,7 @@
                 <a:ea typeface="Calibri" pitchFamily="34" charset="-122"/>
                 <a:cs typeface="Calibri" pitchFamily="34" charset="-120"/>
               </a:rPr>
-              <a:t>inspector</a:t>
+              <a:t>supervisor</a:t>
             </a:r>
             <a:pPr algn="l" indent="0" marL="0">
               <a:buNone/>
@@ -17826,7 +16965,7 @@
                 <a:ea typeface="Calibri" pitchFamily="34" charset="-122"/>
                 <a:cs typeface="Calibri" pitchFamily="34" charset="-120"/>
               </a:rPr>
-              <a:t> to examine her remarkable new creation.</a:t>
+              <a:t> to present their ideas to the whole team.</a:t>
             </a:r>
             <a:endParaRPr lang="en-US" sz="1800" dirty="0"/>
           </a:p>
@@ -17981,7 +17120,7 @@
                 <a:ea typeface="Trebuchet MS" pitchFamily="34" charset="-122"/>
                 <a:cs typeface="Trebuchet MS" pitchFamily="34" charset="-120"/>
               </a:rPr>
-              <a:t>inventor</a:t>
+              <a:t>director</a:t>
             </a:r>
             <a:endParaRPr lang="en-US" sz="1400" dirty="0"/>
           </a:p>
@@ -18109,7 +17248,7 @@
                 <a:ea typeface="Trebuchet MS" pitchFamily="34" charset="-122"/>
                 <a:cs typeface="Trebuchet MS" pitchFamily="34" charset="-120"/>
               </a:rPr>
-              <a:t>senator</a:t>
+              <a:t>inventor</a:t>
             </a:r>
             <a:endParaRPr lang="en-US" sz="1400" dirty="0"/>
           </a:p>
@@ -18237,7 +17376,7 @@
                 <a:ea typeface="Trebuchet MS" pitchFamily="34" charset="-122"/>
                 <a:cs typeface="Trebuchet MS" pitchFamily="34" charset="-120"/>
               </a:rPr>
-              <a:t>inspector</a:t>
+              <a:t>supervisor</a:t>
             </a:r>
             <a:endParaRPr lang="en-US" sz="1400" dirty="0"/>
           </a:p>
@@ -18707,7 +17846,7 @@
                 <a:ea typeface="Trebuchet MS" pitchFamily="34" charset="-122"/>
                 <a:cs typeface="Trebuchet MS" pitchFamily="34" charset="-120"/>
               </a:rPr>
-              <a:t>inventor</a:t>
+              <a:t>director</a:t>
             </a:r>
             <a:endParaRPr lang="en-US" sz="2800" dirty="0"/>
           </a:p>
@@ -19534,7 +18673,7 @@
                 <a:ea typeface="Trebuchet MS" pitchFamily="34" charset="-122"/>
                 <a:cs typeface="Trebuchet MS" pitchFamily="34" charset="-120"/>
               </a:rPr>
-              <a:t>inventor</a:t>
+              <a:t>director</a:t>
             </a:r>
             <a:endParaRPr lang="en-US" sz="2800" dirty="0"/>
           </a:p>
@@ -19673,7 +18812,7 @@
                 <a:ea typeface="Trebuchet MS" pitchFamily="34" charset="-122"/>
                 <a:cs typeface="Trebuchet MS" pitchFamily="34" charset="-120"/>
               </a:rPr>
-              <a:t>in</a:t>
+              <a:t>di</a:t>
             </a:r>
             <a:endParaRPr lang="en-US" sz="1300" dirty="0"/>
           </a:p>
@@ -19712,7 +18851,7 @@
                 <a:ea typeface="Calibri" pitchFamily="34" charset="-122"/>
                 <a:cs typeface="Calibri" pitchFamily="34" charset="-120"/>
               </a:rPr>
-              <a:t>into or upon</a:t>
+              <a:t>apart, through</a:t>
             </a:r>
             <a:endParaRPr lang="en-US" sz="850" dirty="0"/>
           </a:p>
@@ -19720,7 +18859,46 @@
       </p:sp>
       <p:sp>
         <p:nvSpPr>
-          <p:cNvPr id="19" name="Shape 17"/>
+          <p:cNvPr id="19" name="Text 17"/>
+          <p:cNvSpPr/>
+          <p:nvPr/>
+        </p:nvSpPr>
+        <p:spPr>
+          <a:xfrm>
+            <a:off x="2221992" y="2752344"/>
+            <a:ext cx="1828800" cy="182880"/>
+          </a:xfrm>
+          <a:prstGeom prst="rect">
+            <a:avLst/>
+          </a:prstGeom>
+          <a:noFill/>
+          <a:ln/>
+        </p:spPr>
+        <p:txBody>
+          <a:bodyPr wrap="square" lIns="0" tIns="0" rIns="0" bIns="0" rtlCol="0" anchor="t"/>
+          <a:lstStyle/>
+          <a:p>
+            <a:pPr algn="ctr" indent="0" marL="0">
+              <a:buNone/>
+            </a:pPr>
+            <a:r>
+              <a:rPr lang="en-US" sz="700" i="1" dirty="0">
+                <a:solidFill>
+                  <a:srgbClr val="94A3B8"/>
+                </a:solidFill>
+                <a:latin typeface="Calibri" pitchFamily="34" charset="0"/>
+                <a:ea typeface="Calibri" pitchFamily="34" charset="-122"/>
+                <a:cs typeface="Calibri" pitchFamily="34" charset="-120"/>
+              </a:rPr>
+              <a:t>dis → di before some consonants</a:t>
+            </a:r>
+            <a:endParaRPr lang="en-US" sz="700" dirty="0"/>
+          </a:p>
+        </p:txBody>
+      </p:sp>
+      <p:sp>
+        <p:nvSpPr>
+          <p:cNvPr id="20" name="Shape 18"/>
           <p:cNvSpPr/>
           <p:nvPr/>
         </p:nvSpPr>
@@ -19754,7 +18932,7 @@
       </p:sp>
       <p:sp>
         <p:nvSpPr>
-          <p:cNvPr id="20" name="Text 18"/>
+          <p:cNvPr id="21" name="Text 19"/>
           <p:cNvSpPr/>
           <p:nvPr/>
         </p:nvSpPr>
@@ -19785,7 +18963,7 @@
                 <a:ea typeface="Trebuchet MS" pitchFamily="34" charset="-122"/>
                 <a:cs typeface="Trebuchet MS" pitchFamily="34" charset="-120"/>
               </a:rPr>
-              <a:t>vent</a:t>
+              <a:t>rect</a:t>
             </a:r>
             <a:endParaRPr lang="en-US" sz="1300" dirty="0"/>
           </a:p>
@@ -19793,7 +18971,7 @@
       </p:sp>
       <p:sp>
         <p:nvSpPr>
-          <p:cNvPr id="21" name="Text 19"/>
+          <p:cNvPr id="22" name="Text 20"/>
           <p:cNvSpPr/>
           <p:nvPr/>
         </p:nvSpPr>
@@ -19824,7 +19002,7 @@
                 <a:ea typeface="Calibri" pitchFamily="34" charset="-122"/>
                 <a:cs typeface="Calibri" pitchFamily="34" charset="-120"/>
               </a:rPr>
-              <a:t>to come or arrive</a:t>
+              <a:t>to guide or lead straight</a:t>
             </a:r>
             <a:endParaRPr lang="en-US" sz="850" dirty="0"/>
           </a:p>
@@ -19832,7 +19010,7 @@
       </p:sp>
       <p:sp>
         <p:nvSpPr>
-          <p:cNvPr id="22" name="Shape 20"/>
+          <p:cNvPr id="23" name="Shape 21"/>
           <p:cNvSpPr/>
           <p:nvPr/>
         </p:nvSpPr>
@@ -19866,7 +19044,7 @@
       </p:sp>
       <p:sp>
         <p:nvSpPr>
-          <p:cNvPr id="23" name="Text 21"/>
+          <p:cNvPr id="24" name="Text 22"/>
           <p:cNvSpPr/>
           <p:nvPr/>
         </p:nvSpPr>
@@ -19905,7 +19083,7 @@
       </p:sp>
       <p:sp>
         <p:nvSpPr>
-          <p:cNvPr id="24" name="Text 22"/>
+          <p:cNvPr id="25" name="Text 23"/>
           <p:cNvSpPr/>
           <p:nvPr/>
         </p:nvSpPr>
@@ -19944,7 +19122,7 @@
       </p:sp>
       <p:sp>
         <p:nvSpPr>
-          <p:cNvPr id="25" name="Shape 23"/>
+          <p:cNvPr id="26" name="Shape 24"/>
           <p:cNvSpPr/>
           <p:nvPr/>
         </p:nvSpPr>
@@ -19971,7 +19149,7 @@
       </p:sp>
       <p:sp>
         <p:nvSpPr>
-          <p:cNvPr id="26" name="Text 24"/>
+          <p:cNvPr id="27" name="Text 25"/>
           <p:cNvSpPr/>
           <p:nvPr/>
         </p:nvSpPr>
@@ -20010,7 +19188,7 @@
       </p:sp>
       <p:sp>
         <p:nvSpPr>
-          <p:cNvPr id="27" name="Shape 25"/>
+          <p:cNvPr id="28" name="Shape 26"/>
           <p:cNvSpPr/>
           <p:nvPr/>
         </p:nvSpPr>
@@ -20037,7 +19215,7 @@
       </p:sp>
       <p:sp>
         <p:nvSpPr>
-          <p:cNvPr id="28" name="Text 26"/>
+          <p:cNvPr id="29" name="Text 27"/>
           <p:cNvSpPr/>
           <p:nvPr/>
         </p:nvSpPr>
@@ -20076,7 +19254,7 @@
       </p:sp>
       <p:sp>
         <p:nvSpPr>
-          <p:cNvPr id="29" name="Shape 27"/>
+          <p:cNvPr id="30" name="Shape 28"/>
           <p:cNvSpPr/>
           <p:nvPr/>
         </p:nvSpPr>
@@ -20103,7 +19281,7 @@
       </p:sp>
       <p:sp>
         <p:nvSpPr>
-          <p:cNvPr id="30" name="Text 28"/>
+          <p:cNvPr id="31" name="Text 29"/>
           <p:cNvSpPr/>
           <p:nvPr/>
         </p:nvSpPr>
@@ -20142,7 +19320,7 @@
       </p:sp>
       <p:sp>
         <p:nvSpPr>
-          <p:cNvPr id="31" name="Shape 29"/>
+          <p:cNvPr id="32" name="Shape 30"/>
           <p:cNvSpPr/>
           <p:nvPr/>
         </p:nvSpPr>
@@ -20169,7 +19347,7 @@
       </p:sp>
       <p:sp>
         <p:nvSpPr>
-          <p:cNvPr id="32" name="Text 30"/>
+          <p:cNvPr id="33" name="Text 31"/>
           <p:cNvSpPr/>
           <p:nvPr/>
         </p:nvSpPr>
@@ -20631,7 +19809,7 @@
                 <a:ea typeface="Trebuchet MS" pitchFamily="34" charset="-122"/>
                 <a:cs typeface="Trebuchet MS" pitchFamily="34" charset="-120"/>
               </a:rPr>
-              <a:t>inventor</a:t>
+              <a:t>director</a:t>
             </a:r>
             <a:endParaRPr lang="en-US" sz="2800" dirty="0"/>
           </a:p>
@@ -20770,7 +19948,7 @@
                 <a:ea typeface="Trebuchet MS" pitchFamily="34" charset="-122"/>
                 <a:cs typeface="Trebuchet MS" pitchFamily="34" charset="-120"/>
               </a:rPr>
-              <a:t>in</a:t>
+              <a:t>di</a:t>
             </a:r>
             <a:endParaRPr lang="en-US" sz="1300" dirty="0"/>
           </a:p>
@@ -20809,7 +19987,7 @@
                 <a:ea typeface="Calibri" pitchFamily="34" charset="-122"/>
                 <a:cs typeface="Calibri" pitchFamily="34" charset="-120"/>
               </a:rPr>
-              <a:t>into or upon</a:t>
+              <a:t>apart, through</a:t>
             </a:r>
             <a:endParaRPr lang="en-US" sz="850" dirty="0"/>
           </a:p>
@@ -20817,7 +19995,46 @@
       </p:sp>
       <p:sp>
         <p:nvSpPr>
-          <p:cNvPr id="19" name="Shape 17"/>
+          <p:cNvPr id="19" name="Text 17"/>
+          <p:cNvSpPr/>
+          <p:nvPr/>
+        </p:nvSpPr>
+        <p:spPr>
+          <a:xfrm>
+            <a:off x="2221992" y="2752344"/>
+            <a:ext cx="1828800" cy="182880"/>
+          </a:xfrm>
+          <a:prstGeom prst="rect">
+            <a:avLst/>
+          </a:prstGeom>
+          <a:noFill/>
+          <a:ln/>
+        </p:spPr>
+        <p:txBody>
+          <a:bodyPr wrap="square" lIns="0" tIns="0" rIns="0" bIns="0" rtlCol="0" anchor="t"/>
+          <a:lstStyle/>
+          <a:p>
+            <a:pPr algn="ctr" indent="0" marL="0">
+              <a:buNone/>
+            </a:pPr>
+            <a:r>
+              <a:rPr lang="en-US" sz="700" i="1" dirty="0">
+                <a:solidFill>
+                  <a:srgbClr val="94A3B8"/>
+                </a:solidFill>
+                <a:latin typeface="Calibri" pitchFamily="34" charset="0"/>
+                <a:ea typeface="Calibri" pitchFamily="34" charset="-122"/>
+                <a:cs typeface="Calibri" pitchFamily="34" charset="-120"/>
+              </a:rPr>
+              <a:t>dis → di before some consonants</a:t>
+            </a:r>
+            <a:endParaRPr lang="en-US" sz="700" dirty="0"/>
+          </a:p>
+        </p:txBody>
+      </p:sp>
+      <p:sp>
+        <p:nvSpPr>
+          <p:cNvPr id="20" name="Shape 18"/>
           <p:cNvSpPr/>
           <p:nvPr/>
         </p:nvSpPr>
@@ -20851,7 +20068,7 @@
       </p:sp>
       <p:sp>
         <p:nvSpPr>
-          <p:cNvPr id="20" name="Text 18"/>
+          <p:cNvPr id="21" name="Text 19"/>
           <p:cNvSpPr/>
           <p:nvPr/>
         </p:nvSpPr>
@@ -20882,7 +20099,7 @@
                 <a:ea typeface="Trebuchet MS" pitchFamily="34" charset="-122"/>
                 <a:cs typeface="Trebuchet MS" pitchFamily="34" charset="-120"/>
               </a:rPr>
-              <a:t>vent</a:t>
+              <a:t>rect</a:t>
             </a:r>
             <a:endParaRPr lang="en-US" sz="1300" dirty="0"/>
           </a:p>
@@ -20890,7 +20107,7 @@
       </p:sp>
       <p:sp>
         <p:nvSpPr>
-          <p:cNvPr id="21" name="Text 19"/>
+          <p:cNvPr id="22" name="Text 20"/>
           <p:cNvSpPr/>
           <p:nvPr/>
         </p:nvSpPr>
@@ -20921,7 +20138,7 @@
                 <a:ea typeface="Calibri" pitchFamily="34" charset="-122"/>
                 <a:cs typeface="Calibri" pitchFamily="34" charset="-120"/>
               </a:rPr>
-              <a:t>to come or arrive</a:t>
+              <a:t>to guide or lead straight</a:t>
             </a:r>
             <a:endParaRPr lang="en-US" sz="850" dirty="0"/>
           </a:p>
@@ -20929,7 +20146,7 @@
       </p:sp>
       <p:sp>
         <p:nvSpPr>
-          <p:cNvPr id="22" name="Shape 20"/>
+          <p:cNvPr id="23" name="Shape 21"/>
           <p:cNvSpPr/>
           <p:nvPr/>
         </p:nvSpPr>
@@ -20963,7 +20180,7 @@
       </p:sp>
       <p:sp>
         <p:nvSpPr>
-          <p:cNvPr id="23" name="Text 21"/>
+          <p:cNvPr id="24" name="Text 22"/>
           <p:cNvSpPr/>
           <p:nvPr/>
         </p:nvSpPr>
@@ -21002,7 +20219,7 @@
       </p:sp>
       <p:sp>
         <p:nvSpPr>
-          <p:cNvPr id="24" name="Text 22"/>
+          <p:cNvPr id="25" name="Text 23"/>
           <p:cNvSpPr/>
           <p:nvPr/>
         </p:nvSpPr>
@@ -21041,7 +20258,7 @@
       </p:sp>
       <p:sp>
         <p:nvSpPr>
-          <p:cNvPr id="25" name="Shape 23"/>
+          <p:cNvPr id="26" name="Shape 24"/>
           <p:cNvSpPr/>
           <p:nvPr/>
         </p:nvSpPr>
@@ -21068,7 +20285,7 @@
       </p:sp>
       <p:sp>
         <p:nvSpPr>
-          <p:cNvPr id="26" name="Text 24"/>
+          <p:cNvPr id="27" name="Text 25"/>
           <p:cNvSpPr/>
           <p:nvPr/>
         </p:nvSpPr>
@@ -21107,7 +20324,7 @@
       </p:sp>
       <p:sp>
         <p:nvSpPr>
-          <p:cNvPr id="27" name="Shape 25"/>
+          <p:cNvPr id="28" name="Shape 26"/>
           <p:cNvSpPr/>
           <p:nvPr/>
         </p:nvSpPr>
@@ -21134,7 +20351,7 @@
       </p:sp>
       <p:sp>
         <p:nvSpPr>
-          <p:cNvPr id="28" name="Shape 26"/>
+          <p:cNvPr id="29" name="Shape 27"/>
           <p:cNvSpPr/>
           <p:nvPr/>
         </p:nvSpPr>
@@ -21161,7 +20378,7 @@
       </p:sp>
       <p:sp>
         <p:nvSpPr>
-          <p:cNvPr id="29" name="Text 27"/>
+          <p:cNvPr id="30" name="Text 28"/>
           <p:cNvSpPr/>
           <p:nvPr/>
         </p:nvSpPr>
@@ -21192,7 +20409,7 @@
                 <a:ea typeface="Trebuchet MS" pitchFamily="34" charset="-122"/>
                 <a:cs typeface="Trebuchet MS" pitchFamily="34" charset="-120"/>
               </a:rPr>
-              <a:t>in</a:t>
+              <a:t>di</a:t>
             </a:r>
             <a:endParaRPr lang="en-US" sz="1400" dirty="0"/>
           </a:p>
@@ -21200,7 +20417,7 @@
       </p:sp>
       <p:sp>
         <p:nvSpPr>
-          <p:cNvPr id="30" name="Text 28"/>
+          <p:cNvPr id="31" name="Text 29"/>
           <p:cNvSpPr/>
           <p:nvPr/>
         </p:nvSpPr>
@@ -21239,7 +20456,7 @@
       </p:sp>
       <p:sp>
         <p:nvSpPr>
-          <p:cNvPr id="31" name="Shape 29"/>
+          <p:cNvPr id="32" name="Shape 30"/>
           <p:cNvSpPr/>
           <p:nvPr/>
         </p:nvSpPr>
@@ -21266,7 +20483,7 @@
       </p:sp>
       <p:sp>
         <p:nvSpPr>
-          <p:cNvPr id="32" name="Text 30"/>
+          <p:cNvPr id="33" name="Text 31"/>
           <p:cNvSpPr/>
           <p:nvPr/>
         </p:nvSpPr>
@@ -21297,7 +20514,7 @@
                 <a:ea typeface="Trebuchet MS" pitchFamily="34" charset="-122"/>
                 <a:cs typeface="Trebuchet MS" pitchFamily="34" charset="-120"/>
               </a:rPr>
-              <a:t>ven</a:t>
+              <a:t>rec</a:t>
             </a:r>
             <a:endParaRPr lang="en-US" sz="1400" dirty="0"/>
           </a:p>
@@ -21305,7 +20522,7 @@
       </p:sp>
       <p:sp>
         <p:nvSpPr>
-          <p:cNvPr id="33" name="Text 31"/>
+          <p:cNvPr id="34" name="Text 32"/>
           <p:cNvSpPr/>
           <p:nvPr/>
         </p:nvSpPr>
@@ -21344,7 +20561,7 @@
       </p:sp>
       <p:sp>
         <p:nvSpPr>
-          <p:cNvPr id="34" name="Shape 32"/>
+          <p:cNvPr id="35" name="Shape 33"/>
           <p:cNvSpPr/>
           <p:nvPr/>
         </p:nvSpPr>
@@ -21371,7 +20588,7 @@
       </p:sp>
       <p:sp>
         <p:nvSpPr>
-          <p:cNvPr id="35" name="Text 33"/>
+          <p:cNvPr id="36" name="Text 34"/>
           <p:cNvSpPr/>
           <p:nvPr/>
         </p:nvSpPr>
@@ -21410,7 +20627,7 @@
       </p:sp>
       <p:sp>
         <p:nvSpPr>
-          <p:cNvPr id="36" name="Shape 34"/>
+          <p:cNvPr id="37" name="Shape 35"/>
           <p:cNvSpPr/>
           <p:nvPr/>
         </p:nvSpPr>
@@ -21437,7 +20654,7 @@
       </p:sp>
       <p:sp>
         <p:nvSpPr>
-          <p:cNvPr id="37" name="Text 35"/>
+          <p:cNvPr id="38" name="Text 36"/>
           <p:cNvSpPr/>
           <p:nvPr/>
         </p:nvSpPr>
@@ -21476,7 +20693,7 @@
       </p:sp>
       <p:sp>
         <p:nvSpPr>
-          <p:cNvPr id="38" name="Shape 36"/>
+          <p:cNvPr id="39" name="Shape 37"/>
           <p:cNvSpPr/>
           <p:nvPr/>
         </p:nvSpPr>
@@ -21503,7 +20720,7 @@
       </p:sp>
       <p:sp>
         <p:nvSpPr>
-          <p:cNvPr id="39" name="Text 37"/>
+          <p:cNvPr id="40" name="Text 38"/>
           <p:cNvSpPr/>
           <p:nvPr/>
         </p:nvSpPr>
@@ -21965,7 +21182,7 @@
                 <a:ea typeface="Trebuchet MS" pitchFamily="34" charset="-122"/>
                 <a:cs typeface="Trebuchet MS" pitchFamily="34" charset="-120"/>
               </a:rPr>
-              <a:t>inventor</a:t>
+              <a:t>director</a:t>
             </a:r>
             <a:endParaRPr lang="en-US" sz="2800" dirty="0"/>
           </a:p>
@@ -22104,7 +21321,7 @@
                 <a:ea typeface="Trebuchet MS" pitchFamily="34" charset="-122"/>
                 <a:cs typeface="Trebuchet MS" pitchFamily="34" charset="-120"/>
               </a:rPr>
-              <a:t>in</a:t>
+              <a:t>di</a:t>
             </a:r>
             <a:endParaRPr lang="en-US" sz="1300" dirty="0"/>
           </a:p>
@@ -22143,7 +21360,7 @@
                 <a:ea typeface="Calibri" pitchFamily="34" charset="-122"/>
                 <a:cs typeface="Calibri" pitchFamily="34" charset="-120"/>
               </a:rPr>
-              <a:t>into or upon</a:t>
+              <a:t>apart, through</a:t>
             </a:r>
             <a:endParaRPr lang="en-US" sz="850" dirty="0"/>
           </a:p>
@@ -22151,7 +21368,46 @@
       </p:sp>
       <p:sp>
         <p:nvSpPr>
-          <p:cNvPr id="19" name="Shape 17"/>
+          <p:cNvPr id="19" name="Text 17"/>
+          <p:cNvSpPr/>
+          <p:nvPr/>
+        </p:nvSpPr>
+        <p:spPr>
+          <a:xfrm>
+            <a:off x="2221992" y="2752344"/>
+            <a:ext cx="1828800" cy="182880"/>
+          </a:xfrm>
+          <a:prstGeom prst="rect">
+            <a:avLst/>
+          </a:prstGeom>
+          <a:noFill/>
+          <a:ln/>
+        </p:spPr>
+        <p:txBody>
+          <a:bodyPr wrap="square" lIns="0" tIns="0" rIns="0" bIns="0" rtlCol="0" anchor="t"/>
+          <a:lstStyle/>
+          <a:p>
+            <a:pPr algn="ctr" indent="0" marL="0">
+              <a:buNone/>
+            </a:pPr>
+            <a:r>
+              <a:rPr lang="en-US" sz="700" i="1" dirty="0">
+                <a:solidFill>
+                  <a:srgbClr val="94A3B8"/>
+                </a:solidFill>
+                <a:latin typeface="Calibri" pitchFamily="34" charset="0"/>
+                <a:ea typeface="Calibri" pitchFamily="34" charset="-122"/>
+                <a:cs typeface="Calibri" pitchFamily="34" charset="-120"/>
+              </a:rPr>
+              <a:t>dis → di before some consonants</a:t>
+            </a:r>
+            <a:endParaRPr lang="en-US" sz="700" dirty="0"/>
+          </a:p>
+        </p:txBody>
+      </p:sp>
+      <p:sp>
+        <p:nvSpPr>
+          <p:cNvPr id="20" name="Shape 18"/>
           <p:cNvSpPr/>
           <p:nvPr/>
         </p:nvSpPr>
@@ -22185,7 +21441,7 @@
       </p:sp>
       <p:sp>
         <p:nvSpPr>
-          <p:cNvPr id="20" name="Text 18"/>
+          <p:cNvPr id="21" name="Text 19"/>
           <p:cNvSpPr/>
           <p:nvPr/>
         </p:nvSpPr>
@@ -22216,7 +21472,7 @@
                 <a:ea typeface="Trebuchet MS" pitchFamily="34" charset="-122"/>
                 <a:cs typeface="Trebuchet MS" pitchFamily="34" charset="-120"/>
               </a:rPr>
-              <a:t>vent</a:t>
+              <a:t>rect</a:t>
             </a:r>
             <a:endParaRPr lang="en-US" sz="1300" dirty="0"/>
           </a:p>
@@ -22224,7 +21480,7 @@
       </p:sp>
       <p:sp>
         <p:nvSpPr>
-          <p:cNvPr id="21" name="Text 19"/>
+          <p:cNvPr id="22" name="Text 20"/>
           <p:cNvSpPr/>
           <p:nvPr/>
         </p:nvSpPr>
@@ -22255,7 +21511,7 @@
                 <a:ea typeface="Calibri" pitchFamily="34" charset="-122"/>
                 <a:cs typeface="Calibri" pitchFamily="34" charset="-120"/>
               </a:rPr>
-              <a:t>to come or arrive</a:t>
+              <a:t>to guide or lead straight</a:t>
             </a:r>
             <a:endParaRPr lang="en-US" sz="850" dirty="0"/>
           </a:p>
@@ -22263,7 +21519,7 @@
       </p:sp>
       <p:sp>
         <p:nvSpPr>
-          <p:cNvPr id="22" name="Shape 20"/>
+          <p:cNvPr id="23" name="Shape 21"/>
           <p:cNvSpPr/>
           <p:nvPr/>
         </p:nvSpPr>
@@ -22297,7 +21553,7 @@
       </p:sp>
       <p:sp>
         <p:nvSpPr>
-          <p:cNvPr id="23" name="Text 21"/>
+          <p:cNvPr id="24" name="Text 22"/>
           <p:cNvSpPr/>
           <p:nvPr/>
         </p:nvSpPr>
@@ -22336,7 +21592,7 @@
       </p:sp>
       <p:sp>
         <p:nvSpPr>
-          <p:cNvPr id="24" name="Text 22"/>
+          <p:cNvPr id="25" name="Text 23"/>
           <p:cNvSpPr/>
           <p:nvPr/>
         </p:nvSpPr>
@@ -22375,7 +21631,7 @@
       </p:sp>
       <p:sp>
         <p:nvSpPr>
-          <p:cNvPr id="25" name="Shape 23"/>
+          <p:cNvPr id="26" name="Shape 24"/>
           <p:cNvSpPr/>
           <p:nvPr/>
         </p:nvSpPr>
@@ -22402,7 +21658,7 @@
       </p:sp>
       <p:sp>
         <p:nvSpPr>
-          <p:cNvPr id="26" name="Text 24"/>
+          <p:cNvPr id="27" name="Text 25"/>
           <p:cNvSpPr/>
           <p:nvPr/>
         </p:nvSpPr>
@@ -22441,7 +21697,7 @@
       </p:sp>
       <p:sp>
         <p:nvSpPr>
-          <p:cNvPr id="27" name="Shape 25"/>
+          <p:cNvPr id="28" name="Shape 26"/>
           <p:cNvSpPr/>
           <p:nvPr/>
         </p:nvSpPr>
@@ -22468,7 +21724,7 @@
       </p:sp>
       <p:sp>
         <p:nvSpPr>
-          <p:cNvPr id="28" name="Shape 26"/>
+          <p:cNvPr id="29" name="Shape 27"/>
           <p:cNvSpPr/>
           <p:nvPr/>
         </p:nvSpPr>
@@ -22495,7 +21751,7 @@
       </p:sp>
       <p:sp>
         <p:nvSpPr>
-          <p:cNvPr id="29" name="Text 27"/>
+          <p:cNvPr id="30" name="Text 28"/>
           <p:cNvSpPr/>
           <p:nvPr/>
         </p:nvSpPr>
@@ -22526,7 +21782,7 @@
                 <a:ea typeface="Trebuchet MS" pitchFamily="34" charset="-122"/>
                 <a:cs typeface="Trebuchet MS" pitchFamily="34" charset="-120"/>
               </a:rPr>
-              <a:t>in</a:t>
+              <a:t>di</a:t>
             </a:r>
             <a:endParaRPr lang="en-US" sz="1400" dirty="0"/>
           </a:p>
@@ -22534,7 +21790,7 @@
       </p:sp>
       <p:sp>
         <p:nvSpPr>
-          <p:cNvPr id="30" name="Text 28"/>
+          <p:cNvPr id="31" name="Text 29"/>
           <p:cNvSpPr/>
           <p:nvPr/>
         </p:nvSpPr>
@@ -22573,7 +21829,7 @@
       </p:sp>
       <p:sp>
         <p:nvSpPr>
-          <p:cNvPr id="31" name="Shape 29"/>
+          <p:cNvPr id="32" name="Shape 30"/>
           <p:cNvSpPr/>
           <p:nvPr/>
         </p:nvSpPr>
@@ -22600,7 +21856,7 @@
       </p:sp>
       <p:sp>
         <p:nvSpPr>
-          <p:cNvPr id="32" name="Text 30"/>
+          <p:cNvPr id="33" name="Text 31"/>
           <p:cNvSpPr/>
           <p:nvPr/>
         </p:nvSpPr>
@@ -22631,7 +21887,7 @@
                 <a:ea typeface="Trebuchet MS" pitchFamily="34" charset="-122"/>
                 <a:cs typeface="Trebuchet MS" pitchFamily="34" charset="-120"/>
               </a:rPr>
-              <a:t>ven</a:t>
+              <a:t>rec</a:t>
             </a:r>
             <a:endParaRPr lang="en-US" sz="1400" dirty="0"/>
           </a:p>
@@ -22639,7 +21895,7 @@
       </p:sp>
       <p:sp>
         <p:nvSpPr>
-          <p:cNvPr id="33" name="Text 31"/>
+          <p:cNvPr id="34" name="Text 32"/>
           <p:cNvSpPr/>
           <p:nvPr/>
         </p:nvSpPr>
@@ -22678,7 +21934,7 @@
       </p:sp>
       <p:sp>
         <p:nvSpPr>
-          <p:cNvPr id="34" name="Shape 32"/>
+          <p:cNvPr id="35" name="Shape 33"/>
           <p:cNvSpPr/>
           <p:nvPr/>
         </p:nvSpPr>
@@ -22705,7 +21961,7 @@
       </p:sp>
       <p:sp>
         <p:nvSpPr>
-          <p:cNvPr id="35" name="Text 33"/>
+          <p:cNvPr id="36" name="Text 34"/>
           <p:cNvSpPr/>
           <p:nvPr/>
         </p:nvSpPr>
@@ -22744,7 +22000,7 @@
       </p:sp>
       <p:sp>
         <p:nvSpPr>
-          <p:cNvPr id="36" name="Shape 34"/>
+          <p:cNvPr id="37" name="Shape 35"/>
           <p:cNvSpPr/>
           <p:nvPr/>
         </p:nvSpPr>
@@ -22771,7 +22027,7 @@
       </p:sp>
       <p:sp>
         <p:nvSpPr>
-          <p:cNvPr id="37" name="Text 35"/>
+          <p:cNvPr id="38" name="Text 36"/>
           <p:cNvSpPr/>
           <p:nvPr/>
         </p:nvSpPr>
@@ -22810,18 +22066,18 @@
       </p:sp>
       <p:sp>
         <p:nvSpPr>
-          <p:cNvPr id="38" name="Shape 36"/>
+          <p:cNvPr id="39" name="Shape 37"/>
           <p:cNvSpPr/>
           <p:nvPr/>
         </p:nvSpPr>
         <p:spPr>
           <a:xfrm>
             <a:off x="1874520" y="4096512"/>
-            <a:ext cx="6903720" cy="658368"/>
+            <a:ext cx="6903720" cy="804672"/>
           </a:xfrm>
           <a:prstGeom prst="rect">
             <a:avLst>
-              <a:gd name="adj" fmla="val 8333"/>
+              <a:gd name="adj" fmla="val 6818"/>
             </a:avLst>
           </a:prstGeom>
           <a:solidFill>
@@ -22837,18 +22093,18 @@
       </p:sp>
       <p:sp>
         <p:nvSpPr>
-          <p:cNvPr id="39" name="Shape 37"/>
+          <p:cNvPr id="40" name="Shape 38"/>
           <p:cNvSpPr/>
           <p:nvPr/>
         </p:nvSpPr>
         <p:spPr>
           <a:xfrm>
             <a:off x="2124837" y="4169664"/>
-            <a:ext cx="685800" cy="475488"/>
+            <a:ext cx="685800" cy="384048"/>
           </a:xfrm>
           <a:prstGeom prst="rect">
             <a:avLst>
-              <a:gd name="adj" fmla="val 7692"/>
+              <a:gd name="adj" fmla="val 9524"/>
             </a:avLst>
           </a:prstGeom>
           <a:solidFill>
@@ -22864,14 +22120,14 @@
       </p:sp>
       <p:sp>
         <p:nvSpPr>
-          <p:cNvPr id="40" name="Text 38"/>
+          <p:cNvPr id="41" name="Text 39"/>
           <p:cNvSpPr/>
           <p:nvPr/>
         </p:nvSpPr>
         <p:spPr>
           <a:xfrm>
             <a:off x="2124837" y="4169664"/>
-            <a:ext cx="685800" cy="475488"/>
+            <a:ext cx="685800" cy="384048"/>
           </a:xfrm>
           <a:prstGeom prst="rect">
             <a:avLst/>
@@ -22895,7 +22151,7 @@
                 <a:ea typeface="Trebuchet MS" pitchFamily="34" charset="-122"/>
                 <a:cs typeface="Trebuchet MS" pitchFamily="34" charset="-120"/>
               </a:rPr>
-              <a:t>i</a:t>
+              <a:t>d</a:t>
             </a:r>
             <a:endParaRPr lang="en-US" sz="900" dirty="0"/>
           </a:p>
@@ -22903,18 +22159,18 @@
       </p:sp>
       <p:sp>
         <p:nvSpPr>
-          <p:cNvPr id="41" name="Shape 39"/>
+          <p:cNvPr id="42" name="Shape 40"/>
           <p:cNvSpPr/>
           <p:nvPr/>
         </p:nvSpPr>
         <p:spPr>
           <a:xfrm>
             <a:off x="3033522" y="4169664"/>
-            <a:ext cx="685800" cy="475488"/>
+            <a:ext cx="685800" cy="384048"/>
           </a:xfrm>
           <a:prstGeom prst="rect">
             <a:avLst>
-              <a:gd name="adj" fmla="val 7692"/>
+              <a:gd name="adj" fmla="val 9524"/>
             </a:avLst>
           </a:prstGeom>
           <a:solidFill>
@@ -22930,14 +22186,14 @@
       </p:sp>
       <p:sp>
         <p:nvSpPr>
-          <p:cNvPr id="42" name="Text 40"/>
+          <p:cNvPr id="43" name="Text 41"/>
           <p:cNvSpPr/>
           <p:nvPr/>
         </p:nvSpPr>
         <p:spPr>
           <a:xfrm>
             <a:off x="3033522" y="4169664"/>
-            <a:ext cx="685800" cy="475488"/>
+            <a:ext cx="685800" cy="384048"/>
           </a:xfrm>
           <a:prstGeom prst="rect">
             <a:avLst/>
@@ -22961,7 +22217,7 @@
                 <a:ea typeface="Trebuchet MS" pitchFamily="34" charset="-122"/>
                 <a:cs typeface="Trebuchet MS" pitchFamily="34" charset="-120"/>
               </a:rPr>
-              <a:t>n</a:t>
+              <a:t>i</a:t>
             </a:r>
             <a:endParaRPr lang="en-US" sz="900" dirty="0"/>
           </a:p>
@@ -22969,18 +22225,18 @@
       </p:sp>
       <p:sp>
         <p:nvSpPr>
-          <p:cNvPr id="43" name="Shape 41"/>
+          <p:cNvPr id="44" name="Shape 42"/>
           <p:cNvSpPr/>
           <p:nvPr/>
         </p:nvSpPr>
         <p:spPr>
           <a:xfrm>
             <a:off x="3942207" y="4169664"/>
-            <a:ext cx="685800" cy="475488"/>
+            <a:ext cx="685800" cy="384048"/>
           </a:xfrm>
           <a:prstGeom prst="rect">
             <a:avLst>
-              <a:gd name="adj" fmla="val 7692"/>
+              <a:gd name="adj" fmla="val 9524"/>
             </a:avLst>
           </a:prstGeom>
           <a:solidFill>
@@ -22996,14 +22252,14 @@
       </p:sp>
       <p:sp>
         <p:nvSpPr>
-          <p:cNvPr id="44" name="Text 42"/>
+          <p:cNvPr id="45" name="Text 43"/>
           <p:cNvSpPr/>
           <p:nvPr/>
         </p:nvSpPr>
         <p:spPr>
           <a:xfrm>
             <a:off x="3942207" y="4169664"/>
-            <a:ext cx="685800" cy="475488"/>
+            <a:ext cx="685800" cy="384048"/>
           </a:xfrm>
           <a:prstGeom prst="rect">
             <a:avLst/>
@@ -23027,7 +22283,7 @@
                 <a:ea typeface="Trebuchet MS" pitchFamily="34" charset="-122"/>
                 <a:cs typeface="Trebuchet MS" pitchFamily="34" charset="-120"/>
               </a:rPr>
-              <a:t>v</a:t>
+              <a:t>r</a:t>
             </a:r>
             <a:endParaRPr lang="en-US" sz="900" dirty="0"/>
           </a:p>
@@ -23035,18 +22291,18 @@
       </p:sp>
       <p:sp>
         <p:nvSpPr>
-          <p:cNvPr id="45" name="Shape 43"/>
+          <p:cNvPr id="46" name="Shape 44"/>
           <p:cNvSpPr/>
           <p:nvPr/>
         </p:nvSpPr>
         <p:spPr>
           <a:xfrm>
             <a:off x="4850892" y="4169664"/>
-            <a:ext cx="685800" cy="475488"/>
+            <a:ext cx="685800" cy="384048"/>
           </a:xfrm>
           <a:prstGeom prst="rect">
             <a:avLst>
-              <a:gd name="adj" fmla="val 7692"/>
+              <a:gd name="adj" fmla="val 9524"/>
             </a:avLst>
           </a:prstGeom>
           <a:solidFill>
@@ -23062,14 +22318,14 @@
       </p:sp>
       <p:sp>
         <p:nvSpPr>
-          <p:cNvPr id="46" name="Text 44"/>
+          <p:cNvPr id="47" name="Text 45"/>
           <p:cNvSpPr/>
           <p:nvPr/>
         </p:nvSpPr>
         <p:spPr>
           <a:xfrm>
             <a:off x="4850892" y="4169664"/>
-            <a:ext cx="685800" cy="475488"/>
+            <a:ext cx="685800" cy="384048"/>
           </a:xfrm>
           <a:prstGeom prst="rect">
             <a:avLst/>
@@ -23101,18 +22357,18 @@
       </p:sp>
       <p:sp>
         <p:nvSpPr>
-          <p:cNvPr id="47" name="Shape 45"/>
+          <p:cNvPr id="48" name="Shape 46"/>
           <p:cNvSpPr/>
           <p:nvPr/>
         </p:nvSpPr>
         <p:spPr>
           <a:xfrm>
             <a:off x="5759577" y="4169664"/>
-            <a:ext cx="685800" cy="475488"/>
+            <a:ext cx="685800" cy="384048"/>
           </a:xfrm>
           <a:prstGeom prst="rect">
             <a:avLst>
-              <a:gd name="adj" fmla="val 7692"/>
+              <a:gd name="adj" fmla="val 9524"/>
             </a:avLst>
           </a:prstGeom>
           <a:solidFill>
@@ -23128,14 +22384,14 @@
       </p:sp>
       <p:sp>
         <p:nvSpPr>
-          <p:cNvPr id="48" name="Text 46"/>
+          <p:cNvPr id="49" name="Text 47"/>
           <p:cNvSpPr/>
           <p:nvPr/>
         </p:nvSpPr>
         <p:spPr>
           <a:xfrm>
             <a:off x="5759577" y="4169664"/>
-            <a:ext cx="685800" cy="475488"/>
+            <a:ext cx="685800" cy="384048"/>
           </a:xfrm>
           <a:prstGeom prst="rect">
             <a:avLst/>
@@ -23159,7 +22415,7 @@
                 <a:ea typeface="Trebuchet MS" pitchFamily="34" charset="-122"/>
                 <a:cs typeface="Trebuchet MS" pitchFamily="34" charset="-120"/>
               </a:rPr>
-              <a:t>n</a:t>
+              <a:t>c</a:t>
             </a:r>
             <a:endParaRPr lang="en-US" sz="900" dirty="0"/>
           </a:p>
@@ -23167,18 +22423,57 @@
       </p:sp>
       <p:sp>
         <p:nvSpPr>
-          <p:cNvPr id="49" name="Shape 47"/>
+          <p:cNvPr id="50" name="Text 48"/>
+          <p:cNvSpPr/>
+          <p:nvPr/>
+        </p:nvSpPr>
+        <p:spPr>
+          <a:xfrm>
+            <a:off x="5759577" y="4572000"/>
+            <a:ext cx="685800" cy="219456"/>
+          </a:xfrm>
+          <a:prstGeom prst="rect">
+            <a:avLst/>
+          </a:prstGeom>
+          <a:noFill/>
+          <a:ln/>
+        </p:spPr>
+        <p:txBody>
+          <a:bodyPr wrap="square" lIns="0" tIns="0" rIns="0" bIns="0" rtlCol="0" anchor="t"/>
+          <a:lstStyle/>
+          <a:p>
+            <a:pPr algn="ctr" indent="0" marL="0">
+              <a:buNone/>
+            </a:pPr>
+            <a:r>
+              <a:rPr lang="en-US" sz="750" i="1" dirty="0">
+                <a:solidFill>
+                  <a:srgbClr val="94A3B8"/>
+                </a:solidFill>
+                <a:latin typeface="Calibri" pitchFamily="34" charset="0"/>
+                <a:ea typeface="Calibri" pitchFamily="34" charset="-122"/>
+                <a:cs typeface="Calibri" pitchFamily="34" charset="-120"/>
+              </a:rPr>
+              <a:t>/k/</a:t>
+            </a:r>
+            <a:endParaRPr lang="en-US" sz="750" dirty="0"/>
+          </a:p>
+        </p:txBody>
+      </p:sp>
+      <p:sp>
+        <p:nvSpPr>
+          <p:cNvPr id="51" name="Shape 49"/>
           <p:cNvSpPr/>
           <p:nvPr/>
         </p:nvSpPr>
         <p:spPr>
           <a:xfrm>
             <a:off x="6668262" y="4169664"/>
-            <a:ext cx="685800" cy="475488"/>
+            <a:ext cx="685800" cy="384048"/>
           </a:xfrm>
           <a:prstGeom prst="rect">
             <a:avLst>
-              <a:gd name="adj" fmla="val 7692"/>
+              <a:gd name="adj" fmla="val 9524"/>
             </a:avLst>
           </a:prstGeom>
           <a:solidFill>
@@ -23194,14 +22489,14 @@
       </p:sp>
       <p:sp>
         <p:nvSpPr>
-          <p:cNvPr id="50" name="Text 48"/>
+          <p:cNvPr id="52" name="Text 50"/>
           <p:cNvSpPr/>
           <p:nvPr/>
         </p:nvSpPr>
         <p:spPr>
           <a:xfrm>
             <a:off x="6668262" y="4169664"/>
-            <a:ext cx="685800" cy="475488"/>
+            <a:ext cx="685800" cy="384048"/>
           </a:xfrm>
           <a:prstGeom prst="rect">
             <a:avLst/>
@@ -23233,18 +22528,18 @@
       </p:sp>
       <p:sp>
         <p:nvSpPr>
-          <p:cNvPr id="51" name="Shape 49"/>
+          <p:cNvPr id="53" name="Shape 51"/>
           <p:cNvSpPr/>
           <p:nvPr/>
         </p:nvSpPr>
         <p:spPr>
           <a:xfrm>
             <a:off x="7576947" y="4169664"/>
-            <a:ext cx="685800" cy="475488"/>
+            <a:ext cx="685800" cy="384048"/>
           </a:xfrm>
           <a:prstGeom prst="rect">
             <a:avLst>
-              <a:gd name="adj" fmla="val 7692"/>
+              <a:gd name="adj" fmla="val 9524"/>
             </a:avLst>
           </a:prstGeom>
           <a:solidFill>
@@ -23260,14 +22555,14 @@
       </p:sp>
       <p:sp>
         <p:nvSpPr>
-          <p:cNvPr id="52" name="Text 50"/>
+          <p:cNvPr id="54" name="Text 52"/>
           <p:cNvSpPr/>
           <p:nvPr/>
         </p:nvSpPr>
         <p:spPr>
           <a:xfrm>
             <a:off x="7576947" y="4169664"/>
-            <a:ext cx="685800" cy="475488"/>
+            <a:ext cx="685800" cy="384048"/>
           </a:xfrm>
           <a:prstGeom prst="rect">
             <a:avLst/>
@@ -23722,7 +23017,7 @@
                 <a:ea typeface="Trebuchet MS" pitchFamily="34" charset="-122"/>
                 <a:cs typeface="Trebuchet MS" pitchFamily="34" charset="-120"/>
               </a:rPr>
-              <a:t>senator</a:t>
+              <a:t>inventor</a:t>
             </a:r>
             <a:endParaRPr lang="en-US" sz="2800" dirty="0"/>
           </a:p>
@@ -24549,7 +23844,7 @@
                 <a:ea typeface="Trebuchet MS" pitchFamily="34" charset="-122"/>
                 <a:cs typeface="Trebuchet MS" pitchFamily="34" charset="-120"/>
               </a:rPr>
-              <a:t>senator</a:t>
+              <a:t>inventor</a:t>
             </a:r>
             <a:endParaRPr lang="en-US" sz="2800" dirty="0"/>
           </a:p>
@@ -24629,7 +23924,7 @@
         </p:nvSpPr>
         <p:spPr>
           <a:xfrm>
-            <a:off x="2938272" y="2258568"/>
+            <a:off x="2221992" y="2258568"/>
             <a:ext cx="1828800" cy="292608"/>
           </a:xfrm>
           <a:prstGeom prst="rect">
@@ -24663,7 +23958,7 @@
         </p:nvSpPr>
         <p:spPr>
           <a:xfrm>
-            <a:off x="2938272" y="2258568"/>
+            <a:off x="2221992" y="2258568"/>
             <a:ext cx="1828800" cy="292608"/>
           </a:xfrm>
           <a:prstGeom prst="rect">
@@ -24688,7 +23983,7 @@
                 <a:ea typeface="Trebuchet MS" pitchFamily="34" charset="-122"/>
                 <a:cs typeface="Trebuchet MS" pitchFamily="34" charset="-120"/>
               </a:rPr>
-              <a:t>senat</a:t>
+              <a:t>in</a:t>
             </a:r>
             <a:endParaRPr lang="en-US" sz="1300" dirty="0"/>
           </a:p>
@@ -24702,7 +23997,7 @@
         </p:nvSpPr>
         <p:spPr>
           <a:xfrm>
-            <a:off x="2938272" y="2569464"/>
+            <a:off x="2221992" y="2569464"/>
             <a:ext cx="1828800" cy="201168"/>
           </a:xfrm>
           <a:prstGeom prst="rect">
@@ -24727,7 +24022,7 @@
                 <a:ea typeface="Calibri" pitchFamily="34" charset="-122"/>
                 <a:cs typeface="Calibri" pitchFamily="34" charset="-120"/>
               </a:rPr>
-              <a:t>council of elders</a:t>
+              <a:t>into, upon</a:t>
             </a:r>
             <a:endParaRPr lang="en-US" sz="850" dirty="0"/>
           </a:p>
@@ -24741,7 +24036,7 @@
         </p:nvSpPr>
         <p:spPr>
           <a:xfrm>
-            <a:off x="5803392" y="2258568"/>
+            <a:off x="4370832" y="2258568"/>
             <a:ext cx="1828800" cy="292608"/>
           </a:xfrm>
           <a:prstGeom prst="rect">
@@ -24750,11 +24045,11 @@
             </a:avLst>
           </a:prstGeom>
           <a:solidFill>
-            <a:srgbClr val="CCFBF1"/>
+            <a:srgbClr val="FCE7F3"/>
           </a:solidFill>
           <a:ln w="19050">
             <a:solidFill>
-              <a:srgbClr val="0D9488"/>
+              <a:srgbClr val="DB2777"/>
             </a:solidFill>
             <a:prstDash val="solid"/>
           </a:ln>
@@ -24775,7 +24070,7 @@
         </p:nvSpPr>
         <p:spPr>
           <a:xfrm>
-            <a:off x="5803392" y="2258568"/>
+            <a:off x="4370832" y="2258568"/>
             <a:ext cx="1828800" cy="292608"/>
           </a:xfrm>
           <a:prstGeom prst="rect">
@@ -24794,13 +24089,13 @@
             <a:r>
               <a:rPr lang="en-US" sz="1300" b="1" dirty="0">
                 <a:solidFill>
-                  <a:srgbClr val="0F766E"/>
+                  <a:srgbClr val="9D174D"/>
                 </a:solidFill>
                 <a:latin typeface="Trebuchet MS" pitchFamily="34" charset="0"/>
                 <a:ea typeface="Trebuchet MS" pitchFamily="34" charset="-122"/>
                 <a:cs typeface="Trebuchet MS" pitchFamily="34" charset="-120"/>
               </a:rPr>
-              <a:t>or</a:t>
+              <a:t>vent</a:t>
             </a:r>
             <a:endParaRPr lang="en-US" sz="1300" dirty="0"/>
           </a:p>
@@ -24814,7 +24109,7 @@
         </p:nvSpPr>
         <p:spPr>
           <a:xfrm>
-            <a:off x="5803392" y="2569464"/>
+            <a:off x="4370832" y="2569464"/>
             <a:ext cx="1828800" cy="201168"/>
           </a:xfrm>
           <a:prstGeom prst="rect">
@@ -24839,6 +24134,118 @@
                 <a:ea typeface="Calibri" pitchFamily="34" charset="-122"/>
                 <a:cs typeface="Calibri" pitchFamily="34" charset="-120"/>
               </a:rPr>
+              <a:t>to come, arrive at</a:t>
+            </a:r>
+            <a:endParaRPr lang="en-US" sz="850" dirty="0"/>
+          </a:p>
+        </p:txBody>
+      </p:sp>
+      <p:sp>
+        <p:nvSpPr>
+          <p:cNvPr id="22" name="Shape 20"/>
+          <p:cNvSpPr/>
+          <p:nvPr/>
+        </p:nvSpPr>
+        <p:spPr>
+          <a:xfrm>
+            <a:off x="6519672" y="2258568"/>
+            <a:ext cx="1828800" cy="292608"/>
+          </a:xfrm>
+          <a:prstGeom prst="rect">
+            <a:avLst>
+              <a:gd name="adj" fmla="val 25000"/>
+            </a:avLst>
+          </a:prstGeom>
+          <a:solidFill>
+            <a:srgbClr val="CCFBF1"/>
+          </a:solidFill>
+          <a:ln w="19050">
+            <a:solidFill>
+              <a:srgbClr val="0D9488"/>
+            </a:solidFill>
+            <a:prstDash val="solid"/>
+          </a:ln>
+          <a:effectLst>
+            <a:outerShdw sx="100000" sy="100000" kx="0" ky="0" algn="bl" rotWithShape="0" blurRad="101600" dist="38100" dir="8100000">
+              <a:srgbClr val="000000">
+                <a:alpha val="12000"/>
+              </a:srgbClr>
+            </a:outerShdw>
+          </a:effectLst>
+        </p:spPr>
+      </p:sp>
+      <p:sp>
+        <p:nvSpPr>
+          <p:cNvPr id="23" name="Text 21"/>
+          <p:cNvSpPr/>
+          <p:nvPr/>
+        </p:nvSpPr>
+        <p:spPr>
+          <a:xfrm>
+            <a:off x="6519672" y="2258568"/>
+            <a:ext cx="1828800" cy="292608"/>
+          </a:xfrm>
+          <a:prstGeom prst="rect">
+            <a:avLst/>
+          </a:prstGeom>
+          <a:noFill/>
+          <a:ln/>
+        </p:spPr>
+        <p:txBody>
+          <a:bodyPr wrap="square" lIns="0" tIns="0" rIns="0" bIns="0" rtlCol="0" anchor="ctr"/>
+          <a:lstStyle/>
+          <a:p>
+            <a:pPr algn="ctr" indent="0" marL="0">
+              <a:buNone/>
+            </a:pPr>
+            <a:r>
+              <a:rPr lang="en-US" sz="1300" b="1" dirty="0">
+                <a:solidFill>
+                  <a:srgbClr val="0F766E"/>
+                </a:solidFill>
+                <a:latin typeface="Trebuchet MS" pitchFamily="34" charset="0"/>
+                <a:ea typeface="Trebuchet MS" pitchFamily="34" charset="-122"/>
+                <a:cs typeface="Trebuchet MS" pitchFamily="34" charset="-120"/>
+              </a:rPr>
+              <a:t>or</a:t>
+            </a:r>
+            <a:endParaRPr lang="en-US" sz="1300" dirty="0"/>
+          </a:p>
+        </p:txBody>
+      </p:sp>
+      <p:sp>
+        <p:nvSpPr>
+          <p:cNvPr id="24" name="Text 22"/>
+          <p:cNvSpPr/>
+          <p:nvPr/>
+        </p:nvSpPr>
+        <p:spPr>
+          <a:xfrm>
+            <a:off x="6519672" y="2569464"/>
+            <a:ext cx="1828800" cy="201168"/>
+          </a:xfrm>
+          <a:prstGeom prst="rect">
+            <a:avLst/>
+          </a:prstGeom>
+          <a:noFill/>
+          <a:ln/>
+        </p:spPr>
+        <p:txBody>
+          <a:bodyPr wrap="square" lIns="0" tIns="0" rIns="0" bIns="0" rtlCol="0" anchor="t"/>
+          <a:lstStyle/>
+          <a:p>
+            <a:pPr algn="ctr" indent="0" marL="0">
+              <a:buNone/>
+            </a:pPr>
+            <a:r>
+              <a:rPr lang="en-US" sz="850" dirty="0">
+                <a:solidFill>
+                  <a:srgbClr val="475569"/>
+                </a:solidFill>
+                <a:latin typeface="Calibri" pitchFamily="34" charset="0"/>
+                <a:ea typeface="Calibri" pitchFamily="34" charset="-122"/>
+                <a:cs typeface="Calibri" pitchFamily="34" charset="-120"/>
+              </a:rPr>
               <a:t>one who does</a:t>
             </a:r>
             <a:endParaRPr lang="en-US" sz="850" dirty="0"/>
@@ -24847,7 +24254,7 @@
       </p:sp>
       <p:sp>
         <p:nvSpPr>
-          <p:cNvPr id="22" name="Shape 20"/>
+          <p:cNvPr id="25" name="Shape 23"/>
           <p:cNvSpPr/>
           <p:nvPr/>
         </p:nvSpPr>
@@ -24874,7 +24281,7 @@
       </p:sp>
       <p:sp>
         <p:nvSpPr>
-          <p:cNvPr id="23" name="Text 21"/>
+          <p:cNvPr id="26" name="Text 24"/>
           <p:cNvSpPr/>
           <p:nvPr/>
         </p:nvSpPr>
@@ -24913,7 +24320,7 @@
       </p:sp>
       <p:sp>
         <p:nvSpPr>
-          <p:cNvPr id="24" name="Shape 22"/>
+          <p:cNvPr id="27" name="Shape 25"/>
           <p:cNvSpPr/>
           <p:nvPr/>
         </p:nvSpPr>
@@ -24940,7 +24347,7 @@
       </p:sp>
       <p:sp>
         <p:nvSpPr>
-          <p:cNvPr id="25" name="Text 23"/>
+          <p:cNvPr id="28" name="Text 26"/>
           <p:cNvSpPr/>
           <p:nvPr/>
         </p:nvSpPr>
@@ -24979,7 +24386,7 @@
       </p:sp>
       <p:sp>
         <p:nvSpPr>
-          <p:cNvPr id="26" name="Shape 24"/>
+          <p:cNvPr id="29" name="Shape 27"/>
           <p:cNvSpPr/>
           <p:nvPr/>
         </p:nvSpPr>
@@ -25006,7 +24413,7 @@
       </p:sp>
       <p:sp>
         <p:nvSpPr>
-          <p:cNvPr id="27" name="Text 25"/>
+          <p:cNvPr id="30" name="Text 28"/>
           <p:cNvSpPr/>
           <p:nvPr/>
         </p:nvSpPr>
@@ -25045,7 +24452,7 @@
       </p:sp>
       <p:sp>
         <p:nvSpPr>
-          <p:cNvPr id="28" name="Shape 26"/>
+          <p:cNvPr id="31" name="Shape 29"/>
           <p:cNvSpPr/>
           <p:nvPr/>
         </p:nvSpPr>
@@ -25072,7 +24479,7 @@
       </p:sp>
       <p:sp>
         <p:nvSpPr>
-          <p:cNvPr id="29" name="Text 27"/>
+          <p:cNvPr id="32" name="Text 30"/>
           <p:cNvSpPr/>
           <p:nvPr/>
         </p:nvSpPr>
@@ -26253,7 +25660,7 @@
                 <a:ea typeface="Trebuchet MS" pitchFamily="34" charset="-122"/>
                 <a:cs typeface="Trebuchet MS" pitchFamily="34" charset="-120"/>
               </a:rPr>
-              <a:t>senator</a:t>
+              <a:t>inventor</a:t>
             </a:r>
             <a:endParaRPr lang="en-US" sz="2800" dirty="0"/>
           </a:p>
@@ -26333,7 +25740,7 @@
         </p:nvSpPr>
         <p:spPr>
           <a:xfrm>
-            <a:off x="2938272" y="2258568"/>
+            <a:off x="2221992" y="2258568"/>
             <a:ext cx="1828800" cy="292608"/>
           </a:xfrm>
           <a:prstGeom prst="rect">
@@ -26367,7 +25774,7 @@
         </p:nvSpPr>
         <p:spPr>
           <a:xfrm>
-            <a:off x="2938272" y="2258568"/>
+            <a:off x="2221992" y="2258568"/>
             <a:ext cx="1828800" cy="292608"/>
           </a:xfrm>
           <a:prstGeom prst="rect">
@@ -26392,7 +25799,7 @@
                 <a:ea typeface="Trebuchet MS" pitchFamily="34" charset="-122"/>
                 <a:cs typeface="Trebuchet MS" pitchFamily="34" charset="-120"/>
               </a:rPr>
-              <a:t>senat</a:t>
+              <a:t>in</a:t>
             </a:r>
             <a:endParaRPr lang="en-US" sz="1300" dirty="0"/>
           </a:p>
@@ -26406,7 +25813,7 @@
         </p:nvSpPr>
         <p:spPr>
           <a:xfrm>
-            <a:off x="2938272" y="2569464"/>
+            <a:off x="2221992" y="2569464"/>
             <a:ext cx="1828800" cy="201168"/>
           </a:xfrm>
           <a:prstGeom prst="rect">
@@ -26431,7 +25838,7 @@
                 <a:ea typeface="Calibri" pitchFamily="34" charset="-122"/>
                 <a:cs typeface="Calibri" pitchFamily="34" charset="-120"/>
               </a:rPr>
-              <a:t>council of elders</a:t>
+              <a:t>into, upon</a:t>
             </a:r>
             <a:endParaRPr lang="en-US" sz="850" dirty="0"/>
           </a:p>
@@ -26445,7 +25852,7 @@
         </p:nvSpPr>
         <p:spPr>
           <a:xfrm>
-            <a:off x="5803392" y="2258568"/>
+            <a:off x="4370832" y="2258568"/>
             <a:ext cx="1828800" cy="292608"/>
           </a:xfrm>
           <a:prstGeom prst="rect">
@@ -26454,11 +25861,11 @@
             </a:avLst>
           </a:prstGeom>
           <a:solidFill>
-            <a:srgbClr val="CCFBF1"/>
+            <a:srgbClr val="FCE7F3"/>
           </a:solidFill>
           <a:ln w="19050">
             <a:solidFill>
-              <a:srgbClr val="0D9488"/>
+              <a:srgbClr val="DB2777"/>
             </a:solidFill>
             <a:prstDash val="solid"/>
           </a:ln>
@@ -26479,7 +25886,7 @@
         </p:nvSpPr>
         <p:spPr>
           <a:xfrm>
-            <a:off x="5803392" y="2258568"/>
+            <a:off x="4370832" y="2258568"/>
             <a:ext cx="1828800" cy="292608"/>
           </a:xfrm>
           <a:prstGeom prst="rect">
@@ -26498,13 +25905,13 @@
             <a:r>
               <a:rPr lang="en-US" sz="1300" b="1" dirty="0">
                 <a:solidFill>
-                  <a:srgbClr val="0F766E"/>
+                  <a:srgbClr val="9D174D"/>
                 </a:solidFill>
                 <a:latin typeface="Trebuchet MS" pitchFamily="34" charset="0"/>
                 <a:ea typeface="Trebuchet MS" pitchFamily="34" charset="-122"/>
                 <a:cs typeface="Trebuchet MS" pitchFamily="34" charset="-120"/>
               </a:rPr>
-              <a:t>or</a:t>
+              <a:t>vent</a:t>
             </a:r>
             <a:endParaRPr lang="en-US" sz="1300" dirty="0"/>
           </a:p>
@@ -26518,7 +25925,7 @@
         </p:nvSpPr>
         <p:spPr>
           <a:xfrm>
-            <a:off x="5803392" y="2569464"/>
+            <a:off x="4370832" y="2569464"/>
             <a:ext cx="1828800" cy="201168"/>
           </a:xfrm>
           <a:prstGeom prst="rect">
@@ -26543,6 +25950,118 @@
                 <a:ea typeface="Calibri" pitchFamily="34" charset="-122"/>
                 <a:cs typeface="Calibri" pitchFamily="34" charset="-120"/>
               </a:rPr>
+              <a:t>to come, arrive at</a:t>
+            </a:r>
+            <a:endParaRPr lang="en-US" sz="850" dirty="0"/>
+          </a:p>
+        </p:txBody>
+      </p:sp>
+      <p:sp>
+        <p:nvSpPr>
+          <p:cNvPr id="22" name="Shape 20"/>
+          <p:cNvSpPr/>
+          <p:nvPr/>
+        </p:nvSpPr>
+        <p:spPr>
+          <a:xfrm>
+            <a:off x="6519672" y="2258568"/>
+            <a:ext cx="1828800" cy="292608"/>
+          </a:xfrm>
+          <a:prstGeom prst="rect">
+            <a:avLst>
+              <a:gd name="adj" fmla="val 25000"/>
+            </a:avLst>
+          </a:prstGeom>
+          <a:solidFill>
+            <a:srgbClr val="CCFBF1"/>
+          </a:solidFill>
+          <a:ln w="19050">
+            <a:solidFill>
+              <a:srgbClr val="0D9488"/>
+            </a:solidFill>
+            <a:prstDash val="solid"/>
+          </a:ln>
+          <a:effectLst>
+            <a:outerShdw sx="100000" sy="100000" kx="0" ky="0" algn="bl" rotWithShape="0" blurRad="101600" dist="38100" dir="8100000">
+              <a:srgbClr val="000000">
+                <a:alpha val="12000"/>
+              </a:srgbClr>
+            </a:outerShdw>
+          </a:effectLst>
+        </p:spPr>
+      </p:sp>
+      <p:sp>
+        <p:nvSpPr>
+          <p:cNvPr id="23" name="Text 21"/>
+          <p:cNvSpPr/>
+          <p:nvPr/>
+        </p:nvSpPr>
+        <p:spPr>
+          <a:xfrm>
+            <a:off x="6519672" y="2258568"/>
+            <a:ext cx="1828800" cy="292608"/>
+          </a:xfrm>
+          <a:prstGeom prst="rect">
+            <a:avLst/>
+          </a:prstGeom>
+          <a:noFill/>
+          <a:ln/>
+        </p:spPr>
+        <p:txBody>
+          <a:bodyPr wrap="square" lIns="0" tIns="0" rIns="0" bIns="0" rtlCol="0" anchor="ctr"/>
+          <a:lstStyle/>
+          <a:p>
+            <a:pPr algn="ctr" indent="0" marL="0">
+              <a:buNone/>
+            </a:pPr>
+            <a:r>
+              <a:rPr lang="en-US" sz="1300" b="1" dirty="0">
+                <a:solidFill>
+                  <a:srgbClr val="0F766E"/>
+                </a:solidFill>
+                <a:latin typeface="Trebuchet MS" pitchFamily="34" charset="0"/>
+                <a:ea typeface="Trebuchet MS" pitchFamily="34" charset="-122"/>
+                <a:cs typeface="Trebuchet MS" pitchFamily="34" charset="-120"/>
+              </a:rPr>
+              <a:t>or</a:t>
+            </a:r>
+            <a:endParaRPr lang="en-US" sz="1300" dirty="0"/>
+          </a:p>
+        </p:txBody>
+      </p:sp>
+      <p:sp>
+        <p:nvSpPr>
+          <p:cNvPr id="24" name="Text 22"/>
+          <p:cNvSpPr/>
+          <p:nvPr/>
+        </p:nvSpPr>
+        <p:spPr>
+          <a:xfrm>
+            <a:off x="6519672" y="2569464"/>
+            <a:ext cx="1828800" cy="201168"/>
+          </a:xfrm>
+          <a:prstGeom prst="rect">
+            <a:avLst/>
+          </a:prstGeom>
+          <a:noFill/>
+          <a:ln/>
+        </p:spPr>
+        <p:txBody>
+          <a:bodyPr wrap="square" lIns="0" tIns="0" rIns="0" bIns="0" rtlCol="0" anchor="t"/>
+          <a:lstStyle/>
+          <a:p>
+            <a:pPr algn="ctr" indent="0" marL="0">
+              <a:buNone/>
+            </a:pPr>
+            <a:r>
+              <a:rPr lang="en-US" sz="850" dirty="0">
+                <a:solidFill>
+                  <a:srgbClr val="475569"/>
+                </a:solidFill>
+                <a:latin typeface="Calibri" pitchFamily="34" charset="0"/>
+                <a:ea typeface="Calibri" pitchFamily="34" charset="-122"/>
+                <a:cs typeface="Calibri" pitchFamily="34" charset="-120"/>
+              </a:rPr>
               <a:t>one who does</a:t>
             </a:r>
             <a:endParaRPr lang="en-US" sz="850" dirty="0"/>
@@ -26551,7 +26070,7 @@
       </p:sp>
       <p:sp>
         <p:nvSpPr>
-          <p:cNvPr id="22" name="Shape 20"/>
+          <p:cNvPr id="25" name="Shape 23"/>
           <p:cNvSpPr/>
           <p:nvPr/>
         </p:nvSpPr>
@@ -26578,7 +26097,7 @@
       </p:sp>
       <p:sp>
         <p:nvSpPr>
-          <p:cNvPr id="23" name="Text 21"/>
+          <p:cNvPr id="26" name="Text 24"/>
           <p:cNvSpPr/>
           <p:nvPr/>
         </p:nvSpPr>
@@ -26617,7 +26136,7 @@
       </p:sp>
       <p:sp>
         <p:nvSpPr>
-          <p:cNvPr id="24" name="Shape 22"/>
+          <p:cNvPr id="27" name="Shape 25"/>
           <p:cNvSpPr/>
           <p:nvPr/>
         </p:nvSpPr>
@@ -26644,7 +26163,7 @@
       </p:sp>
       <p:sp>
         <p:nvSpPr>
-          <p:cNvPr id="25" name="Shape 23"/>
+          <p:cNvPr id="28" name="Shape 26"/>
           <p:cNvSpPr/>
           <p:nvPr/>
         </p:nvSpPr>
@@ -26671,7 +26190,7 @@
       </p:sp>
       <p:sp>
         <p:nvSpPr>
-          <p:cNvPr id="26" name="Text 24"/>
+          <p:cNvPr id="29" name="Text 27"/>
           <p:cNvSpPr/>
           <p:nvPr/>
         </p:nvSpPr>
@@ -26702,7 +26221,7 @@
                 <a:ea typeface="Trebuchet MS" pitchFamily="34" charset="-122"/>
                 <a:cs typeface="Trebuchet MS" pitchFamily="34" charset="-120"/>
               </a:rPr>
-              <a:t>sen</a:t>
+              <a:t>in</a:t>
             </a:r>
             <a:endParaRPr lang="en-US" sz="1400" dirty="0"/>
           </a:p>
@@ -26710,7 +26229,7 @@
       </p:sp>
       <p:sp>
         <p:nvSpPr>
-          <p:cNvPr id="27" name="Text 25"/>
+          <p:cNvPr id="30" name="Text 28"/>
           <p:cNvSpPr/>
           <p:nvPr/>
         </p:nvSpPr>
@@ -26749,7 +26268,7 @@
       </p:sp>
       <p:sp>
         <p:nvSpPr>
-          <p:cNvPr id="28" name="Shape 26"/>
+          <p:cNvPr id="31" name="Shape 29"/>
           <p:cNvSpPr/>
           <p:nvPr/>
         </p:nvSpPr>
@@ -26776,7 +26295,7 @@
       </p:sp>
       <p:sp>
         <p:nvSpPr>
-          <p:cNvPr id="29" name="Text 27"/>
+          <p:cNvPr id="32" name="Text 30"/>
           <p:cNvSpPr/>
           <p:nvPr/>
         </p:nvSpPr>
@@ -26807,7 +26326,7 @@
                 <a:ea typeface="Trebuchet MS" pitchFamily="34" charset="-122"/>
                 <a:cs typeface="Trebuchet MS" pitchFamily="34" charset="-120"/>
               </a:rPr>
-              <a:t>a</a:t>
+              <a:t>ven</a:t>
             </a:r>
             <a:endParaRPr lang="en-US" sz="1400" dirty="0"/>
           </a:p>
@@ -26815,7 +26334,7 @@
       </p:sp>
       <p:sp>
         <p:nvSpPr>
-          <p:cNvPr id="30" name="Text 28"/>
+          <p:cNvPr id="33" name="Text 31"/>
           <p:cNvSpPr/>
           <p:nvPr/>
         </p:nvSpPr>
@@ -26854,7 +26373,7 @@
       </p:sp>
       <p:sp>
         <p:nvSpPr>
-          <p:cNvPr id="31" name="Shape 29"/>
+          <p:cNvPr id="34" name="Shape 32"/>
           <p:cNvSpPr/>
           <p:nvPr/>
         </p:nvSpPr>
@@ -26881,7 +26400,7 @@
       </p:sp>
       <p:sp>
         <p:nvSpPr>
-          <p:cNvPr id="32" name="Text 30"/>
+          <p:cNvPr id="35" name="Text 33"/>
           <p:cNvSpPr/>
           <p:nvPr/>
         </p:nvSpPr>
@@ -26920,7 +26439,7 @@
       </p:sp>
       <p:sp>
         <p:nvSpPr>
-          <p:cNvPr id="33" name="Shape 31"/>
+          <p:cNvPr id="36" name="Shape 34"/>
           <p:cNvSpPr/>
           <p:nvPr/>
         </p:nvSpPr>
@@ -26947,7 +26466,7 @@
       </p:sp>
       <p:sp>
         <p:nvSpPr>
-          <p:cNvPr id="34" name="Text 32"/>
+          <p:cNvPr id="37" name="Text 35"/>
           <p:cNvSpPr/>
           <p:nvPr/>
         </p:nvSpPr>
@@ -26986,7 +26505,7 @@
       </p:sp>
       <p:sp>
         <p:nvSpPr>
-          <p:cNvPr id="35" name="Shape 33"/>
+          <p:cNvPr id="38" name="Shape 36"/>
           <p:cNvSpPr/>
           <p:nvPr/>
         </p:nvSpPr>
@@ -27013,7 +26532,7 @@
       </p:sp>
       <p:sp>
         <p:nvSpPr>
-          <p:cNvPr id="36" name="Text 34"/>
+          <p:cNvPr id="39" name="Text 37"/>
           <p:cNvSpPr/>
           <p:nvPr/>
         </p:nvSpPr>
@@ -27475,7 +26994,7 @@
                 <a:ea typeface="Trebuchet MS" pitchFamily="34" charset="-122"/>
                 <a:cs typeface="Trebuchet MS" pitchFamily="34" charset="-120"/>
               </a:rPr>
-              <a:t>senator</a:t>
+              <a:t>inventor</a:t>
             </a:r>
             <a:endParaRPr lang="en-US" sz="2800" dirty="0"/>
           </a:p>
@@ -27555,7 +27074,7 @@
         </p:nvSpPr>
         <p:spPr>
           <a:xfrm>
-            <a:off x="2938272" y="2258568"/>
+            <a:off x="2221992" y="2258568"/>
             <a:ext cx="1828800" cy="292608"/>
           </a:xfrm>
           <a:prstGeom prst="rect">
@@ -27589,7 +27108,7 @@
         </p:nvSpPr>
         <p:spPr>
           <a:xfrm>
-            <a:off x="2938272" y="2258568"/>
+            <a:off x="2221992" y="2258568"/>
             <a:ext cx="1828800" cy="292608"/>
           </a:xfrm>
           <a:prstGeom prst="rect">
@@ -27614,7 +27133,7 @@
                 <a:ea typeface="Trebuchet MS" pitchFamily="34" charset="-122"/>
                 <a:cs typeface="Trebuchet MS" pitchFamily="34" charset="-120"/>
               </a:rPr>
-              <a:t>senat</a:t>
+              <a:t>in</a:t>
             </a:r>
             <a:endParaRPr lang="en-US" sz="1300" dirty="0"/>
           </a:p>
@@ -27628,7 +27147,7 @@
         </p:nvSpPr>
         <p:spPr>
           <a:xfrm>
-            <a:off x="2938272" y="2569464"/>
+            <a:off x="2221992" y="2569464"/>
             <a:ext cx="1828800" cy="201168"/>
           </a:xfrm>
           <a:prstGeom prst="rect">
@@ -27653,7 +27172,7 @@
                 <a:ea typeface="Calibri" pitchFamily="34" charset="-122"/>
                 <a:cs typeface="Calibri" pitchFamily="34" charset="-120"/>
               </a:rPr>
-              <a:t>council of elders</a:t>
+              <a:t>into, upon</a:t>
             </a:r>
             <a:endParaRPr lang="en-US" sz="850" dirty="0"/>
           </a:p>
@@ -27667,7 +27186,7 @@
         </p:nvSpPr>
         <p:spPr>
           <a:xfrm>
-            <a:off x="5803392" y="2258568"/>
+            <a:off x="4370832" y="2258568"/>
             <a:ext cx="1828800" cy="292608"/>
           </a:xfrm>
           <a:prstGeom prst="rect">
@@ -27676,11 +27195,11 @@
             </a:avLst>
           </a:prstGeom>
           <a:solidFill>
-            <a:srgbClr val="CCFBF1"/>
+            <a:srgbClr val="FCE7F3"/>
           </a:solidFill>
           <a:ln w="19050">
             <a:solidFill>
-              <a:srgbClr val="0D9488"/>
+              <a:srgbClr val="DB2777"/>
             </a:solidFill>
             <a:prstDash val="solid"/>
           </a:ln>
@@ -27701,7 +27220,7 @@
         </p:nvSpPr>
         <p:spPr>
           <a:xfrm>
-            <a:off x="5803392" y="2258568"/>
+            <a:off x="4370832" y="2258568"/>
             <a:ext cx="1828800" cy="292608"/>
           </a:xfrm>
           <a:prstGeom prst="rect">
@@ -27720,13 +27239,13 @@
             <a:r>
               <a:rPr lang="en-US" sz="1300" b="1" dirty="0">
                 <a:solidFill>
-                  <a:srgbClr val="0F766E"/>
+                  <a:srgbClr val="9D174D"/>
                 </a:solidFill>
                 <a:latin typeface="Trebuchet MS" pitchFamily="34" charset="0"/>
                 <a:ea typeface="Trebuchet MS" pitchFamily="34" charset="-122"/>
                 <a:cs typeface="Trebuchet MS" pitchFamily="34" charset="-120"/>
               </a:rPr>
-              <a:t>or</a:t>
+              <a:t>vent</a:t>
             </a:r>
             <a:endParaRPr lang="en-US" sz="1300" dirty="0"/>
           </a:p>
@@ -27740,7 +27259,7 @@
         </p:nvSpPr>
         <p:spPr>
           <a:xfrm>
-            <a:off x="5803392" y="2569464"/>
+            <a:off x="4370832" y="2569464"/>
             <a:ext cx="1828800" cy="201168"/>
           </a:xfrm>
           <a:prstGeom prst="rect">
@@ -27765,6 +27284,118 @@
                 <a:ea typeface="Calibri" pitchFamily="34" charset="-122"/>
                 <a:cs typeface="Calibri" pitchFamily="34" charset="-120"/>
               </a:rPr>
+              <a:t>to come, arrive at</a:t>
+            </a:r>
+            <a:endParaRPr lang="en-US" sz="850" dirty="0"/>
+          </a:p>
+        </p:txBody>
+      </p:sp>
+      <p:sp>
+        <p:nvSpPr>
+          <p:cNvPr id="22" name="Shape 20"/>
+          <p:cNvSpPr/>
+          <p:nvPr/>
+        </p:nvSpPr>
+        <p:spPr>
+          <a:xfrm>
+            <a:off x="6519672" y="2258568"/>
+            <a:ext cx="1828800" cy="292608"/>
+          </a:xfrm>
+          <a:prstGeom prst="rect">
+            <a:avLst>
+              <a:gd name="adj" fmla="val 25000"/>
+            </a:avLst>
+          </a:prstGeom>
+          <a:solidFill>
+            <a:srgbClr val="CCFBF1"/>
+          </a:solidFill>
+          <a:ln w="19050">
+            <a:solidFill>
+              <a:srgbClr val="0D9488"/>
+            </a:solidFill>
+            <a:prstDash val="solid"/>
+          </a:ln>
+          <a:effectLst>
+            <a:outerShdw sx="100000" sy="100000" kx="0" ky="0" algn="bl" rotWithShape="0" blurRad="101600" dist="38100" dir="8100000">
+              <a:srgbClr val="000000">
+                <a:alpha val="12000"/>
+              </a:srgbClr>
+            </a:outerShdw>
+          </a:effectLst>
+        </p:spPr>
+      </p:sp>
+      <p:sp>
+        <p:nvSpPr>
+          <p:cNvPr id="23" name="Text 21"/>
+          <p:cNvSpPr/>
+          <p:nvPr/>
+        </p:nvSpPr>
+        <p:spPr>
+          <a:xfrm>
+            <a:off x="6519672" y="2258568"/>
+            <a:ext cx="1828800" cy="292608"/>
+          </a:xfrm>
+          <a:prstGeom prst="rect">
+            <a:avLst/>
+          </a:prstGeom>
+          <a:noFill/>
+          <a:ln/>
+        </p:spPr>
+        <p:txBody>
+          <a:bodyPr wrap="square" lIns="0" tIns="0" rIns="0" bIns="0" rtlCol="0" anchor="ctr"/>
+          <a:lstStyle/>
+          <a:p>
+            <a:pPr algn="ctr" indent="0" marL="0">
+              <a:buNone/>
+            </a:pPr>
+            <a:r>
+              <a:rPr lang="en-US" sz="1300" b="1" dirty="0">
+                <a:solidFill>
+                  <a:srgbClr val="0F766E"/>
+                </a:solidFill>
+                <a:latin typeface="Trebuchet MS" pitchFamily="34" charset="0"/>
+                <a:ea typeface="Trebuchet MS" pitchFamily="34" charset="-122"/>
+                <a:cs typeface="Trebuchet MS" pitchFamily="34" charset="-120"/>
+              </a:rPr>
+              <a:t>or</a:t>
+            </a:r>
+            <a:endParaRPr lang="en-US" sz="1300" dirty="0"/>
+          </a:p>
+        </p:txBody>
+      </p:sp>
+      <p:sp>
+        <p:nvSpPr>
+          <p:cNvPr id="24" name="Text 22"/>
+          <p:cNvSpPr/>
+          <p:nvPr/>
+        </p:nvSpPr>
+        <p:spPr>
+          <a:xfrm>
+            <a:off x="6519672" y="2569464"/>
+            <a:ext cx="1828800" cy="201168"/>
+          </a:xfrm>
+          <a:prstGeom prst="rect">
+            <a:avLst/>
+          </a:prstGeom>
+          <a:noFill/>
+          <a:ln/>
+        </p:spPr>
+        <p:txBody>
+          <a:bodyPr wrap="square" lIns="0" tIns="0" rIns="0" bIns="0" rtlCol="0" anchor="t"/>
+          <a:lstStyle/>
+          <a:p>
+            <a:pPr algn="ctr" indent="0" marL="0">
+              <a:buNone/>
+            </a:pPr>
+            <a:r>
+              <a:rPr lang="en-US" sz="850" dirty="0">
+                <a:solidFill>
+                  <a:srgbClr val="475569"/>
+                </a:solidFill>
+                <a:latin typeface="Calibri" pitchFamily="34" charset="0"/>
+                <a:ea typeface="Calibri" pitchFamily="34" charset="-122"/>
+                <a:cs typeface="Calibri" pitchFamily="34" charset="-120"/>
+              </a:rPr>
               <a:t>one who does</a:t>
             </a:r>
             <a:endParaRPr lang="en-US" sz="850" dirty="0"/>
@@ -27773,7 +27404,7 @@
       </p:sp>
       <p:sp>
         <p:nvSpPr>
-          <p:cNvPr id="22" name="Shape 20"/>
+          <p:cNvPr id="25" name="Shape 23"/>
           <p:cNvSpPr/>
           <p:nvPr/>
         </p:nvSpPr>
@@ -27800,7 +27431,7 @@
       </p:sp>
       <p:sp>
         <p:nvSpPr>
-          <p:cNvPr id="23" name="Text 21"/>
+          <p:cNvPr id="26" name="Text 24"/>
           <p:cNvSpPr/>
           <p:nvPr/>
         </p:nvSpPr>
@@ -27839,7 +27470,7 @@
       </p:sp>
       <p:sp>
         <p:nvSpPr>
-          <p:cNvPr id="24" name="Shape 22"/>
+          <p:cNvPr id="27" name="Shape 25"/>
           <p:cNvSpPr/>
           <p:nvPr/>
         </p:nvSpPr>
@@ -27866,7 +27497,7 @@
       </p:sp>
       <p:sp>
         <p:nvSpPr>
-          <p:cNvPr id="25" name="Shape 23"/>
+          <p:cNvPr id="28" name="Shape 26"/>
           <p:cNvSpPr/>
           <p:nvPr/>
         </p:nvSpPr>
@@ -27893,7 +27524,7 @@
       </p:sp>
       <p:sp>
         <p:nvSpPr>
-          <p:cNvPr id="26" name="Text 24"/>
+          <p:cNvPr id="29" name="Text 27"/>
           <p:cNvSpPr/>
           <p:nvPr/>
         </p:nvSpPr>
@@ -27924,7 +27555,7 @@
                 <a:ea typeface="Trebuchet MS" pitchFamily="34" charset="-122"/>
                 <a:cs typeface="Trebuchet MS" pitchFamily="34" charset="-120"/>
               </a:rPr>
-              <a:t>sen</a:t>
+              <a:t>in</a:t>
             </a:r>
             <a:endParaRPr lang="en-US" sz="1400" dirty="0"/>
           </a:p>
@@ -27932,7 +27563,7 @@
       </p:sp>
       <p:sp>
         <p:nvSpPr>
-          <p:cNvPr id="27" name="Text 25"/>
+          <p:cNvPr id="30" name="Text 28"/>
           <p:cNvSpPr/>
           <p:nvPr/>
         </p:nvSpPr>
@@ -27971,7 +27602,7 @@
       </p:sp>
       <p:sp>
         <p:nvSpPr>
-          <p:cNvPr id="28" name="Shape 26"/>
+          <p:cNvPr id="31" name="Shape 29"/>
           <p:cNvSpPr/>
           <p:nvPr/>
         </p:nvSpPr>
@@ -27998,7 +27629,7 @@
       </p:sp>
       <p:sp>
         <p:nvSpPr>
-          <p:cNvPr id="29" name="Text 27"/>
+          <p:cNvPr id="32" name="Text 30"/>
           <p:cNvSpPr/>
           <p:nvPr/>
         </p:nvSpPr>
@@ -28029,7 +27660,7 @@
                 <a:ea typeface="Trebuchet MS" pitchFamily="34" charset="-122"/>
                 <a:cs typeface="Trebuchet MS" pitchFamily="34" charset="-120"/>
               </a:rPr>
-              <a:t>a</a:t>
+              <a:t>ven</a:t>
             </a:r>
             <a:endParaRPr lang="en-US" sz="1400" dirty="0"/>
           </a:p>
@@ -28037,7 +27668,7 @@
       </p:sp>
       <p:sp>
         <p:nvSpPr>
-          <p:cNvPr id="30" name="Text 28"/>
+          <p:cNvPr id="33" name="Text 31"/>
           <p:cNvSpPr/>
           <p:nvPr/>
         </p:nvSpPr>
@@ -28076,7 +27707,7 @@
       </p:sp>
       <p:sp>
         <p:nvSpPr>
-          <p:cNvPr id="31" name="Shape 29"/>
+          <p:cNvPr id="34" name="Shape 32"/>
           <p:cNvSpPr/>
           <p:nvPr/>
         </p:nvSpPr>
@@ -28103,7 +27734,7 @@
       </p:sp>
       <p:sp>
         <p:nvSpPr>
-          <p:cNvPr id="32" name="Text 30"/>
+          <p:cNvPr id="35" name="Text 33"/>
           <p:cNvSpPr/>
           <p:nvPr/>
         </p:nvSpPr>
@@ -28142,7 +27773,7 @@
       </p:sp>
       <p:sp>
         <p:nvSpPr>
-          <p:cNvPr id="33" name="Shape 31"/>
+          <p:cNvPr id="36" name="Shape 34"/>
           <p:cNvSpPr/>
           <p:nvPr/>
         </p:nvSpPr>
@@ -28169,7 +27800,7 @@
       </p:sp>
       <p:sp>
         <p:nvSpPr>
-          <p:cNvPr id="34" name="Text 32"/>
+          <p:cNvPr id="37" name="Text 35"/>
           <p:cNvSpPr/>
           <p:nvPr/>
         </p:nvSpPr>
@@ -28208,7 +27839,7 @@
       </p:sp>
       <p:sp>
         <p:nvSpPr>
-          <p:cNvPr id="35" name="Shape 33"/>
+          <p:cNvPr id="38" name="Shape 36"/>
           <p:cNvSpPr/>
           <p:nvPr/>
         </p:nvSpPr>
@@ -28235,13 +27866,13 @@
       </p:sp>
       <p:sp>
         <p:nvSpPr>
-          <p:cNvPr id="36" name="Shape 34"/>
-          <p:cNvSpPr/>
-          <p:nvPr/>
-        </p:nvSpPr>
-        <p:spPr>
-          <a:xfrm>
-            <a:off x="2254649" y="4169664"/>
+          <p:cNvPr id="39" name="Shape 37"/>
+          <p:cNvSpPr/>
+          <p:nvPr/>
+        </p:nvSpPr>
+        <p:spPr>
+          <a:xfrm>
+            <a:off x="2124837" y="4169664"/>
             <a:ext cx="685800" cy="475488"/>
           </a:xfrm>
           <a:prstGeom prst="rect">
@@ -28262,13 +27893,13 @@
       </p:sp>
       <p:sp>
         <p:nvSpPr>
-          <p:cNvPr id="37" name="Text 35"/>
-          <p:cNvSpPr/>
-          <p:nvPr/>
-        </p:nvSpPr>
-        <p:spPr>
-          <a:xfrm>
-            <a:off x="2254649" y="4169664"/>
+          <p:cNvPr id="40" name="Text 38"/>
+          <p:cNvSpPr/>
+          <p:nvPr/>
+        </p:nvSpPr>
+        <p:spPr>
+          <a:xfrm>
+            <a:off x="2124837" y="4169664"/>
             <a:ext cx="685800" cy="475488"/>
           </a:xfrm>
           <a:prstGeom prst="rect">
@@ -28293,7 +27924,7 @@
                 <a:ea typeface="Trebuchet MS" pitchFamily="34" charset="-122"/>
                 <a:cs typeface="Trebuchet MS" pitchFamily="34" charset="-120"/>
               </a:rPr>
-              <a:t>s</a:t>
+              <a:t>i</a:t>
             </a:r>
             <a:endParaRPr lang="en-US" sz="900" dirty="0"/>
           </a:p>
@@ -28301,13 +27932,13 @@
       </p:sp>
       <p:sp>
         <p:nvSpPr>
-          <p:cNvPr id="38" name="Shape 36"/>
-          <p:cNvSpPr/>
-          <p:nvPr/>
-        </p:nvSpPr>
-        <p:spPr>
-          <a:xfrm>
-            <a:off x="3293146" y="4169664"/>
+          <p:cNvPr id="41" name="Shape 39"/>
+          <p:cNvSpPr/>
+          <p:nvPr/>
+        </p:nvSpPr>
+        <p:spPr>
+          <a:xfrm>
+            <a:off x="3033522" y="4169664"/>
             <a:ext cx="685800" cy="475488"/>
           </a:xfrm>
           <a:prstGeom prst="rect">
@@ -28328,13 +27959,13 @@
       </p:sp>
       <p:sp>
         <p:nvSpPr>
-          <p:cNvPr id="39" name="Text 37"/>
-          <p:cNvSpPr/>
-          <p:nvPr/>
-        </p:nvSpPr>
-        <p:spPr>
-          <a:xfrm>
-            <a:off x="3293146" y="4169664"/>
+          <p:cNvPr id="42" name="Text 40"/>
+          <p:cNvSpPr/>
+          <p:nvPr/>
+        </p:nvSpPr>
+        <p:spPr>
+          <a:xfrm>
+            <a:off x="3033522" y="4169664"/>
             <a:ext cx="685800" cy="475488"/>
           </a:xfrm>
           <a:prstGeom prst="rect">
@@ -28359,7 +27990,7 @@
                 <a:ea typeface="Trebuchet MS" pitchFamily="34" charset="-122"/>
                 <a:cs typeface="Trebuchet MS" pitchFamily="34" charset="-120"/>
               </a:rPr>
-              <a:t>e</a:t>
+              <a:t>n</a:t>
             </a:r>
             <a:endParaRPr lang="en-US" sz="900" dirty="0"/>
           </a:p>
@@ -28367,13 +27998,13 @@
       </p:sp>
       <p:sp>
         <p:nvSpPr>
-          <p:cNvPr id="40" name="Shape 38"/>
-          <p:cNvSpPr/>
-          <p:nvPr/>
-        </p:nvSpPr>
-        <p:spPr>
-          <a:xfrm>
-            <a:off x="4331643" y="4169664"/>
+          <p:cNvPr id="43" name="Shape 41"/>
+          <p:cNvSpPr/>
+          <p:nvPr/>
+        </p:nvSpPr>
+        <p:spPr>
+          <a:xfrm>
+            <a:off x="3942207" y="4169664"/>
             <a:ext cx="685800" cy="475488"/>
           </a:xfrm>
           <a:prstGeom prst="rect">
@@ -28394,13 +28025,13 @@
       </p:sp>
       <p:sp>
         <p:nvSpPr>
-          <p:cNvPr id="41" name="Text 39"/>
-          <p:cNvSpPr/>
-          <p:nvPr/>
-        </p:nvSpPr>
-        <p:spPr>
-          <a:xfrm>
-            <a:off x="4331643" y="4169664"/>
+          <p:cNvPr id="44" name="Text 42"/>
+          <p:cNvSpPr/>
+          <p:nvPr/>
+        </p:nvSpPr>
+        <p:spPr>
+          <a:xfrm>
+            <a:off x="3942207" y="4169664"/>
             <a:ext cx="685800" cy="475488"/>
           </a:xfrm>
           <a:prstGeom prst="rect">
@@ -28425,7 +28056,7 @@
                 <a:ea typeface="Trebuchet MS" pitchFamily="34" charset="-122"/>
                 <a:cs typeface="Trebuchet MS" pitchFamily="34" charset="-120"/>
               </a:rPr>
-              <a:t>n</a:t>
+              <a:t>v</a:t>
             </a:r>
             <a:endParaRPr lang="en-US" sz="900" dirty="0"/>
           </a:p>
@@ -28433,13 +28064,13 @@
       </p:sp>
       <p:sp>
         <p:nvSpPr>
-          <p:cNvPr id="42" name="Shape 40"/>
-          <p:cNvSpPr/>
-          <p:nvPr/>
-        </p:nvSpPr>
-        <p:spPr>
-          <a:xfrm>
-            <a:off x="5370141" y="4169664"/>
+          <p:cNvPr id="45" name="Shape 43"/>
+          <p:cNvSpPr/>
+          <p:nvPr/>
+        </p:nvSpPr>
+        <p:spPr>
+          <a:xfrm>
+            <a:off x="4850892" y="4169664"/>
             <a:ext cx="685800" cy="475488"/>
           </a:xfrm>
           <a:prstGeom prst="rect">
@@ -28460,13 +28091,13 @@
       </p:sp>
       <p:sp>
         <p:nvSpPr>
-          <p:cNvPr id="43" name="Text 41"/>
-          <p:cNvSpPr/>
-          <p:nvPr/>
-        </p:nvSpPr>
-        <p:spPr>
-          <a:xfrm>
-            <a:off x="5370141" y="4169664"/>
+          <p:cNvPr id="46" name="Text 44"/>
+          <p:cNvSpPr/>
+          <p:nvPr/>
+        </p:nvSpPr>
+        <p:spPr>
+          <a:xfrm>
+            <a:off x="4850892" y="4169664"/>
             <a:ext cx="685800" cy="475488"/>
           </a:xfrm>
           <a:prstGeom prst="rect">
@@ -28491,7 +28122,7 @@
                 <a:ea typeface="Trebuchet MS" pitchFamily="34" charset="-122"/>
                 <a:cs typeface="Trebuchet MS" pitchFamily="34" charset="-120"/>
               </a:rPr>
-              <a:t>a</a:t>
+              <a:t>e</a:t>
             </a:r>
             <a:endParaRPr lang="en-US" sz="900" dirty="0"/>
           </a:p>
@@ -28499,13 +28130,13 @@
       </p:sp>
       <p:sp>
         <p:nvSpPr>
-          <p:cNvPr id="44" name="Shape 42"/>
-          <p:cNvSpPr/>
-          <p:nvPr/>
-        </p:nvSpPr>
-        <p:spPr>
-          <a:xfrm>
-            <a:off x="6408638" y="4169664"/>
+          <p:cNvPr id="47" name="Shape 45"/>
+          <p:cNvSpPr/>
+          <p:nvPr/>
+        </p:nvSpPr>
+        <p:spPr>
+          <a:xfrm>
+            <a:off x="5759577" y="4169664"/>
             <a:ext cx="685800" cy="475488"/>
           </a:xfrm>
           <a:prstGeom prst="rect">
@@ -28526,13 +28157,13 @@
       </p:sp>
       <p:sp>
         <p:nvSpPr>
-          <p:cNvPr id="45" name="Text 43"/>
-          <p:cNvSpPr/>
-          <p:nvPr/>
-        </p:nvSpPr>
-        <p:spPr>
-          <a:xfrm>
-            <a:off x="6408638" y="4169664"/>
+          <p:cNvPr id="48" name="Text 46"/>
+          <p:cNvSpPr/>
+          <p:nvPr/>
+        </p:nvSpPr>
+        <p:spPr>
+          <a:xfrm>
+            <a:off x="5759577" y="4169664"/>
             <a:ext cx="685800" cy="475488"/>
           </a:xfrm>
           <a:prstGeom prst="rect">
@@ -28557,7 +28188,7 @@
                 <a:ea typeface="Trebuchet MS" pitchFamily="34" charset="-122"/>
                 <a:cs typeface="Trebuchet MS" pitchFamily="34" charset="-120"/>
               </a:rPr>
-              <a:t>t</a:t>
+              <a:t>n</a:t>
             </a:r>
             <a:endParaRPr lang="en-US" sz="900" dirty="0"/>
           </a:p>
@@ -28565,13 +28196,13 @@
       </p:sp>
       <p:sp>
         <p:nvSpPr>
-          <p:cNvPr id="46" name="Shape 44"/>
-          <p:cNvSpPr/>
-          <p:nvPr/>
-        </p:nvSpPr>
-        <p:spPr>
-          <a:xfrm>
-            <a:off x="7447135" y="4169664"/>
+          <p:cNvPr id="49" name="Shape 47"/>
+          <p:cNvSpPr/>
+          <p:nvPr/>
+        </p:nvSpPr>
+        <p:spPr>
+          <a:xfrm>
+            <a:off x="6668262" y="4169664"/>
             <a:ext cx="685800" cy="475488"/>
           </a:xfrm>
           <a:prstGeom prst="rect">
@@ -28592,13 +28223,79 @@
       </p:sp>
       <p:sp>
         <p:nvSpPr>
-          <p:cNvPr id="47" name="Text 45"/>
-          <p:cNvSpPr/>
-          <p:nvPr/>
-        </p:nvSpPr>
-        <p:spPr>
-          <a:xfrm>
-            <a:off x="7447135" y="4169664"/>
+          <p:cNvPr id="50" name="Text 48"/>
+          <p:cNvSpPr/>
+          <p:nvPr/>
+        </p:nvSpPr>
+        <p:spPr>
+          <a:xfrm>
+            <a:off x="6668262" y="4169664"/>
+            <a:ext cx="685800" cy="475488"/>
+          </a:xfrm>
+          <a:prstGeom prst="rect">
+            <a:avLst/>
+          </a:prstGeom>
+          <a:noFill/>
+          <a:ln/>
+        </p:spPr>
+        <p:txBody>
+          <a:bodyPr wrap="square" lIns="0" tIns="0" rIns="0" bIns="0" rtlCol="0" anchor="ctr"/>
+          <a:lstStyle/>
+          <a:p>
+            <a:pPr algn="ctr" indent="0" marL="0">
+              <a:buNone/>
+            </a:pPr>
+            <a:r>
+              <a:rPr lang="en-US" sz="900" b="1" dirty="0">
+                <a:solidFill>
+                  <a:srgbClr val="9D174D"/>
+                </a:solidFill>
+                <a:latin typeface="Trebuchet MS" pitchFamily="34" charset="0"/>
+                <a:ea typeface="Trebuchet MS" pitchFamily="34" charset="-122"/>
+                <a:cs typeface="Trebuchet MS" pitchFamily="34" charset="-120"/>
+              </a:rPr>
+              <a:t>t</a:t>
+            </a:r>
+            <a:endParaRPr lang="en-US" sz="900" dirty="0"/>
+          </a:p>
+        </p:txBody>
+      </p:sp>
+      <p:sp>
+        <p:nvSpPr>
+          <p:cNvPr id="51" name="Shape 49"/>
+          <p:cNvSpPr/>
+          <p:nvPr/>
+        </p:nvSpPr>
+        <p:spPr>
+          <a:xfrm>
+            <a:off x="7576947" y="4169664"/>
+            <a:ext cx="685800" cy="475488"/>
+          </a:xfrm>
+          <a:prstGeom prst="rect">
+            <a:avLst>
+              <a:gd name="adj" fmla="val 7692"/>
+            </a:avLst>
+          </a:prstGeom>
+          <a:solidFill>
+            <a:srgbClr val="FFFFFF"/>
+          </a:solidFill>
+          <a:ln w="12700">
+            <a:solidFill>
+              <a:srgbClr val="DB2777"/>
+            </a:solidFill>
+            <a:prstDash val="solid"/>
+          </a:ln>
+        </p:spPr>
+      </p:sp>
+      <p:sp>
+        <p:nvSpPr>
+          <p:cNvPr id="52" name="Text 50"/>
+          <p:cNvSpPr/>
+          <p:nvPr/>
+        </p:nvSpPr>
+        <p:spPr>
+          <a:xfrm>
+            <a:off x="7576947" y="4169664"/>
             <a:ext cx="685800" cy="475488"/>
           </a:xfrm>
           <a:prstGeom prst="rect">
@@ -29054,7 +28751,7 @@
                 <a:ea typeface="Trebuchet MS" pitchFamily="34" charset="-122"/>
                 <a:cs typeface="Trebuchet MS" pitchFamily="34" charset="-120"/>
               </a:rPr>
-              <a:t>inspector</a:t>
+              <a:t>supervisor</a:t>
             </a:r>
             <a:endParaRPr lang="en-US" sz="2800" dirty="0"/>
           </a:p>
@@ -29881,7 +29578,7 @@
                 <a:ea typeface="Trebuchet MS" pitchFamily="34" charset="-122"/>
                 <a:cs typeface="Trebuchet MS" pitchFamily="34" charset="-120"/>
               </a:rPr>
-              <a:t>inspector</a:t>
+              <a:t>supervisor</a:t>
             </a:r>
             <a:endParaRPr lang="en-US" sz="2800" dirty="0"/>
           </a:p>
@@ -30020,7 +29717,7 @@
                 <a:ea typeface="Trebuchet MS" pitchFamily="34" charset="-122"/>
                 <a:cs typeface="Trebuchet MS" pitchFamily="34" charset="-120"/>
               </a:rPr>
-              <a:t>in</a:t>
+              <a:t>super</a:t>
             </a:r>
             <a:endParaRPr lang="en-US" sz="1300" dirty="0"/>
           </a:p>
@@ -30059,7 +29756,7 @@
                 <a:ea typeface="Calibri" pitchFamily="34" charset="-122"/>
                 <a:cs typeface="Calibri" pitchFamily="34" charset="-120"/>
               </a:rPr>
-              <a:t>into</a:t>
+              <a:t>over, above</a:t>
             </a:r>
             <a:endParaRPr lang="en-US" sz="850" dirty="0"/>
           </a:p>
@@ -30132,7 +29829,7 @@
                 <a:ea typeface="Trebuchet MS" pitchFamily="34" charset="-122"/>
                 <a:cs typeface="Trebuchet MS" pitchFamily="34" charset="-120"/>
               </a:rPr>
-              <a:t>spect</a:t>
+              <a:t>vis</a:t>
             </a:r>
             <a:endParaRPr lang="en-US" sz="1300" dirty="0"/>
           </a:p>
@@ -30171,7 +29868,7 @@
                 <a:ea typeface="Calibri" pitchFamily="34" charset="-122"/>
                 <a:cs typeface="Calibri" pitchFamily="34" charset="-120"/>
               </a:rPr>
-              <a:t>to look</a:t>
+              <a:t>to see</a:t>
             </a:r>
             <a:endParaRPr lang="en-US" sz="850" dirty="0"/>
           </a:p>
@@ -30978,7 +30675,7 @@
                 <a:ea typeface="Trebuchet MS" pitchFamily="34" charset="-122"/>
                 <a:cs typeface="Trebuchet MS" pitchFamily="34" charset="-120"/>
               </a:rPr>
-              <a:t>inspector</a:t>
+              <a:t>supervisor</a:t>
             </a:r>
             <a:endParaRPr lang="en-US" sz="2800" dirty="0"/>
           </a:p>
@@ -31117,7 +30814,7 @@
                 <a:ea typeface="Trebuchet MS" pitchFamily="34" charset="-122"/>
                 <a:cs typeface="Trebuchet MS" pitchFamily="34" charset="-120"/>
               </a:rPr>
-              <a:t>in</a:t>
+              <a:t>super</a:t>
             </a:r>
             <a:endParaRPr lang="en-US" sz="1300" dirty="0"/>
           </a:p>
@@ -31156,7 +30853,7 @@
                 <a:ea typeface="Calibri" pitchFamily="34" charset="-122"/>
                 <a:cs typeface="Calibri" pitchFamily="34" charset="-120"/>
               </a:rPr>
-              <a:t>into</a:t>
+              <a:t>over, above</a:t>
             </a:r>
             <a:endParaRPr lang="en-US" sz="850" dirty="0"/>
           </a:p>
@@ -31229,7 +30926,7 @@
                 <a:ea typeface="Trebuchet MS" pitchFamily="34" charset="-122"/>
                 <a:cs typeface="Trebuchet MS" pitchFamily="34" charset="-120"/>
               </a:rPr>
-              <a:t>spect</a:t>
+              <a:t>vis</a:t>
             </a:r>
             <a:endParaRPr lang="en-US" sz="1300" dirty="0"/>
           </a:p>
@@ -31268,7 +30965,7 @@
                 <a:ea typeface="Calibri" pitchFamily="34" charset="-122"/>
                 <a:cs typeface="Calibri" pitchFamily="34" charset="-120"/>
               </a:rPr>
-              <a:t>to look</a:t>
+              <a:t>to see</a:t>
             </a:r>
             <a:endParaRPr lang="en-US" sz="850" dirty="0"/>
           </a:p>
@@ -31487,8 +31184,8 @@
         </p:nvSpPr>
         <p:spPr>
           <a:xfrm>
-            <a:off x="2313432" y="3364992"/>
-            <a:ext cx="1645920" cy="475488"/>
+            <a:off x="1975104" y="3364992"/>
+            <a:ext cx="1554480" cy="475488"/>
           </a:xfrm>
           <a:prstGeom prst="rect">
             <a:avLst>
@@ -31514,8 +31211,8 @@
         </p:nvSpPr>
         <p:spPr>
           <a:xfrm>
-            <a:off x="2313432" y="3364992"/>
-            <a:ext cx="1645920" cy="475488"/>
+            <a:off x="1975104" y="3364992"/>
+            <a:ext cx="1554480" cy="475488"/>
           </a:xfrm>
           <a:prstGeom prst="rect">
             <a:avLst/>
@@ -31539,7 +31236,7 @@
                 <a:ea typeface="Trebuchet MS" pitchFamily="34" charset="-122"/>
                 <a:cs typeface="Trebuchet MS" pitchFamily="34" charset="-120"/>
               </a:rPr>
-              <a:t>in</a:t>
+              <a:t>su</a:t>
             </a:r>
             <a:endParaRPr lang="en-US" sz="1400" dirty="0"/>
           </a:p>
@@ -31553,8 +31250,8 @@
         </p:nvSpPr>
         <p:spPr>
           <a:xfrm>
-            <a:off x="3959352" y="3364992"/>
-            <a:ext cx="411480" cy="475488"/>
+            <a:off x="3529584" y="3364992"/>
+            <a:ext cx="73152" cy="475488"/>
           </a:xfrm>
           <a:prstGeom prst="rect">
             <a:avLst/>
@@ -31592,8 +31289,8 @@
         </p:nvSpPr>
         <p:spPr>
           <a:xfrm>
-            <a:off x="4370832" y="3364992"/>
-            <a:ext cx="1645920" cy="475488"/>
+            <a:off x="3602736" y="3364992"/>
+            <a:ext cx="1554480" cy="475488"/>
           </a:xfrm>
           <a:prstGeom prst="rect">
             <a:avLst>
@@ -31619,8 +31316,8 @@
         </p:nvSpPr>
         <p:spPr>
           <a:xfrm>
-            <a:off x="4370832" y="3364992"/>
-            <a:ext cx="1645920" cy="475488"/>
+            <a:off x="3602736" y="3364992"/>
+            <a:ext cx="1554480" cy="475488"/>
           </a:xfrm>
           <a:prstGeom prst="rect">
             <a:avLst/>
@@ -31644,7 +31341,7 @@
                 <a:ea typeface="Trebuchet MS" pitchFamily="34" charset="-122"/>
                 <a:cs typeface="Trebuchet MS" pitchFamily="34" charset="-120"/>
               </a:rPr>
-              <a:t>spec</a:t>
+              <a:t>per</a:t>
             </a:r>
             <a:endParaRPr lang="en-US" sz="1400" dirty="0"/>
           </a:p>
@@ -31658,8 +31355,8 @@
         </p:nvSpPr>
         <p:spPr>
           <a:xfrm>
-            <a:off x="6016752" y="3364992"/>
-            <a:ext cx="411480" cy="475488"/>
+            <a:off x="5157216" y="3364992"/>
+            <a:ext cx="73152" cy="475488"/>
           </a:xfrm>
           <a:prstGeom prst="rect">
             <a:avLst/>
@@ -31697,8 +31394,8 @@
         </p:nvSpPr>
         <p:spPr>
           <a:xfrm>
-            <a:off x="6428232" y="3364992"/>
-            <a:ext cx="1645920" cy="475488"/>
+            <a:off x="5230368" y="3364992"/>
+            <a:ext cx="1554480" cy="475488"/>
           </a:xfrm>
           <a:prstGeom prst="rect">
             <a:avLst>
@@ -31724,8 +31421,8 @@
         </p:nvSpPr>
         <p:spPr>
           <a:xfrm>
-            <a:off x="6428232" y="3364992"/>
-            <a:ext cx="1645920" cy="475488"/>
+            <a:off x="5230368" y="3364992"/>
+            <a:ext cx="1554480" cy="475488"/>
           </a:xfrm>
           <a:prstGeom prst="rect">
             <a:avLst/>
@@ -31749,7 +31446,7 @@
                 <a:ea typeface="Trebuchet MS" pitchFamily="34" charset="-122"/>
                 <a:cs typeface="Trebuchet MS" pitchFamily="34" charset="-120"/>
               </a:rPr>
-              <a:t>tor</a:t>
+              <a:t>vi</a:t>
             </a:r>
             <a:endParaRPr lang="en-US" sz="1400" dirty="0"/>
           </a:p>
@@ -31757,7 +31454,112 @@
       </p:sp>
       <p:sp>
         <p:nvSpPr>
-          <p:cNvPr id="36" name="Shape 34"/>
+          <p:cNvPr id="36" name="Text 34"/>
+          <p:cNvSpPr/>
+          <p:nvPr/>
+        </p:nvSpPr>
+        <p:spPr>
+          <a:xfrm>
+            <a:off x="6784848" y="3364992"/>
+            <a:ext cx="73152" cy="475488"/>
+          </a:xfrm>
+          <a:prstGeom prst="rect">
+            <a:avLst/>
+          </a:prstGeom>
+          <a:noFill/>
+          <a:ln/>
+        </p:spPr>
+        <p:txBody>
+          <a:bodyPr wrap="square" lIns="0" tIns="0" rIns="0" bIns="0" rtlCol="0" anchor="ctr"/>
+          <a:lstStyle/>
+          <a:p>
+            <a:pPr algn="ctr" indent="0" marL="0">
+              <a:buNone/>
+            </a:pPr>
+            <a:r>
+              <a:rPr lang="en-US" sz="1600" b="1" dirty="0">
+                <a:solidFill>
+                  <a:srgbClr val="0D9488"/>
+                </a:solidFill>
+                <a:latin typeface="Trebuchet MS" pitchFamily="34" charset="0"/>
+                <a:ea typeface="Trebuchet MS" pitchFamily="34" charset="-122"/>
+                <a:cs typeface="Trebuchet MS" pitchFamily="34" charset="-120"/>
+              </a:rPr>
+              <a:t>·</a:t>
+            </a:r>
+            <a:endParaRPr lang="en-US" sz="1600" dirty="0"/>
+          </a:p>
+        </p:txBody>
+      </p:sp>
+      <p:sp>
+        <p:nvSpPr>
+          <p:cNvPr id="37" name="Shape 35"/>
+          <p:cNvSpPr/>
+          <p:nvPr/>
+        </p:nvSpPr>
+        <p:spPr>
+          <a:xfrm>
+            <a:off x="6858000" y="3364992"/>
+            <a:ext cx="1554480" cy="475488"/>
+          </a:xfrm>
+          <a:prstGeom prst="rect">
+            <a:avLst>
+              <a:gd name="adj" fmla="val 9615"/>
+            </a:avLst>
+          </a:prstGeom>
+          <a:solidFill>
+            <a:srgbClr val="FFFFFF"/>
+          </a:solidFill>
+          <a:ln w="12700">
+            <a:solidFill>
+              <a:srgbClr val="0D9488"/>
+            </a:solidFill>
+            <a:prstDash val="solid"/>
+          </a:ln>
+        </p:spPr>
+      </p:sp>
+      <p:sp>
+        <p:nvSpPr>
+          <p:cNvPr id="38" name="Text 36"/>
+          <p:cNvSpPr/>
+          <p:nvPr/>
+        </p:nvSpPr>
+        <p:spPr>
+          <a:xfrm>
+            <a:off x="6858000" y="3364992"/>
+            <a:ext cx="1554480" cy="475488"/>
+          </a:xfrm>
+          <a:prstGeom prst="rect">
+            <a:avLst/>
+          </a:prstGeom>
+          <a:noFill/>
+          <a:ln/>
+        </p:spPr>
+        <p:txBody>
+          <a:bodyPr wrap="square" lIns="0" tIns="0" rIns="0" bIns="0" rtlCol="0" anchor="ctr"/>
+          <a:lstStyle/>
+          <a:p>
+            <a:pPr algn="ctr" indent="0" marL="0">
+              <a:buNone/>
+            </a:pPr>
+            <a:r>
+              <a:rPr lang="en-US" sz="1400" b="1" dirty="0">
+                <a:solidFill>
+                  <a:srgbClr val="0D9488"/>
+                </a:solidFill>
+                <a:latin typeface="Trebuchet MS" pitchFamily="34" charset="0"/>
+                <a:ea typeface="Trebuchet MS" pitchFamily="34" charset="-122"/>
+                <a:cs typeface="Trebuchet MS" pitchFamily="34" charset="-120"/>
+              </a:rPr>
+              <a:t>sor</a:t>
+            </a:r>
+            <a:endParaRPr lang="en-US" sz="1400" dirty="0"/>
+          </a:p>
+        </p:txBody>
+      </p:sp>
+      <p:sp>
+        <p:nvSpPr>
+          <p:cNvPr id="39" name="Shape 37"/>
           <p:cNvSpPr/>
           <p:nvPr/>
         </p:nvSpPr>
@@ -31784,7 +31586,7 @@
       </p:sp>
       <p:sp>
         <p:nvSpPr>
-          <p:cNvPr id="37" name="Text 35"/>
+          <p:cNvPr id="40" name="Text 38"/>
           <p:cNvSpPr/>
           <p:nvPr/>
         </p:nvSpPr>
@@ -31823,7 +31625,7 @@
       </p:sp>
       <p:sp>
         <p:nvSpPr>
-          <p:cNvPr id="38" name="Shape 36"/>
+          <p:cNvPr id="41" name="Shape 39"/>
           <p:cNvSpPr/>
           <p:nvPr/>
         </p:nvSpPr>
@@ -31850,7 +31652,7 @@
       </p:sp>
       <p:sp>
         <p:nvSpPr>
-          <p:cNvPr id="39" name="Text 37"/>
+          <p:cNvPr id="42" name="Text 40"/>
           <p:cNvSpPr/>
           <p:nvPr/>
         </p:nvSpPr>
@@ -32312,7 +32114,7 @@
                 <a:ea typeface="Trebuchet MS" pitchFamily="34" charset="-122"/>
                 <a:cs typeface="Trebuchet MS" pitchFamily="34" charset="-120"/>
               </a:rPr>
-              <a:t>inspector</a:t>
+              <a:t>supervisor</a:t>
             </a:r>
             <a:endParaRPr lang="en-US" sz="2800" dirty="0"/>
           </a:p>
@@ -32451,7 +32253,7 @@
                 <a:ea typeface="Trebuchet MS" pitchFamily="34" charset="-122"/>
                 <a:cs typeface="Trebuchet MS" pitchFamily="34" charset="-120"/>
               </a:rPr>
-              <a:t>in</a:t>
+              <a:t>super</a:t>
             </a:r>
             <a:endParaRPr lang="en-US" sz="1300" dirty="0"/>
           </a:p>
@@ -32490,7 +32292,7 @@
                 <a:ea typeface="Calibri" pitchFamily="34" charset="-122"/>
                 <a:cs typeface="Calibri" pitchFamily="34" charset="-120"/>
               </a:rPr>
-              <a:t>into</a:t>
+              <a:t>over, above</a:t>
             </a:r>
             <a:endParaRPr lang="en-US" sz="850" dirty="0"/>
           </a:p>
@@ -32563,7 +32365,7 @@
                 <a:ea typeface="Trebuchet MS" pitchFamily="34" charset="-122"/>
                 <a:cs typeface="Trebuchet MS" pitchFamily="34" charset="-120"/>
               </a:rPr>
-              <a:t>spect</a:t>
+              <a:t>vis</a:t>
             </a:r>
             <a:endParaRPr lang="en-US" sz="1300" dirty="0"/>
           </a:p>
@@ -32602,7 +32404,7 @@
                 <a:ea typeface="Calibri" pitchFamily="34" charset="-122"/>
                 <a:cs typeface="Calibri" pitchFamily="34" charset="-120"/>
               </a:rPr>
-              <a:t>to look</a:t>
+              <a:t>to see</a:t>
             </a:r>
             <a:endParaRPr lang="en-US" sz="850" dirty="0"/>
           </a:p>
@@ -32821,8 +32623,8 @@
         </p:nvSpPr>
         <p:spPr>
           <a:xfrm>
-            <a:off x="2313432" y="3364992"/>
-            <a:ext cx="1645920" cy="475488"/>
+            <a:off x="1975104" y="3364992"/>
+            <a:ext cx="1554480" cy="475488"/>
           </a:xfrm>
           <a:prstGeom prst="rect">
             <a:avLst>
@@ -32848,8 +32650,8 @@
         </p:nvSpPr>
         <p:spPr>
           <a:xfrm>
-            <a:off x="2313432" y="3364992"/>
-            <a:ext cx="1645920" cy="475488"/>
+            <a:off x="1975104" y="3364992"/>
+            <a:ext cx="1554480" cy="475488"/>
           </a:xfrm>
           <a:prstGeom prst="rect">
             <a:avLst/>
@@ -32873,7 +32675,7 @@
                 <a:ea typeface="Trebuchet MS" pitchFamily="34" charset="-122"/>
                 <a:cs typeface="Trebuchet MS" pitchFamily="34" charset="-120"/>
               </a:rPr>
-              <a:t>in</a:t>
+              <a:t>su</a:t>
             </a:r>
             <a:endParaRPr lang="en-US" sz="1400" dirty="0"/>
           </a:p>
@@ -32887,8 +32689,8 @@
         </p:nvSpPr>
         <p:spPr>
           <a:xfrm>
-            <a:off x="3959352" y="3364992"/>
-            <a:ext cx="411480" cy="475488"/>
+            <a:off x="3529584" y="3364992"/>
+            <a:ext cx="73152" cy="475488"/>
           </a:xfrm>
           <a:prstGeom prst="rect">
             <a:avLst/>
@@ -32926,8 +32728,8 @@
         </p:nvSpPr>
         <p:spPr>
           <a:xfrm>
-            <a:off x="4370832" y="3364992"/>
-            <a:ext cx="1645920" cy="475488"/>
+            <a:off x="3602736" y="3364992"/>
+            <a:ext cx="1554480" cy="475488"/>
           </a:xfrm>
           <a:prstGeom prst="rect">
             <a:avLst>
@@ -32953,8 +32755,8 @@
         </p:nvSpPr>
         <p:spPr>
           <a:xfrm>
-            <a:off x="4370832" y="3364992"/>
-            <a:ext cx="1645920" cy="475488"/>
+            <a:off x="3602736" y="3364992"/>
+            <a:ext cx="1554480" cy="475488"/>
           </a:xfrm>
           <a:prstGeom prst="rect">
             <a:avLst/>
@@ -32978,7 +32780,7 @@
                 <a:ea typeface="Trebuchet MS" pitchFamily="34" charset="-122"/>
                 <a:cs typeface="Trebuchet MS" pitchFamily="34" charset="-120"/>
               </a:rPr>
-              <a:t>spec</a:t>
+              <a:t>per</a:t>
             </a:r>
             <a:endParaRPr lang="en-US" sz="1400" dirty="0"/>
           </a:p>
@@ -32992,8 +32794,8 @@
         </p:nvSpPr>
         <p:spPr>
           <a:xfrm>
-            <a:off x="6016752" y="3364992"/>
-            <a:ext cx="411480" cy="475488"/>
+            <a:off x="5157216" y="3364992"/>
+            <a:ext cx="73152" cy="475488"/>
           </a:xfrm>
           <a:prstGeom prst="rect">
             <a:avLst/>
@@ -33031,8 +32833,8 @@
         </p:nvSpPr>
         <p:spPr>
           <a:xfrm>
-            <a:off x="6428232" y="3364992"/>
-            <a:ext cx="1645920" cy="475488"/>
+            <a:off x="5230368" y="3364992"/>
+            <a:ext cx="1554480" cy="475488"/>
           </a:xfrm>
           <a:prstGeom prst="rect">
             <a:avLst>
@@ -33058,8 +32860,8 @@
         </p:nvSpPr>
         <p:spPr>
           <a:xfrm>
-            <a:off x="6428232" y="3364992"/>
-            <a:ext cx="1645920" cy="475488"/>
+            <a:off x="5230368" y="3364992"/>
+            <a:ext cx="1554480" cy="475488"/>
           </a:xfrm>
           <a:prstGeom prst="rect">
             <a:avLst/>
@@ -33083,7 +32885,7 @@
                 <a:ea typeface="Trebuchet MS" pitchFamily="34" charset="-122"/>
                 <a:cs typeface="Trebuchet MS" pitchFamily="34" charset="-120"/>
               </a:rPr>
-              <a:t>tor</a:t>
+              <a:t>vi</a:t>
             </a:r>
             <a:endParaRPr lang="en-US" sz="1400" dirty="0"/>
           </a:p>
@@ -33091,7 +32893,112 @@
       </p:sp>
       <p:sp>
         <p:nvSpPr>
-          <p:cNvPr id="36" name="Shape 34"/>
+          <p:cNvPr id="36" name="Text 34"/>
+          <p:cNvSpPr/>
+          <p:nvPr/>
+        </p:nvSpPr>
+        <p:spPr>
+          <a:xfrm>
+            <a:off x="6784848" y="3364992"/>
+            <a:ext cx="73152" cy="475488"/>
+          </a:xfrm>
+          <a:prstGeom prst="rect">
+            <a:avLst/>
+          </a:prstGeom>
+          <a:noFill/>
+          <a:ln/>
+        </p:spPr>
+        <p:txBody>
+          <a:bodyPr wrap="square" lIns="0" tIns="0" rIns="0" bIns="0" rtlCol="0" anchor="ctr"/>
+          <a:lstStyle/>
+          <a:p>
+            <a:pPr algn="ctr" indent="0" marL="0">
+              <a:buNone/>
+            </a:pPr>
+            <a:r>
+              <a:rPr lang="en-US" sz="1600" b="1" dirty="0">
+                <a:solidFill>
+                  <a:srgbClr val="0D9488"/>
+                </a:solidFill>
+                <a:latin typeface="Trebuchet MS" pitchFamily="34" charset="0"/>
+                <a:ea typeface="Trebuchet MS" pitchFamily="34" charset="-122"/>
+                <a:cs typeface="Trebuchet MS" pitchFamily="34" charset="-120"/>
+              </a:rPr>
+              <a:t>·</a:t>
+            </a:r>
+            <a:endParaRPr lang="en-US" sz="1600" dirty="0"/>
+          </a:p>
+        </p:txBody>
+      </p:sp>
+      <p:sp>
+        <p:nvSpPr>
+          <p:cNvPr id="37" name="Shape 35"/>
+          <p:cNvSpPr/>
+          <p:nvPr/>
+        </p:nvSpPr>
+        <p:spPr>
+          <a:xfrm>
+            <a:off x="6858000" y="3364992"/>
+            <a:ext cx="1554480" cy="475488"/>
+          </a:xfrm>
+          <a:prstGeom prst="rect">
+            <a:avLst>
+              <a:gd name="adj" fmla="val 9615"/>
+            </a:avLst>
+          </a:prstGeom>
+          <a:solidFill>
+            <a:srgbClr val="FFFFFF"/>
+          </a:solidFill>
+          <a:ln w="12700">
+            <a:solidFill>
+              <a:srgbClr val="0D9488"/>
+            </a:solidFill>
+            <a:prstDash val="solid"/>
+          </a:ln>
+        </p:spPr>
+      </p:sp>
+      <p:sp>
+        <p:nvSpPr>
+          <p:cNvPr id="38" name="Text 36"/>
+          <p:cNvSpPr/>
+          <p:nvPr/>
+        </p:nvSpPr>
+        <p:spPr>
+          <a:xfrm>
+            <a:off x="6858000" y="3364992"/>
+            <a:ext cx="1554480" cy="475488"/>
+          </a:xfrm>
+          <a:prstGeom prst="rect">
+            <a:avLst/>
+          </a:prstGeom>
+          <a:noFill/>
+          <a:ln/>
+        </p:spPr>
+        <p:txBody>
+          <a:bodyPr wrap="square" lIns="0" tIns="0" rIns="0" bIns="0" rtlCol="0" anchor="ctr"/>
+          <a:lstStyle/>
+          <a:p>
+            <a:pPr algn="ctr" indent="0" marL="0">
+              <a:buNone/>
+            </a:pPr>
+            <a:r>
+              <a:rPr lang="en-US" sz="1400" b="1" dirty="0">
+                <a:solidFill>
+                  <a:srgbClr val="0D9488"/>
+                </a:solidFill>
+                <a:latin typeface="Trebuchet MS" pitchFamily="34" charset="0"/>
+                <a:ea typeface="Trebuchet MS" pitchFamily="34" charset="-122"/>
+                <a:cs typeface="Trebuchet MS" pitchFamily="34" charset="-120"/>
+              </a:rPr>
+              <a:t>sor</a:t>
+            </a:r>
+            <a:endParaRPr lang="en-US" sz="1400" dirty="0"/>
+          </a:p>
+        </p:txBody>
+      </p:sp>
+      <p:sp>
+        <p:nvSpPr>
+          <p:cNvPr id="39" name="Shape 37"/>
           <p:cNvSpPr/>
           <p:nvPr/>
         </p:nvSpPr>
@@ -33118,7 +33025,7 @@
       </p:sp>
       <p:sp>
         <p:nvSpPr>
-          <p:cNvPr id="37" name="Text 35"/>
+          <p:cNvPr id="40" name="Text 38"/>
           <p:cNvSpPr/>
           <p:nvPr/>
         </p:nvSpPr>
@@ -33157,7 +33064,7 @@
       </p:sp>
       <p:sp>
         <p:nvSpPr>
-          <p:cNvPr id="38" name="Shape 36"/>
+          <p:cNvPr id="41" name="Shape 39"/>
           <p:cNvSpPr/>
           <p:nvPr/>
         </p:nvSpPr>
@@ -33184,7 +33091,7 @@
       </p:sp>
       <p:sp>
         <p:nvSpPr>
-          <p:cNvPr id="39" name="Shape 37"/>
+          <p:cNvPr id="42" name="Shape 40"/>
           <p:cNvSpPr/>
           <p:nvPr/>
         </p:nvSpPr>
@@ -33211,7 +33118,7 @@
       </p:sp>
       <p:sp>
         <p:nvSpPr>
-          <p:cNvPr id="40" name="Text 38"/>
+          <p:cNvPr id="43" name="Text 41"/>
           <p:cNvSpPr/>
           <p:nvPr/>
         </p:nvSpPr>
@@ -33242,7 +33149,7 @@
                 <a:ea typeface="Trebuchet MS" pitchFamily="34" charset="-122"/>
                 <a:cs typeface="Trebuchet MS" pitchFamily="34" charset="-120"/>
               </a:rPr>
-              <a:t>i</a:t>
+              <a:t>s</a:t>
             </a:r>
             <a:endParaRPr lang="en-US" sz="900" dirty="0"/>
           </a:p>
@@ -33250,7 +33157,7 @@
       </p:sp>
       <p:sp>
         <p:nvSpPr>
-          <p:cNvPr id="41" name="Shape 39"/>
+          <p:cNvPr id="44" name="Shape 42"/>
           <p:cNvSpPr/>
           <p:nvPr/>
         </p:nvSpPr>
@@ -33277,7 +33184,7 @@
       </p:sp>
       <p:sp>
         <p:nvSpPr>
-          <p:cNvPr id="42" name="Text 40"/>
+          <p:cNvPr id="45" name="Text 43"/>
           <p:cNvSpPr/>
           <p:nvPr/>
         </p:nvSpPr>
@@ -33308,7 +33215,7 @@
                 <a:ea typeface="Trebuchet MS" pitchFamily="34" charset="-122"/>
                 <a:cs typeface="Trebuchet MS" pitchFamily="34" charset="-120"/>
               </a:rPr>
-              <a:t>n</a:t>
+              <a:t>u</a:t>
             </a:r>
             <a:endParaRPr lang="en-US" sz="900" dirty="0"/>
           </a:p>
@@ -33316,7 +33223,7 @@
       </p:sp>
       <p:sp>
         <p:nvSpPr>
-          <p:cNvPr id="43" name="Shape 41"/>
+          <p:cNvPr id="46" name="Shape 44"/>
           <p:cNvSpPr/>
           <p:nvPr/>
         </p:nvSpPr>
@@ -33343,7 +33250,7 @@
       </p:sp>
       <p:sp>
         <p:nvSpPr>
-          <p:cNvPr id="44" name="Text 42"/>
+          <p:cNvPr id="47" name="Text 45"/>
           <p:cNvSpPr/>
           <p:nvPr/>
         </p:nvSpPr>
@@ -33374,7 +33281,7 @@
                 <a:ea typeface="Trebuchet MS" pitchFamily="34" charset="-122"/>
                 <a:cs typeface="Trebuchet MS" pitchFamily="34" charset="-120"/>
               </a:rPr>
-              <a:t>s</a:t>
+              <a:t>p</a:t>
             </a:r>
             <a:endParaRPr lang="en-US" sz="900" dirty="0"/>
           </a:p>
@@ -33382,7 +33289,7 @@
       </p:sp>
       <p:sp>
         <p:nvSpPr>
-          <p:cNvPr id="45" name="Shape 43"/>
+          <p:cNvPr id="48" name="Shape 46"/>
           <p:cNvSpPr/>
           <p:nvPr/>
         </p:nvSpPr>
@@ -33409,7 +33316,7 @@
       </p:sp>
       <p:sp>
         <p:nvSpPr>
-          <p:cNvPr id="46" name="Text 44"/>
+          <p:cNvPr id="49" name="Text 47"/>
           <p:cNvSpPr/>
           <p:nvPr/>
         </p:nvSpPr>
@@ -33440,7 +33347,7 @@
                 <a:ea typeface="Trebuchet MS" pitchFamily="34" charset="-122"/>
                 <a:cs typeface="Trebuchet MS" pitchFamily="34" charset="-120"/>
               </a:rPr>
-              <a:t>p</a:t>
+              <a:t>er</a:t>
             </a:r>
             <a:endParaRPr lang="en-US" sz="900" dirty="0"/>
           </a:p>
@@ -33448,7 +33355,7 @@
       </p:sp>
       <p:sp>
         <p:nvSpPr>
-          <p:cNvPr id="47" name="Shape 45"/>
+          <p:cNvPr id="50" name="Shape 48"/>
           <p:cNvSpPr/>
           <p:nvPr/>
         </p:nvSpPr>
@@ -33475,7 +33382,7 @@
       </p:sp>
       <p:sp>
         <p:nvSpPr>
-          <p:cNvPr id="48" name="Text 46"/>
+          <p:cNvPr id="51" name="Text 49"/>
           <p:cNvSpPr/>
           <p:nvPr/>
         </p:nvSpPr>
@@ -33506,7 +33413,7 @@
                 <a:ea typeface="Trebuchet MS" pitchFamily="34" charset="-122"/>
                 <a:cs typeface="Trebuchet MS" pitchFamily="34" charset="-120"/>
               </a:rPr>
-              <a:t>e</a:t>
+              <a:t>v</a:t>
             </a:r>
             <a:endParaRPr lang="en-US" sz="900" dirty="0"/>
           </a:p>
@@ -33514,7 +33421,7 @@
       </p:sp>
       <p:sp>
         <p:nvSpPr>
-          <p:cNvPr id="49" name="Shape 47"/>
+          <p:cNvPr id="52" name="Shape 50"/>
           <p:cNvSpPr/>
           <p:nvPr/>
         </p:nvSpPr>
@@ -33541,7 +33448,7 @@
       </p:sp>
       <p:sp>
         <p:nvSpPr>
-          <p:cNvPr id="50" name="Text 48"/>
+          <p:cNvPr id="53" name="Text 51"/>
           <p:cNvSpPr/>
           <p:nvPr/>
         </p:nvSpPr>
@@ -33572,7 +33479,7 @@
                 <a:ea typeface="Trebuchet MS" pitchFamily="34" charset="-122"/>
                 <a:cs typeface="Trebuchet MS" pitchFamily="34" charset="-120"/>
               </a:rPr>
-              <a:t>c</a:t>
+              <a:t>i</a:t>
             </a:r>
             <a:endParaRPr lang="en-US" sz="900" dirty="0"/>
           </a:p>
@@ -33580,13 +33487,79 @@
       </p:sp>
       <p:sp>
         <p:nvSpPr>
-          <p:cNvPr id="51" name="Text 49"/>
-          <p:cNvSpPr/>
-          <p:nvPr/>
-        </p:nvSpPr>
-        <p:spPr>
-          <a:xfrm>
-            <a:off x="6062472" y="4572000"/>
+          <p:cNvPr id="54" name="Shape 52"/>
+          <p:cNvSpPr/>
+          <p:nvPr/>
+        </p:nvSpPr>
+        <p:spPr>
+          <a:xfrm>
+            <a:off x="6870192" y="4169664"/>
+            <a:ext cx="685800" cy="384048"/>
+          </a:xfrm>
+          <a:prstGeom prst="rect">
+            <a:avLst>
+              <a:gd name="adj" fmla="val 9524"/>
+            </a:avLst>
+          </a:prstGeom>
+          <a:solidFill>
+            <a:srgbClr val="FFFFFF"/>
+          </a:solidFill>
+          <a:ln w="12700">
+            <a:solidFill>
+              <a:srgbClr val="DB2777"/>
+            </a:solidFill>
+            <a:prstDash val="solid"/>
+          </a:ln>
+        </p:spPr>
+      </p:sp>
+      <p:sp>
+        <p:nvSpPr>
+          <p:cNvPr id="55" name="Text 53"/>
+          <p:cNvSpPr/>
+          <p:nvPr/>
+        </p:nvSpPr>
+        <p:spPr>
+          <a:xfrm>
+            <a:off x="6870192" y="4169664"/>
+            <a:ext cx="685800" cy="384048"/>
+          </a:xfrm>
+          <a:prstGeom prst="rect">
+            <a:avLst/>
+          </a:prstGeom>
+          <a:noFill/>
+          <a:ln/>
+        </p:spPr>
+        <p:txBody>
+          <a:bodyPr wrap="square" lIns="0" tIns="0" rIns="0" bIns="0" rtlCol="0" anchor="ctr"/>
+          <a:lstStyle/>
+          <a:p>
+            <a:pPr algn="ctr" indent="0" marL="0">
+              <a:buNone/>
+            </a:pPr>
+            <a:r>
+              <a:rPr lang="en-US" sz="900" b="1" dirty="0">
+                <a:solidFill>
+                  <a:srgbClr val="9D174D"/>
+                </a:solidFill>
+                <a:latin typeface="Trebuchet MS" pitchFamily="34" charset="0"/>
+                <a:ea typeface="Trebuchet MS" pitchFamily="34" charset="-122"/>
+                <a:cs typeface="Trebuchet MS" pitchFamily="34" charset="-120"/>
+              </a:rPr>
+              <a:t>s</a:t>
+            </a:r>
+            <a:endParaRPr lang="en-US" sz="900" dirty="0"/>
+          </a:p>
+        </p:txBody>
+      </p:sp>
+      <p:sp>
+        <p:nvSpPr>
+          <p:cNvPr id="56" name="Text 54"/>
+          <p:cNvSpPr/>
+          <p:nvPr/>
+        </p:nvSpPr>
+        <p:spPr>
+          <a:xfrm>
+            <a:off x="6870192" y="4572000"/>
             <a:ext cx="685800" cy="219456"/>
           </a:xfrm>
           <a:prstGeom prst="rect">
@@ -33611,7 +33584,7 @@
                 <a:ea typeface="Calibri" pitchFamily="34" charset="-122"/>
                 <a:cs typeface="Calibri" pitchFamily="34" charset="-120"/>
               </a:rPr>
-              <a:t>/k/</a:t>
+              <a:t>/z/</a:t>
             </a:r>
             <a:endParaRPr lang="en-US" sz="750" dirty="0"/>
           </a:p>
@@ -33619,13 +33592,13 @@
       </p:sp>
       <p:sp>
         <p:nvSpPr>
-          <p:cNvPr id="52" name="Shape 50"/>
-          <p:cNvSpPr/>
-          <p:nvPr/>
-        </p:nvSpPr>
-        <p:spPr>
-          <a:xfrm>
-            <a:off x="6870192" y="4169664"/>
+          <p:cNvPr id="57" name="Shape 55"/>
+          <p:cNvSpPr/>
+          <p:nvPr/>
+        </p:nvSpPr>
+        <p:spPr>
+          <a:xfrm>
+            <a:off x="7677912" y="4169664"/>
             <a:ext cx="685800" cy="384048"/>
           </a:xfrm>
           <a:prstGeom prst="rect">
@@ -33646,73 +33619,7 @@
       </p:sp>
       <p:sp>
         <p:nvSpPr>
-          <p:cNvPr id="53" name="Text 51"/>
-          <p:cNvSpPr/>
-          <p:nvPr/>
-        </p:nvSpPr>
-        <p:spPr>
-          <a:xfrm>
-            <a:off x="6870192" y="4169664"/>
-            <a:ext cx="685800" cy="384048"/>
-          </a:xfrm>
-          <a:prstGeom prst="rect">
-            <a:avLst/>
-          </a:prstGeom>
-          <a:noFill/>
-          <a:ln/>
-        </p:spPr>
-        <p:txBody>
-          <a:bodyPr wrap="square" lIns="0" tIns="0" rIns="0" bIns="0" rtlCol="0" anchor="ctr"/>
-          <a:lstStyle/>
-          <a:p>
-            <a:pPr algn="ctr" indent="0" marL="0">
-              <a:buNone/>
-            </a:pPr>
-            <a:r>
-              <a:rPr lang="en-US" sz="900" b="1" dirty="0">
-                <a:solidFill>
-                  <a:srgbClr val="9D174D"/>
-                </a:solidFill>
-                <a:latin typeface="Trebuchet MS" pitchFamily="34" charset="0"/>
-                <a:ea typeface="Trebuchet MS" pitchFamily="34" charset="-122"/>
-                <a:cs typeface="Trebuchet MS" pitchFamily="34" charset="-120"/>
-              </a:rPr>
-              <a:t>t</a:t>
-            </a:r>
-            <a:endParaRPr lang="en-US" sz="900" dirty="0"/>
-          </a:p>
-        </p:txBody>
-      </p:sp>
-      <p:sp>
-        <p:nvSpPr>
-          <p:cNvPr id="54" name="Shape 52"/>
-          <p:cNvSpPr/>
-          <p:nvPr/>
-        </p:nvSpPr>
-        <p:spPr>
-          <a:xfrm>
-            <a:off x="7677912" y="4169664"/>
-            <a:ext cx="685800" cy="384048"/>
-          </a:xfrm>
-          <a:prstGeom prst="rect">
-            <a:avLst>
-              <a:gd name="adj" fmla="val 9524"/>
-            </a:avLst>
-          </a:prstGeom>
-          <a:solidFill>
-            <a:srgbClr val="FFFFFF"/>
-          </a:solidFill>
-          <a:ln w="12700">
-            <a:solidFill>
-              <a:srgbClr val="DB2777"/>
-            </a:solidFill>
-            <a:prstDash val="solid"/>
-          </a:ln>
-        </p:spPr>
-      </p:sp>
-      <p:sp>
-        <p:nvSpPr>
-          <p:cNvPr id="55" name="Text 53"/>
+          <p:cNvPr id="58" name="Text 56"/>
           <p:cNvSpPr/>
           <p:nvPr/>
         </p:nvSpPr>
@@ -35697,7 +35604,7 @@
                 <a:ea typeface="Trebuchet MS" pitchFamily="34" charset="-122"/>
                 <a:cs typeface="Trebuchet MS" pitchFamily="34" charset="-120"/>
               </a:rPr>
-              <a:t>dir-</a:t>
+              <a:t>di-</a:t>
             </a:r>
             <a:endParaRPr lang="en-US" sz="1300" dirty="0"/>
           </a:p>
@@ -35761,7 +35668,7 @@
                 <a:ea typeface="Trebuchet MS" pitchFamily="34" charset="-122"/>
                 <a:cs typeface="Trebuchet MS" pitchFamily="34" charset="-120"/>
               </a:rPr>
-              <a:t>visit</a:t>
+              <a:t>direct</a:t>
             </a:r>
             <a:endParaRPr lang="en-US" sz="1300" dirty="0"/>
           </a:p>
@@ -36003,7 +35910,7 @@
                 <a:ea typeface="Trebuchet MS" pitchFamily="34" charset="-122"/>
                 <a:cs typeface="Trebuchet MS" pitchFamily="34" charset="-120"/>
               </a:rPr>
-              <a:t>act-</a:t>
+              <a:t>con-</a:t>
             </a:r>
             <a:endParaRPr lang="en-US" sz="1300" dirty="0"/>
           </a:p>
@@ -36067,7 +35974,7 @@
                 <a:ea typeface="Trebuchet MS" pitchFamily="34" charset="-122"/>
                 <a:cs typeface="Trebuchet MS" pitchFamily="34" charset="-120"/>
               </a:rPr>
-              <a:t>creat</a:t>
+              <a:t>visit</a:t>
             </a:r>
             <a:endParaRPr lang="en-US" sz="1300" dirty="0"/>
           </a:p>
@@ -36156,7 +36063,7 @@
                 <a:ea typeface="Trebuchet MS" pitchFamily="34" charset="-122"/>
                 <a:cs typeface="Trebuchet MS" pitchFamily="34" charset="-120"/>
               </a:rPr>
-              <a:t>gov-</a:t>
+              <a:t>de-</a:t>
             </a:r>
             <a:endParaRPr lang="en-US" sz="1300" dirty="0"/>
           </a:p>
@@ -36416,7 +36323,7 @@
                 <a:ea typeface="Trebuchet MS" pitchFamily="34" charset="-122"/>
                 <a:cs typeface="Trebuchet MS" pitchFamily="34" charset="-120"/>
               </a:rPr>
-              <a:t>visitor</a:t>
+              <a:t>director</a:t>
             </a:r>
             <a:endParaRPr lang="en-US" sz="1200" dirty="0"/>
           </a:p>
@@ -36548,7 +36455,7 @@
                 <a:ea typeface="Trebuchet MS" pitchFamily="34" charset="-122"/>
                 <a:cs typeface="Trebuchet MS" pitchFamily="34" charset="-120"/>
               </a:rPr>
-              <a:t>creator</a:t>
+              <a:t>visitor</a:t>
             </a:r>
             <a:endParaRPr lang="en-US" sz="1200" dirty="0"/>
           </a:p>
@@ -36680,7 +36587,7 @@
                 <a:ea typeface="Trebuchet MS" pitchFamily="34" charset="-122"/>
                 <a:cs typeface="Trebuchet MS" pitchFamily="34" charset="-120"/>
               </a:rPr>
-              <a:t>director</a:t>
+              <a:t>senator</a:t>
             </a:r>
             <a:endParaRPr lang="en-US" sz="1200" dirty="0"/>
           </a:p>
@@ -36746,7 +36653,7 @@
                 <a:ea typeface="Trebuchet MS" pitchFamily="34" charset="-122"/>
                 <a:cs typeface="Trebuchet MS" pitchFamily="34" charset="-120"/>
               </a:rPr>
-              <a:t>senator</a:t>
+              <a:t>conductor</a:t>
             </a:r>
             <a:endParaRPr lang="en-US" sz="1200" dirty="0"/>
           </a:p>
@@ -36812,7 +36719,7 @@
                 <a:ea typeface="Trebuchet MS" pitchFamily="34" charset="-122"/>
                 <a:cs typeface="Trebuchet MS" pitchFamily="34" charset="-120"/>
               </a:rPr>
-              <a:t>instructor</a:t>
+              <a:t>supervisor</a:t>
             </a:r>
             <a:endParaRPr lang="en-US" sz="1200" dirty="0"/>
           </a:p>
@@ -37596,7 +37503,7 @@
                 <a:ea typeface="Calibri" pitchFamily="34" charset="-122"/>
                 <a:cs typeface="Calibri" pitchFamily="34" charset="-120"/>
               </a:rPr>
-              <a:t>A meaningful word part added to the beginning of a root to change its meaning. E.g. 'un-' in 'visitor' means 'not'.</a:t>
+              <a:t>A meaningful word part added to the beginning of a root to change its meaning. E.g. 'un-' in 'director' means 'not'.</a:t>
             </a:r>
             <a:endParaRPr lang="en-US" sz="1350" dirty="0"/>
           </a:p>
@@ -38000,7 +37907,7 @@
                 <a:ea typeface="Calibri" pitchFamily="34" charset="-122"/>
                 <a:cs typeface="Calibri" pitchFamily="34" charset="-120"/>
               </a:rPr>
-              <a:t>1.  The suffix '-or' usually means 'one who does something'.</a:t>
+              <a:t>1.  An actor is a person who acts.</a:t>
             </a:r>
             <a:endParaRPr lang="en-US" sz="1300" dirty="0"/>
           </a:p>
@@ -38139,7 +38046,7 @@
                 <a:ea typeface="Calibri" pitchFamily="34" charset="-122"/>
                 <a:cs typeface="Calibri" pitchFamily="34" charset="-120"/>
               </a:rPr>
-              <a:t>2.  The suffix '-or' comes from Old English.</a:t>
+              <a:t>2.  The suffix '-or' comes from Latin.</a:t>
             </a:r>
             <a:endParaRPr lang="en-US" sz="1300" dirty="0"/>
           </a:p>
@@ -38162,11 +38069,11 @@
             </a:avLst>
           </a:prstGeom>
           <a:solidFill>
-            <a:srgbClr val="FEE2E2"/>
-          </a:solidFill>
-          <a:ln w="12700">
-            <a:solidFill>
-              <a:srgbClr val="DC2626"/>
+            <a:srgbClr val="DCFCE7"/>
+          </a:solidFill>
+          <a:ln w="12700">
+            <a:solidFill>
+              <a:srgbClr val="16A34A"/>
             </a:solidFill>
             <a:prstDash val="solid"/>
           </a:ln>
@@ -38199,13 +38106,13 @@
             <a:r>
               <a:rPr lang="en-US" sz="1100" b="1" dirty="0">
                 <a:solidFill>
-                  <a:srgbClr val="DC2626"/>
+                  <a:srgbClr val="16A34A"/>
                 </a:solidFill>
                 <a:latin typeface="Trebuchet MS" pitchFamily="34" charset="0"/>
                 <a:ea typeface="Trebuchet MS" pitchFamily="34" charset="-122"/>
                 <a:cs typeface="Trebuchet MS" pitchFamily="34" charset="-120"/>
               </a:rPr>
-              <a:t>FALSE</a:t>
+              <a:t>TRUE</a:t>
             </a:r>
             <a:endParaRPr lang="en-US" sz="1100" dirty="0"/>
           </a:p>
@@ -38278,7 +38185,7 @@
                 <a:ea typeface="Calibri" pitchFamily="34" charset="-122"/>
                 <a:cs typeface="Calibri" pitchFamily="34" charset="-120"/>
               </a:rPr>
-              <a:t>3.  The word 'actor' contains the suffix '-or'.</a:t>
+              <a:t>3.  The suffix '-or' means 'without' or 'not'.</a:t>
             </a:r>
             <a:endParaRPr lang="en-US" sz="1300" dirty="0"/>
           </a:p>
@@ -38301,11 +38208,11 @@
             </a:avLst>
           </a:prstGeom>
           <a:solidFill>
-            <a:srgbClr val="DCFCE7"/>
-          </a:solidFill>
-          <a:ln w="12700">
-            <a:solidFill>
-              <a:srgbClr val="16A34A"/>
+            <a:srgbClr val="FEE2E2"/>
+          </a:solidFill>
+          <a:ln w="12700">
+            <a:solidFill>
+              <a:srgbClr val="DC2626"/>
             </a:solidFill>
             <a:prstDash val="solid"/>
           </a:ln>
@@ -38338,13 +38245,13 @@
             <a:r>
               <a:rPr lang="en-US" sz="1100" b="1" dirty="0">
                 <a:solidFill>
-                  <a:srgbClr val="16A34A"/>
+                  <a:srgbClr val="DC2626"/>
                 </a:solidFill>
                 <a:latin typeface="Trebuchet MS" pitchFamily="34" charset="0"/>
                 <a:ea typeface="Trebuchet MS" pitchFamily="34" charset="-122"/>
                 <a:cs typeface="Trebuchet MS" pitchFamily="34" charset="-120"/>
               </a:rPr>
-              <a:t>TRUE</a:t>
+              <a:t>FALSE</a:t>
             </a:r>
             <a:endParaRPr lang="en-US" sz="1100" dirty="0"/>
           </a:p>
@@ -38417,7 +38324,7 @@
                 <a:ea typeface="Calibri" pitchFamily="34" charset="-122"/>
                 <a:cs typeface="Calibri" pitchFamily="34" charset="-120"/>
               </a:rPr>
-              <a:t>4.  Adding '-or' to a base word creates a noun.</a:t>
+              <a:t>4.  The suffix '-or' can only be added to words that already end in a vowel.</a:t>
             </a:r>
             <a:endParaRPr lang="en-US" sz="1300" dirty="0"/>
           </a:p>
@@ -38440,11 +38347,11 @@
             </a:avLst>
           </a:prstGeom>
           <a:solidFill>
-            <a:srgbClr val="DCFCE7"/>
-          </a:solidFill>
-          <a:ln w="12700">
-            <a:solidFill>
-              <a:srgbClr val="16A34A"/>
+            <a:srgbClr val="FEE2E2"/>
+          </a:solidFill>
+          <a:ln w="12700">
+            <a:solidFill>
+              <a:srgbClr val="DC2626"/>
             </a:solidFill>
             <a:prstDash val="solid"/>
           </a:ln>
@@ -38477,13 +38384,13 @@
             <a:r>
               <a:rPr lang="en-US" sz="1100" b="1" dirty="0">
                 <a:solidFill>
-                  <a:srgbClr val="16A34A"/>
+                  <a:srgbClr val="DC2626"/>
                 </a:solidFill>
                 <a:latin typeface="Trebuchet MS" pitchFamily="34" charset="0"/>
                 <a:ea typeface="Trebuchet MS" pitchFamily="34" charset="-122"/>
                 <a:cs typeface="Trebuchet MS" pitchFamily="34" charset="-120"/>
               </a:rPr>
-              <a:t>TRUE</a:t>
+              <a:t>FALSE</a:t>
             </a:r>
             <a:endParaRPr lang="en-US" sz="1100" dirty="0"/>
           </a:p>
@@ -38556,7 +38463,7 @@
                 <a:ea typeface="Calibri" pitchFamily="34" charset="-122"/>
                 <a:cs typeface="Calibri" pitchFamily="34" charset="-120"/>
               </a:rPr>
-              <a:t>5.  The suffix '-or' means 'full of'.</a:t>
+              <a:t>5.  The suffix '-or' turns a verb into a noun meaning a person who does that action.</a:t>
             </a:r>
             <a:endParaRPr lang="en-US" sz="1300" dirty="0"/>
           </a:p>
@@ -38579,11 +38486,11 @@
             </a:avLst>
           </a:prstGeom>
           <a:solidFill>
-            <a:srgbClr val="FEE2E2"/>
-          </a:solidFill>
-          <a:ln w="12700">
-            <a:solidFill>
-              <a:srgbClr val="DC2626"/>
+            <a:srgbClr val="DCFCE7"/>
+          </a:solidFill>
+          <a:ln w="12700">
+            <a:solidFill>
+              <a:srgbClr val="16A34A"/>
             </a:solidFill>
             <a:prstDash val="solid"/>
           </a:ln>
@@ -38616,13 +38523,13 @@
             <a:r>
               <a:rPr lang="en-US" sz="1100" b="1" dirty="0">
                 <a:solidFill>
-                  <a:srgbClr val="DC2626"/>
+                  <a:srgbClr val="16A34A"/>
                 </a:solidFill>
                 <a:latin typeface="Trebuchet MS" pitchFamily="34" charset="0"/>
                 <a:ea typeface="Trebuchet MS" pitchFamily="34" charset="-122"/>
                 <a:cs typeface="Trebuchet MS" pitchFamily="34" charset="-120"/>
               </a:rPr>
-              <a:t>FALSE</a:t>
+              <a:t>TRUE</a:t>
             </a:r>
             <a:endParaRPr lang="en-US" sz="1100" dirty="0"/>
           </a:p>
@@ -39261,7 +39168,7 @@
                 <a:ea typeface="Trebuchet MS" pitchFamily="34" charset="-122"/>
                 <a:cs typeface="Trebuchet MS" pitchFamily="34" charset="-120"/>
               </a:rPr>
-              <a:t>visitor</a:t>
+              <a:t>director</a:t>
             </a:r>
             <a:endParaRPr lang="en-US" sz="1300" dirty="0"/>
           </a:p>
@@ -39393,7 +39300,7 @@
                 <a:ea typeface="Trebuchet MS" pitchFamily="34" charset="-122"/>
                 <a:cs typeface="Trebuchet MS" pitchFamily="34" charset="-120"/>
               </a:rPr>
-              <a:t>creator</a:t>
+              <a:t>visitor</a:t>
             </a:r>
             <a:endParaRPr lang="en-US" sz="1300" dirty="0"/>
           </a:p>
@@ -39525,7 +39432,7 @@
                 <a:ea typeface="Trebuchet MS" pitchFamily="34" charset="-122"/>
                 <a:cs typeface="Trebuchet MS" pitchFamily="34" charset="-120"/>
               </a:rPr>
-              <a:t>director</a:t>
+              <a:t>senator</a:t>
             </a:r>
             <a:endParaRPr lang="en-US" sz="1300" dirty="0"/>
           </a:p>
@@ -39591,7 +39498,7 @@
                 <a:ea typeface="Trebuchet MS" pitchFamily="34" charset="-122"/>
                 <a:cs typeface="Trebuchet MS" pitchFamily="34" charset="-120"/>
               </a:rPr>
-              <a:t>senator</a:t>
+              <a:t>conductor</a:t>
             </a:r>
             <a:endParaRPr lang="en-US" sz="1300" dirty="0"/>
           </a:p>
@@ -40376,7 +40283,7 @@
                 <a:ea typeface="Trebuchet MS" pitchFamily="34" charset="-122"/>
                 <a:cs typeface="Trebuchet MS" pitchFamily="34" charset="-120"/>
               </a:rPr>
-              <a:t>dir-</a:t>
+              <a:t>di-</a:t>
             </a:r>
             <a:endParaRPr lang="en-US" sz="1300" dirty="0"/>
           </a:p>
@@ -40440,7 +40347,7 @@
                 <a:ea typeface="Trebuchet MS" pitchFamily="34" charset="-122"/>
                 <a:cs typeface="Trebuchet MS" pitchFamily="34" charset="-120"/>
               </a:rPr>
-              <a:t>visit</a:t>
+              <a:t>direct</a:t>
             </a:r>
             <a:endParaRPr lang="en-US" sz="1300" dirty="0"/>
           </a:p>
@@ -40682,7 +40589,7 @@
                 <a:ea typeface="Trebuchet MS" pitchFamily="34" charset="-122"/>
                 <a:cs typeface="Trebuchet MS" pitchFamily="34" charset="-120"/>
               </a:rPr>
-              <a:t>act-</a:t>
+              <a:t>con-</a:t>
             </a:r>
             <a:endParaRPr lang="en-US" sz="1300" dirty="0"/>
           </a:p>
@@ -40746,7 +40653,7 @@
                 <a:ea typeface="Trebuchet MS" pitchFamily="34" charset="-122"/>
                 <a:cs typeface="Trebuchet MS" pitchFamily="34" charset="-120"/>
               </a:rPr>
-              <a:t>creat</a:t>
+              <a:t>visit</a:t>
             </a:r>
             <a:endParaRPr lang="en-US" sz="1300" dirty="0"/>
           </a:p>
@@ -40835,7 +40742,7 @@
                 <a:ea typeface="Trebuchet MS" pitchFamily="34" charset="-122"/>
                 <a:cs typeface="Trebuchet MS" pitchFamily="34" charset="-120"/>
               </a:rPr>
-              <a:t>gov-</a:t>
+              <a:t>de-</a:t>
             </a:r>
             <a:endParaRPr lang="en-US" sz="1300" dirty="0"/>
           </a:p>
@@ -41835,7 +41742,7 @@
                 <a:ea typeface="Calibri" pitchFamily="34" charset="-122"/>
                 <a:cs typeface="Calibri" pitchFamily="34" charset="-120"/>
               </a:rPr>
-              <a:t>A member of a group of people who help make laws for a country.</a:t>
+              <a:t>A person who leads an orchestra or collects tickets on a train or bus.</a:t>
             </a:r>
             <a:endParaRPr lang="en-US" sz="1200" dirty="0"/>
           </a:p>
@@ -41908,7 +41815,7 @@
                 <a:ea typeface="Trebuchet MS" pitchFamily="34" charset="-122"/>
                 <a:cs typeface="Trebuchet MS" pitchFamily="34" charset="-120"/>
               </a:rPr>
-              <a:t>visitor</a:t>
+              <a:t>director</a:t>
             </a:r>
             <a:endParaRPr lang="en-US" sz="1200" dirty="0"/>
           </a:p>
@@ -41974,7 +41881,7 @@
                 <a:ea typeface="Calibri" pitchFamily="34" charset="-122"/>
                 <a:cs typeface="Calibri" pitchFamily="34" charset="-120"/>
               </a:rPr>
-              <a:t>Someone who makes or produces something original.</a:t>
+              <a:t>A person who comes to see a place or another person.</a:t>
             </a:r>
             <a:endParaRPr lang="en-US" sz="1200" dirty="0"/>
           </a:p>
@@ -42113,7 +42020,7 @@
                 <a:ea typeface="Calibri" pitchFamily="34" charset="-122"/>
                 <a:cs typeface="Calibri" pitchFamily="34" charset="-120"/>
               </a:rPr>
-              <a:t>A person who is in charge of a film, play, or organisation.</a:t>
+              <a:t>A person who is an elected member of a senate or government.</a:t>
             </a:r>
             <a:endParaRPr lang="en-US" sz="1200" dirty="0"/>
           </a:p>
@@ -42186,7 +42093,7 @@
                 <a:ea typeface="Trebuchet MS" pitchFamily="34" charset="-122"/>
                 <a:cs typeface="Trebuchet MS" pitchFamily="34" charset="-120"/>
               </a:rPr>
-              <a:t>creator</a:t>
+              <a:t>visitor</a:t>
             </a:r>
             <a:endParaRPr lang="en-US" sz="1200" dirty="0"/>
           </a:p>
@@ -42252,7 +42159,7 @@
                 <a:ea typeface="Calibri" pitchFamily="34" charset="-122"/>
                 <a:cs typeface="Calibri" pitchFamily="34" charset="-120"/>
               </a:rPr>
-              <a:t>A person who performs in plays, films, or television shows.</a:t>
+              <a:t>A person who performs in plays, films or shows.</a:t>
             </a:r>
             <a:endParaRPr lang="en-US" sz="1200" dirty="0"/>
           </a:p>
@@ -42464,7 +42371,7 @@
                 <a:ea typeface="Trebuchet MS" pitchFamily="34" charset="-122"/>
                 <a:cs typeface="Trebuchet MS" pitchFamily="34" charset="-120"/>
               </a:rPr>
-              <a:t>director</a:t>
+              <a:t>senator</a:t>
             </a:r>
             <a:endParaRPr lang="en-US" sz="1200" dirty="0"/>
           </a:p>
@@ -42603,7 +42510,7 @@
                 <a:ea typeface="Trebuchet MS" pitchFamily="34" charset="-122"/>
                 <a:cs typeface="Trebuchet MS" pitchFamily="34" charset="-120"/>
               </a:rPr>
-              <a:t>senator</a:t>
+              <a:t>conductor</a:t>
             </a:r>
             <a:endParaRPr lang="en-US" sz="1200" dirty="0"/>
           </a:p>
@@ -42669,7 +42576,7 @@
                 <a:ea typeface="Calibri" pitchFamily="34" charset="-122"/>
                 <a:cs typeface="Calibri" pitchFamily="34" charset="-120"/>
               </a:rPr>
-              <a:t>Someone who comes to see a place or person.</a:t>
+              <a:t>A person who is in charge of making a film or running an organisation.</a:t>
             </a:r>
             <a:endParaRPr lang="en-US" sz="1200" dirty="0"/>
           </a:p>
@@ -43164,7 +43071,7 @@
                 <a:ea typeface="Calibri" pitchFamily="34" charset="-122"/>
                 <a:cs typeface="Calibri" pitchFamily="34" charset="-120"/>
               </a:rPr>
-              <a:t>The instructor showed the class how to use the new equipment safely.</a:t>
+              <a:t>The inventor worked in her laboratory for many years before finally creating a brilliant new device.</a:t>
             </a:r>
             <a:endParaRPr lang="en-US" sz="1500" dirty="0"/>
           </a:p>
@@ -43328,7 +43235,7 @@
                 <a:ea typeface="Calibri" pitchFamily="34" charset="-122"/>
                 <a:cs typeface="Calibri" pitchFamily="34" charset="-120"/>
               </a:rPr>
-              <a:t>Our school invited a special visitor to talk about life as an inventor.</a:t>
+              <a:t>Our school visitor spoke to the class about protecting the environment and caring for native animals.</a:t>
             </a:r>
             <a:endParaRPr lang="en-US" sz="1500" dirty="0"/>
           </a:p>
@@ -43492,7 +43399,7 @@
                 <a:ea typeface="Calibri" pitchFamily="34" charset="-122"/>
                 <a:cs typeface="Calibri" pitchFamily="34" charset="-120"/>
               </a:rPr>
-              <a:t>The director called 'action' and the actor began his scene.</a:t>
+              <a:t>The conductor raised his baton and the orchestra began to play a beautiful piece of music.</a:t>
             </a:r>
             <a:endParaRPr lang="en-US" sz="1500" dirty="0"/>
           </a:p>
